--- a/slide/L8_lab_finale.pptx
+++ b/slide/L8_lab_finale.pptx
@@ -17,6 +17,8 @@
     <p:sldId id="265" r:id="rId16"/>
     <p:sldId id="266" r:id="rId17"/>
     <p:sldId id="267" r:id="rId18"/>
+    <p:sldId id="268" r:id="rId19"/>
+    <p:sldId id="269" r:id="rId20"/>
   </p:sldIdLst>
   <p:sldSz cx="12191695" cy="6858000" type="screen4x3"/>
   <p:notesSz cx="6858000" cy="9144000"/>
@@ -3114,7 +3116,7 @@
             <a:avLst/>
           </a:prstGeom>
           <a:solidFill>
-            <a:srgbClr val="0F2D52"/>
+            <a:srgbClr val="081B33"/>
           </a:solidFill>
           <a:ln>
             <a:noFill/>
@@ -3150,8 +3152,8 @@
         </p:nvSpPr>
         <p:spPr>
           <a:xfrm>
-            <a:off x="0" y="914400"/>
-            <a:ext cx="365760" cy="2286000"/>
+            <a:off x="0" y="0"/>
+            <a:ext cx="12191695" cy="137160"/>
           </a:xfrm>
           <a:prstGeom prst="rect">
             <a:avLst/>
@@ -3187,14 +3189,186 @@
       </p:sp>
       <p:sp>
         <p:nvSpPr>
-          <p:cNvPr id="4" name="TextBox 3"/>
+          <p:cNvPr id="4" name="Oval 3"/>
+          <p:cNvSpPr/>
+          <p:nvPr/>
+        </p:nvSpPr>
+        <p:spPr>
+          <a:xfrm>
+            <a:off x="8686800" y="-914400"/>
+            <a:ext cx="2743200" cy="2743200"/>
+          </a:xfrm>
+          <a:prstGeom prst="ellipse">
+            <a:avLst/>
+          </a:prstGeom>
+          <a:noFill/>
+          <a:ln w="25400">
+            <a:solidFill>
+              <a:srgbClr val="00A0B0"/>
+            </a:solidFill>
+          </a:ln>
+        </p:spPr>
+        <p:style>
+          <a:lnRef idx="1">
+            <a:schemeClr val="accent1"/>
+          </a:lnRef>
+          <a:fillRef idx="3">
+            <a:schemeClr val="accent1"/>
+          </a:fillRef>
+          <a:effectRef idx="2">
+            <a:schemeClr val="accent1"/>
+          </a:effectRef>
+          <a:fontRef idx="minor">
+            <a:schemeClr val="lt1"/>
+          </a:fontRef>
+        </p:style>
+        <p:txBody>
+          <a:bodyPr rtlCol="0" anchor="ctr"/>
+          <a:lstStyle/>
+          <a:p>
+            <a:pPr algn="ctr"/>
+          </a:p>
+        </p:txBody>
+      </p:sp>
+      <p:sp>
+        <p:nvSpPr>
+          <p:cNvPr id="5" name="Oval 4"/>
+          <p:cNvSpPr/>
+          <p:nvPr/>
+        </p:nvSpPr>
+        <p:spPr>
+          <a:xfrm>
+            <a:off x="10515600" y="1371600"/>
+            <a:ext cx="1828800" cy="1828800"/>
+          </a:xfrm>
+          <a:prstGeom prst="ellipse">
+            <a:avLst/>
+          </a:prstGeom>
+          <a:noFill/>
+          <a:ln w="25400">
+            <a:solidFill>
+              <a:srgbClr val="00A0B0"/>
+            </a:solidFill>
+          </a:ln>
+        </p:spPr>
+        <p:style>
+          <a:lnRef idx="1">
+            <a:schemeClr val="accent1"/>
+          </a:lnRef>
+          <a:fillRef idx="3">
+            <a:schemeClr val="accent1"/>
+          </a:fillRef>
+          <a:effectRef idx="2">
+            <a:schemeClr val="accent1"/>
+          </a:effectRef>
+          <a:fontRef idx="minor">
+            <a:schemeClr val="lt1"/>
+          </a:fontRef>
+        </p:style>
+        <p:txBody>
+          <a:bodyPr rtlCol="0" anchor="ctr"/>
+          <a:lstStyle/>
+          <a:p>
+            <a:pPr algn="ctr"/>
+          </a:p>
+        </p:txBody>
+      </p:sp>
+      <p:sp>
+        <p:nvSpPr>
+          <p:cNvPr id="6" name="Oval 5"/>
+          <p:cNvSpPr/>
+          <p:nvPr/>
+        </p:nvSpPr>
+        <p:spPr>
+          <a:xfrm>
+            <a:off x="8458200" y="3429000"/>
+            <a:ext cx="2286000" cy="2286000"/>
+          </a:xfrm>
+          <a:prstGeom prst="ellipse">
+            <a:avLst/>
+          </a:prstGeom>
+          <a:noFill/>
+          <a:ln w="25400">
+            <a:solidFill>
+              <a:srgbClr val="00A0B0"/>
+            </a:solidFill>
+          </a:ln>
+        </p:spPr>
+        <p:style>
+          <a:lnRef idx="1">
+            <a:schemeClr val="accent1"/>
+          </a:lnRef>
+          <a:fillRef idx="3">
+            <a:schemeClr val="accent1"/>
+          </a:fillRef>
+          <a:effectRef idx="2">
+            <a:schemeClr val="accent1"/>
+          </a:effectRef>
+          <a:fontRef idx="minor">
+            <a:schemeClr val="lt1"/>
+          </a:fontRef>
+        </p:style>
+        <p:txBody>
+          <a:bodyPr rtlCol="0" anchor="ctr"/>
+          <a:lstStyle/>
+          <a:p>
+            <a:pPr algn="ctr"/>
+          </a:p>
+        </p:txBody>
+      </p:sp>
+      <p:sp>
+        <p:nvSpPr>
+          <p:cNvPr id="7" name="Rectangle 6"/>
+          <p:cNvSpPr/>
+          <p:nvPr/>
+        </p:nvSpPr>
+        <p:spPr>
+          <a:xfrm>
+            <a:off x="0" y="2286000"/>
+            <a:ext cx="228600" cy="2743200"/>
+          </a:xfrm>
+          <a:prstGeom prst="rect">
+            <a:avLst/>
+          </a:prstGeom>
+          <a:solidFill>
+            <a:srgbClr val="00A0B0"/>
+          </a:solidFill>
+          <a:ln>
+            <a:noFill/>
+          </a:ln>
+        </p:spPr>
+        <p:style>
+          <a:lnRef idx="1">
+            <a:schemeClr val="accent1"/>
+          </a:lnRef>
+          <a:fillRef idx="3">
+            <a:schemeClr val="accent1"/>
+          </a:fillRef>
+          <a:effectRef idx="2">
+            <a:schemeClr val="accent1"/>
+          </a:effectRef>
+          <a:fontRef idx="minor">
+            <a:schemeClr val="lt1"/>
+          </a:fontRef>
+        </p:style>
+        <p:txBody>
+          <a:bodyPr rtlCol="0" anchor="ctr"/>
+          <a:lstStyle/>
+          <a:p>
+            <a:pPr algn="ctr"/>
+          </a:p>
+        </p:txBody>
+      </p:sp>
+      <p:sp>
+        <p:nvSpPr>
+          <p:cNvPr id="8" name="TextBox 7"/>
           <p:cNvSpPr txBox="1"/>
           <p:nvPr/>
         </p:nvSpPr>
         <p:spPr>
           <a:xfrm>
-            <a:off x="731520" y="914400"/>
-            <a:ext cx="10058400" cy="548640"/>
+            <a:off x="548640" y="2286000"/>
+            <a:ext cx="7315200" cy="457200"/>
           </a:xfrm>
           <a:prstGeom prst="rect">
             <a:avLst/>
@@ -3209,7 +3383,7 @@
           <a:p>
             <a:pPr algn="l"/>
             <a:r>
-              <a:rPr sz="1800" b="1" i="0">
+              <a:rPr sz="1600" b="1" i="0">
                 <a:solidFill>
                   <a:srgbClr val="00A0B0"/>
                 </a:solidFill>
@@ -3222,14 +3396,14 @@
       </p:sp>
       <p:sp>
         <p:nvSpPr>
-          <p:cNvPr id="5" name="TextBox 4"/>
+          <p:cNvPr id="9" name="TextBox 8"/>
           <p:cNvSpPr txBox="1"/>
           <p:nvPr/>
         </p:nvSpPr>
         <p:spPr>
           <a:xfrm>
-            <a:off x="731520" y="1554480"/>
-            <a:ext cx="10058400" cy="1828800"/>
+            <a:off x="548640" y="2743200"/>
+            <a:ext cx="10515600" cy="2011680"/>
           </a:xfrm>
           <a:prstGeom prst="rect">
             <a:avLst/>
@@ -3244,7 +3418,7 @@
           <a:p>
             <a:pPr algn="l"/>
             <a:r>
-              <a:rPr sz="5400" b="1" i="0">
+              <a:rPr sz="5600" b="1" i="0">
                 <a:solidFill>
                   <a:srgbClr val="FFFFFF"/>
                 </a:solidFill>
@@ -3257,14 +3431,14 @@
       </p:sp>
       <p:sp>
         <p:nvSpPr>
-          <p:cNvPr id="6" name="TextBox 5"/>
+          <p:cNvPr id="10" name="TextBox 9"/>
           <p:cNvSpPr txBox="1"/>
           <p:nvPr/>
         </p:nvSpPr>
         <p:spPr>
           <a:xfrm>
-            <a:off x="731520" y="3566160"/>
-            <a:ext cx="10058400" cy="1097280"/>
+            <a:off x="548640" y="4572000"/>
+            <a:ext cx="10058400" cy="914400"/>
           </a:xfrm>
           <a:prstGeom prst="rect">
             <a:avLst/>
@@ -3279,27 +3453,107 @@
           <a:p>
             <a:pPr algn="l"/>
             <a:r>
-              <a:rPr sz="2400" b="0" i="1">
+              <a:rPr sz="2200" b="0" i="1">
+                <a:solidFill>
+                  <a:srgbClr val="6FD8E0"/>
+                </a:solidFill>
+                <a:latin typeface="Calibri"/>
+              </a:rPr>
+              <a:t>Sei un junior security analyst. Trova le vulnerabilità.</a:t>
+            </a:r>
+          </a:p>
+        </p:txBody>
+      </p:sp>
+      <p:sp>
+        <p:nvSpPr>
+          <p:cNvPr id="11" name="Rounded Rectangle 10"/>
+          <p:cNvSpPr/>
+          <p:nvPr/>
+        </p:nvSpPr>
+        <p:spPr>
+          <a:xfrm>
+            <a:off x="548640" y="5669280"/>
+            <a:ext cx="2011680" cy="411480"/>
+          </a:xfrm>
+          <a:prstGeom prst="roundRect">
+            <a:avLst>
+              <a:gd name="adj" fmla="val 8000"/>
+            </a:avLst>
+          </a:prstGeom>
+          <a:solidFill>
+            <a:srgbClr val="00A0B0"/>
+          </a:solidFill>
+          <a:ln>
+            <a:noFill/>
+          </a:ln>
+        </p:spPr>
+        <p:style>
+          <a:lnRef idx="1">
+            <a:schemeClr val="accent1"/>
+          </a:lnRef>
+          <a:fillRef idx="3">
+            <a:schemeClr val="accent1"/>
+          </a:fillRef>
+          <a:effectRef idx="2">
+            <a:schemeClr val="accent1"/>
+          </a:effectRef>
+          <a:fontRef idx="minor">
+            <a:schemeClr val="lt1"/>
+          </a:fontRef>
+        </p:style>
+        <p:txBody>
+          <a:bodyPr rtlCol="0" anchor="ctr"/>
+          <a:lstStyle/>
+          <a:p>
+            <a:pPr algn="ctr"/>
+          </a:p>
+        </p:txBody>
+      </p:sp>
+      <p:sp>
+        <p:nvSpPr>
+          <p:cNvPr id="12" name="TextBox 11"/>
+          <p:cNvSpPr txBox="1"/>
+          <p:nvPr/>
+        </p:nvSpPr>
+        <p:spPr>
+          <a:xfrm>
+            <a:off x="548640" y="5669280"/>
+            <a:ext cx="2011680" cy="411480"/>
+          </a:xfrm>
+          <a:prstGeom prst="rect">
+            <a:avLst/>
+          </a:prstGeom>
+          <a:noFill/>
+        </p:spPr>
+        <p:txBody>
+          <a:bodyPr wrap="square" lIns="45720" rIns="45720" tIns="18288" bIns="18288" anchor="ctr">
+            <a:spAutoFit/>
+          </a:bodyPr>
+          <a:lstStyle/>
+          <a:p>
+            <a:pPr algn="ctr"/>
+            <a:r>
+              <a:rPr sz="1200" b="1" i="0">
                 <a:solidFill>
                   <a:srgbClr val="FFFFFF"/>
                 </a:solidFill>
                 <a:latin typeface="Calibri"/>
               </a:rPr>
-              <a:t>Sei un junior security analyst. Trova le vulnerabilità.</a:t>
-            </a:r>
-          </a:p>
-        </p:txBody>
-      </p:sp>
-      <p:sp>
-        <p:nvSpPr>
-          <p:cNvPr id="7" name="TextBox 6"/>
+              <a:t>⏱  Lezione 8 · 2 ore — VERIFICA</a:t>
+            </a:r>
+          </a:p>
+        </p:txBody>
+      </p:sp>
+      <p:sp>
+        <p:nvSpPr>
+          <p:cNvPr id="13" name="TextBox 12"/>
           <p:cNvSpPr txBox="1"/>
           <p:nvPr/>
         </p:nvSpPr>
         <p:spPr>
           <a:xfrm>
-            <a:off x="731520" y="5029200"/>
-            <a:ext cx="10058400" cy="457200"/>
+            <a:off x="548640" y="6263640"/>
+            <a:ext cx="10972800" cy="365760"/>
           </a:xfrm>
           <a:prstGeom prst="rect">
             <a:avLst/>
@@ -3314,83 +3568,13 @@
           <a:p>
             <a:pPr algn="l"/>
             <a:r>
-              <a:rPr sz="1800" b="1" i="0">
-                <a:solidFill>
-                  <a:srgbClr val="00A0B0"/>
-                </a:solidFill>
-                <a:latin typeface="Calibri"/>
-              </a:rPr>
-              <a:t>⏱  Lezione 8 · 2 ore — VERIFICA</a:t>
-            </a:r>
-          </a:p>
-        </p:txBody>
-      </p:sp>
-      <p:sp>
-        <p:nvSpPr>
-          <p:cNvPr id="8" name="TextBox 7"/>
-          <p:cNvSpPr txBox="1"/>
-          <p:nvPr/>
-        </p:nvSpPr>
-        <p:spPr>
-          <a:xfrm>
-            <a:off x="731520" y="5943600"/>
-            <a:ext cx="10058400" cy="457200"/>
-          </a:xfrm>
-          <a:prstGeom prst="rect">
-            <a:avLst/>
-          </a:prstGeom>
-          <a:noFill/>
-        </p:spPr>
-        <p:txBody>
-          <a:bodyPr wrap="square" lIns="45720" rIns="45720" tIns="18288" bIns="18288" anchor="t">
-            <a:spAutoFit/>
-          </a:bodyPr>
-          <a:lstStyle/>
-          <a:p>
-            <a:pPr algn="l"/>
-            <a:r>
-              <a:rPr sz="1200" b="0" i="0">
-                <a:solidFill>
-                  <a:srgbClr val="FFFFFF"/>
-                </a:solidFill>
-                <a:latin typeface="Calibri"/>
-              </a:rPr>
-              <a:t>Corso IFTS STEM · Specialista nelle Tecniche di Evoluzione e Manutenzione del Software</a:t>
-            </a:r>
-          </a:p>
-        </p:txBody>
-      </p:sp>
-      <p:sp>
-        <p:nvSpPr>
-          <p:cNvPr id="9" name="TextBox 8"/>
-          <p:cNvSpPr txBox="1"/>
-          <p:nvPr/>
-        </p:nvSpPr>
-        <p:spPr>
-          <a:xfrm>
-            <a:off x="731520" y="6263640"/>
-            <a:ext cx="10058400" cy="365760"/>
-          </a:xfrm>
-          <a:prstGeom prst="rect">
-            <a:avLst/>
-          </a:prstGeom>
-          <a:noFill/>
-        </p:spPr>
-        <p:txBody>
-          <a:bodyPr wrap="square" lIns="45720" rIns="45720" tIns="18288" bIns="18288" anchor="t">
-            <a:spAutoFit/>
-          </a:bodyPr>
-          <a:lstStyle/>
-          <a:p>
-            <a:pPr algn="l"/>
-            <a:r>
-              <a:rPr sz="1100" b="0" i="1">
-                <a:solidFill>
-                  <a:srgbClr val="FFFFFF"/>
-                </a:solidFill>
-                <a:latin typeface="Calibri"/>
-              </a:rPr>
-              <a:t>Ing. Alessandro Manneschi · Anno formativo 2024/2025</a:t>
+              <a:rPr sz="1000" b="0" i="0">
+                <a:solidFill>
+                  <a:srgbClr val="CBD0D8"/>
+                </a:solidFill>
+                <a:latin typeface="Calibri"/>
+              </a:rPr>
+              <a:t>Corso IFTS STEM · Ing. Alessandro Manneschi · 2024/2025</a:t>
             </a:r>
           </a:p>
         </p:txBody>
@@ -3422,13 +3606,13 @@
         <p:spPr>
           <a:xfrm>
             <a:off x="0" y="0"/>
-            <a:ext cx="12191695" cy="777240"/>
+            <a:ext cx="4114800" cy="6858000"/>
           </a:xfrm>
           <a:prstGeom prst="rect">
             <a:avLst/>
           </a:prstGeom>
           <a:solidFill>
-            <a:srgbClr val="0F2D52"/>
+            <a:srgbClr val="081B33"/>
           </a:solidFill>
           <a:ln>
             <a:noFill/>
@@ -3458,14 +3642,100 @@
       </p:sp>
       <p:sp>
         <p:nvSpPr>
-          <p:cNvPr id="3" name="TextBox 2"/>
+          <p:cNvPr id="3" name="Rectangle 2"/>
+          <p:cNvSpPr/>
+          <p:nvPr/>
+        </p:nvSpPr>
+        <p:spPr>
+          <a:xfrm>
+            <a:off x="4114800" y="0"/>
+            <a:ext cx="8046720" cy="6858000"/>
+          </a:xfrm>
+          <a:prstGeom prst="rect">
+            <a:avLst/>
+          </a:prstGeom>
+          <a:solidFill>
+            <a:srgbClr val="F1F4F8"/>
+          </a:solidFill>
+          <a:ln>
+            <a:noFill/>
+          </a:ln>
+        </p:spPr>
+        <p:style>
+          <a:lnRef idx="1">
+            <a:schemeClr val="accent1"/>
+          </a:lnRef>
+          <a:fillRef idx="3">
+            <a:schemeClr val="accent1"/>
+          </a:fillRef>
+          <a:effectRef idx="2">
+            <a:schemeClr val="accent1"/>
+          </a:effectRef>
+          <a:fontRef idx="minor">
+            <a:schemeClr val="lt1"/>
+          </a:fontRef>
+        </p:style>
+        <p:txBody>
+          <a:bodyPr rtlCol="0" anchor="ctr"/>
+          <a:lstStyle/>
+          <a:p>
+            <a:pPr algn="ctr"/>
+          </a:p>
+        </p:txBody>
+      </p:sp>
+      <p:sp>
+        <p:nvSpPr>
+          <p:cNvPr id="4" name="Rectangle 3"/>
+          <p:cNvSpPr/>
+          <p:nvPr/>
+        </p:nvSpPr>
+        <p:spPr>
+          <a:xfrm>
+            <a:off x="4114800" y="0"/>
+            <a:ext cx="137160" cy="6858000"/>
+          </a:xfrm>
+          <a:prstGeom prst="rect">
+            <a:avLst/>
+          </a:prstGeom>
+          <a:solidFill>
+            <a:srgbClr val="00A0B0"/>
+          </a:solidFill>
+          <a:ln>
+            <a:noFill/>
+          </a:ln>
+        </p:spPr>
+        <p:style>
+          <a:lnRef idx="1">
+            <a:schemeClr val="accent1"/>
+          </a:lnRef>
+          <a:fillRef idx="3">
+            <a:schemeClr val="accent1"/>
+          </a:fillRef>
+          <a:effectRef idx="2">
+            <a:schemeClr val="accent1"/>
+          </a:effectRef>
+          <a:fontRef idx="minor">
+            <a:schemeClr val="lt1"/>
+          </a:fontRef>
+        </p:style>
+        <p:txBody>
+          <a:bodyPr rtlCol="0" anchor="ctr"/>
+          <a:lstStyle/>
+          <a:p>
+            <a:pPr algn="ctr"/>
+          </a:p>
+        </p:txBody>
+      </p:sp>
+      <p:sp>
+        <p:nvSpPr>
+          <p:cNvPr id="5" name="TextBox 4"/>
           <p:cNvSpPr txBox="1"/>
           <p:nvPr/>
         </p:nvSpPr>
         <p:spPr>
           <a:xfrm>
-            <a:off x="457200" y="164592"/>
-            <a:ext cx="10972800" cy="502920"/>
+            <a:off x="274320" y="2103120"/>
+            <a:ext cx="3657600" cy="2286000"/>
           </a:xfrm>
           <a:prstGeom prst="rect">
             <a:avLst/>
@@ -3473,34 +3743,34 @@
           <a:noFill/>
         </p:spPr>
         <p:txBody>
-          <a:bodyPr wrap="square" lIns="45720" rIns="45720" tIns="18288" bIns="18288" anchor="ctr">
+          <a:bodyPr wrap="square" lIns="45720" rIns="45720" tIns="18288" bIns="18288" anchor="t">
             <a:spAutoFit/>
           </a:bodyPr>
           <a:lstStyle/>
           <a:p>
-            <a:pPr algn="l"/>
-            <a:r>
-              <a:rPr sz="2400" b="1" i="0">
-                <a:solidFill>
-                  <a:srgbClr val="FFFFFF"/>
-                </a:solidFill>
-                <a:latin typeface="Calibri"/>
-              </a:rPr>
-              <a:t>Cosa porti a casa</a:t>
-            </a:r>
-          </a:p>
-        </p:txBody>
-      </p:sp>
-      <p:sp>
-        <p:nvSpPr>
-          <p:cNvPr id="4" name="TextBox 3"/>
+            <a:pPr algn="ctr"/>
+            <a:r>
+              <a:rPr sz="17000" b="1" i="0">
+                <a:solidFill>
+                  <a:srgbClr val="00A0B0"/>
+                </a:solidFill>
+                <a:latin typeface="Calibri"/>
+              </a:rPr>
+              <a:t>02</a:t>
+            </a:r>
+          </a:p>
+        </p:txBody>
+      </p:sp>
+      <p:sp>
+        <p:nvSpPr>
+          <p:cNvPr id="6" name="TextBox 5"/>
           <p:cNvSpPr txBox="1"/>
           <p:nvPr/>
         </p:nvSpPr>
         <p:spPr>
           <a:xfrm>
-            <a:off x="640080" y="1005840"/>
-            <a:ext cx="10972800" cy="5029200"/>
+            <a:off x="274320" y="4572000"/>
+            <a:ext cx="3657600" cy="457200"/>
           </a:xfrm>
           <a:prstGeom prst="rect">
             <a:avLst/>
@@ -3508,140 +3778,97 @@
           <a:noFill/>
         </p:spPr>
         <p:txBody>
-          <a:bodyPr wrap="square">
+          <a:bodyPr wrap="square" lIns="45720" rIns="45720" tIns="18288" bIns="18288" anchor="t">
             <a:spAutoFit/>
           </a:bodyPr>
           <a:lstStyle/>
           <a:p>
-            <a:pPr>
-              <a:lnSpc>
-                <a:spcPct val="150000"/>
-              </a:lnSpc>
-            </a:pPr>
-            <a:r>
-              <a:rPr sz="2000" b="1">
-                <a:solidFill>
-                  <a:srgbClr val="00A0B0"/>
-                </a:solidFill>
-                <a:latin typeface="Calibri"/>
-              </a:rPr>
-              <a:t>▸  </a:t>
-            </a:r>
-            <a:r>
-              <a:rPr sz="2000">
-                <a:solidFill>
-                  <a:srgbClr val="1A1A2E"/>
-                </a:solidFill>
-                <a:latin typeface="Calibri"/>
-              </a:rPr>
-              <a:t>1. La sicurezza si PROGETTA, non si aggiunge</a:t>
-            </a:r>
-          </a:p>
-          <a:p>
-            <a:pPr>
-              <a:lnSpc>
-                <a:spcPct val="150000"/>
-              </a:lnSpc>
-            </a:pPr>
-            <a:r>
-              <a:rPr sz="2000" b="1">
-                <a:solidFill>
-                  <a:srgbClr val="00A0B0"/>
-                </a:solidFill>
-                <a:latin typeface="Calibri"/>
-              </a:rPr>
-              <a:t>▸  </a:t>
-            </a:r>
-            <a:r>
-              <a:rPr sz="2000">
-                <a:solidFill>
-                  <a:srgbClr val="1A1A2E"/>
-                </a:solidFill>
-                <a:latin typeface="Calibri"/>
-              </a:rPr>
-              <a:t>2. DEFENSE IN DEPTH sempre. Mai una sola difesa.</a:t>
-            </a:r>
-          </a:p>
-          <a:p>
-            <a:pPr>
-              <a:lnSpc>
-                <a:spcPct val="150000"/>
-              </a:lnSpc>
-            </a:pPr>
-            <a:r>
-              <a:rPr sz="2000" b="1">
-                <a:solidFill>
-                  <a:srgbClr val="00A0B0"/>
-                </a:solidFill>
-                <a:latin typeface="Calibri"/>
-              </a:rPr>
-              <a:t>▸  </a:t>
-            </a:r>
-            <a:r>
-              <a:rPr sz="2000">
-                <a:solidFill>
-                  <a:srgbClr val="1A1A2E"/>
-                </a:solidFill>
-                <a:latin typeface="Calibri"/>
-              </a:rPr>
-              <a:t>3. MENTALITÀ AVVERSARIA. Cosa fa che non dovrebbe?</a:t>
-            </a:r>
-          </a:p>
-          <a:p>
-            <a:pPr>
-              <a:lnSpc>
-                <a:spcPct val="150000"/>
-              </a:lnSpc>
-            </a:pPr>
-            <a:r>
-              <a:rPr sz="2000" b="1">
-                <a:solidFill>
-                  <a:srgbClr val="00A0B0"/>
-                </a:solidFill>
-                <a:latin typeface="Calibri"/>
-              </a:rPr>
-              <a:t>▸  </a:t>
-            </a:r>
-            <a:r>
-              <a:rPr sz="2000">
-                <a:solidFill>
-                  <a:srgbClr val="1A1A2E"/>
-                </a:solidFill>
-                <a:latin typeface="Calibri"/>
-              </a:rPr>
-              <a:t>4. I fondamentali tecnici OWASP — li riconosci a vista, li correggi a memoria</a:t>
-            </a:r>
-          </a:p>
-          <a:p>
-            <a:pPr>
-              <a:lnSpc>
-                <a:spcPct val="150000"/>
-              </a:lnSpc>
-            </a:pPr>
-            <a:r>
-              <a:rPr sz="2000" b="1">
-                <a:solidFill>
-                  <a:srgbClr val="00A0B0"/>
-                </a:solidFill>
-                <a:latin typeface="Calibri"/>
-              </a:rPr>
-              <a:t>▸  </a:t>
-            </a:r>
-            <a:r>
-              <a:rPr sz="2000">
-                <a:solidFill>
-                  <a:srgbClr val="1A1A2E"/>
-                </a:solidFill>
-                <a:latin typeface="Calibri"/>
-              </a:rPr>
-              <a:t>5. DOCUMENTA, TESTA, AUTOMATIZZA</a:t>
+            <a:pPr algn="ctr"/>
+            <a:r>
+              <a:rPr sz="2000" b="1" i="0">
+                <a:solidFill>
+                  <a:srgbClr val="6FD8E0"/>
+                </a:solidFill>
+                <a:latin typeface="Calibri"/>
+              </a:rPr>
+              <a:t>PARTE</a:t>
+            </a:r>
+          </a:p>
+        </p:txBody>
+      </p:sp>
+      <p:sp>
+        <p:nvSpPr>
+          <p:cNvPr id="7" name="TextBox 6"/>
+          <p:cNvSpPr txBox="1"/>
+          <p:nvPr/>
+        </p:nvSpPr>
+        <p:spPr>
+          <a:xfrm>
+            <a:off x="4572000" y="2286000"/>
+            <a:ext cx="7315200" cy="1645920"/>
+          </a:xfrm>
+          <a:prstGeom prst="rect">
+            <a:avLst/>
+          </a:prstGeom>
+          <a:noFill/>
+        </p:spPr>
+        <p:txBody>
+          <a:bodyPr wrap="square" lIns="45720" rIns="45720" tIns="18288" bIns="18288" anchor="t">
+            <a:spAutoFit/>
+          </a:bodyPr>
+          <a:lstStyle/>
+          <a:p>
+            <a:pPr algn="l"/>
+            <a:r>
+              <a:rPr sz="4400" b="1" i="0">
+                <a:solidFill>
+                  <a:srgbClr val="0F2D52"/>
+                </a:solidFill>
+                <a:latin typeface="Calibri"/>
+              </a:rPr>
+              <a:t>Cosa porti via dal corso</a:t>
+            </a:r>
+          </a:p>
+        </p:txBody>
+      </p:sp>
+      <p:sp>
+        <p:nvSpPr>
+          <p:cNvPr id="8" name="TextBox 7"/>
+          <p:cNvSpPr txBox="1"/>
+          <p:nvPr/>
+        </p:nvSpPr>
+        <p:spPr>
+          <a:xfrm>
+            <a:off x="4572000" y="3931920"/>
+            <a:ext cx="7315200" cy="1828800"/>
+          </a:xfrm>
+          <a:prstGeom prst="rect">
+            <a:avLst/>
+          </a:prstGeom>
+          <a:noFill/>
+        </p:spPr>
+        <p:txBody>
+          <a:bodyPr wrap="square" lIns="45720" rIns="45720" tIns="18288" bIns="18288" anchor="t">
+            <a:spAutoFit/>
+          </a:bodyPr>
+          <a:lstStyle/>
+          <a:p>
+            <a:pPr algn="l"/>
+            <a:r>
+              <a:rPr sz="1800" b="0" i="1">
+                <a:solidFill>
+                  <a:srgbClr val="6B7280"/>
+                </a:solidFill>
+                <a:latin typeface="Calibri"/>
+              </a:rPr>
+              <a:t>5 idee, che ti restano tra 5 anni</a:t>
             </a:r>
           </a:p>
         </p:txBody>
       </p:sp>
       <p:cxnSp>
         <p:nvCxnSpPr>
-          <p:cNvPr id="5" name="Connector 4"/>
+          <p:cNvPr id="9" name="Connector 8"/>
           <p:cNvCxnSpPr/>
           <p:nvPr/>
         </p:nvCxnSpPr>
@@ -3676,14 +3903,14 @@
       </p:cxnSp>
       <p:sp>
         <p:nvSpPr>
-          <p:cNvPr id="6" name="TextBox 5"/>
+          <p:cNvPr id="10" name="TextBox 9"/>
           <p:cNvSpPr txBox="1"/>
           <p:nvPr/>
         </p:nvSpPr>
         <p:spPr>
           <a:xfrm>
             <a:off x="457200" y="6473952"/>
-            <a:ext cx="7315200" cy="320040"/>
+            <a:ext cx="7315200" cy="292608"/>
           </a:xfrm>
           <a:prstGeom prst="rect">
             <a:avLst/>
@@ -3704,21 +3931,21 @@
                 </a:solidFill>
                 <a:latin typeface="Calibri"/>
               </a:rPr>
-              <a:t>Secure Coding · Corso IFTS STEM · A. Manneschi</a:t>
-            </a:r>
-          </a:p>
-        </p:txBody>
-      </p:sp>
-      <p:sp>
-        <p:nvSpPr>
-          <p:cNvPr id="7" name="TextBox 6"/>
+              <a:t>Secure Coding · Corso IFTS STEM · A. Manneschi · 2024/2025</a:t>
+            </a:r>
+          </a:p>
+        </p:txBody>
+      </p:sp>
+      <p:sp>
+        <p:nvSpPr>
+          <p:cNvPr id="11" name="TextBox 10"/>
           <p:cNvSpPr txBox="1"/>
           <p:nvPr/>
         </p:nvSpPr>
         <p:spPr>
           <a:xfrm>
             <a:off x="10515600" y="6473952"/>
-            <a:ext cx="1188720" cy="320040"/>
+            <a:ext cx="1188720" cy="292608"/>
           </a:xfrm>
           <a:prstGeom prst="rect">
             <a:avLst/>
@@ -3739,7 +3966,7 @@
                 </a:solidFill>
                 <a:latin typeface="Calibri"/>
               </a:rPr>
-              <a:t>L8  ·  10/12</a:t>
+              <a:t>L8  ·  10/14</a:t>
             </a:r>
           </a:p>
         </p:txBody>
@@ -3835,21 +4062,64 @@
                 </a:solidFill>
                 <a:latin typeface="Calibri"/>
               </a:rPr>
-              <a:t>Per crescere ancora (gratuito)</a:t>
-            </a:r>
-          </a:p>
-        </p:txBody>
-      </p:sp>
-      <p:sp>
-        <p:nvSpPr>
-          <p:cNvPr id="4" name="TextBox 3"/>
+              <a:t>📌  Cosa portare a casa</a:t>
+            </a:r>
+          </a:p>
+        </p:txBody>
+      </p:sp>
+      <p:sp>
+        <p:nvSpPr>
+          <p:cNvPr id="4" name="Oval 3"/>
+          <p:cNvSpPr/>
+          <p:nvPr/>
+        </p:nvSpPr>
+        <p:spPr>
+          <a:xfrm>
+            <a:off x="914400" y="1440180"/>
+            <a:ext cx="777240" cy="777240"/>
+          </a:xfrm>
+          <a:prstGeom prst="ellipse">
+            <a:avLst/>
+          </a:prstGeom>
+          <a:solidFill>
+            <a:srgbClr val="00A0B0"/>
+          </a:solidFill>
+          <a:ln>
+            <a:noFill/>
+          </a:ln>
+        </p:spPr>
+        <p:style>
+          <a:lnRef idx="1">
+            <a:schemeClr val="accent1"/>
+          </a:lnRef>
+          <a:fillRef idx="3">
+            <a:schemeClr val="accent1"/>
+          </a:fillRef>
+          <a:effectRef idx="2">
+            <a:schemeClr val="accent1"/>
+          </a:effectRef>
+          <a:fontRef idx="minor">
+            <a:schemeClr val="lt1"/>
+          </a:fontRef>
+        </p:style>
+        <p:txBody>
+          <a:bodyPr rtlCol="0" anchor="ctr"/>
+          <a:lstStyle/>
+          <a:p>
+            <a:pPr algn="ctr"/>
+          </a:p>
+        </p:txBody>
+      </p:sp>
+      <p:sp>
+        <p:nvSpPr>
+          <p:cNvPr id="5" name="TextBox 4"/>
           <p:cNvSpPr txBox="1"/>
           <p:nvPr/>
         </p:nvSpPr>
         <p:spPr>
           <a:xfrm>
-            <a:off x="640080" y="1005840"/>
-            <a:ext cx="10972800" cy="5029200"/>
+            <a:off x="914400" y="1440180"/>
+            <a:ext cx="777240" cy="777240"/>
           </a:xfrm>
           <a:prstGeom prst="rect">
             <a:avLst/>
@@ -3857,215 +4127,749 @@
           <a:noFill/>
         </p:spPr>
         <p:txBody>
-          <a:bodyPr wrap="square">
+          <a:bodyPr wrap="square" lIns="45720" rIns="45720" tIns="18288" bIns="18288" anchor="ctr">
             <a:spAutoFit/>
           </a:bodyPr>
           <a:lstStyle/>
           <a:p>
-            <a:pPr>
-              <a:lnSpc>
-                <a:spcPct val="150000"/>
-              </a:lnSpc>
-            </a:pPr>
-            <a:r>
-              <a:rPr sz="2000" b="1">
-                <a:solidFill>
-                  <a:srgbClr val="00A0B0"/>
-                </a:solidFill>
-                <a:latin typeface="Calibri"/>
-              </a:rPr>
-              <a:t>▸  </a:t>
-            </a:r>
-            <a:r>
-              <a:rPr sz="2000">
+            <a:pPr algn="ctr"/>
+            <a:r>
+              <a:rPr sz="2800" b="1" i="0">
+                <a:solidFill>
+                  <a:srgbClr val="FFFFFF"/>
+                </a:solidFill>
+                <a:latin typeface="Calibri"/>
+              </a:rPr>
+              <a:t>1</a:t>
+            </a:r>
+          </a:p>
+        </p:txBody>
+      </p:sp>
+      <p:sp>
+        <p:nvSpPr>
+          <p:cNvPr id="6" name="Rounded Rectangle 5"/>
+          <p:cNvSpPr/>
+          <p:nvPr/>
+        </p:nvSpPr>
+        <p:spPr>
+          <a:xfrm>
+            <a:off x="2011680" y="1440180"/>
+            <a:ext cx="9144000" cy="777240"/>
+          </a:xfrm>
+          <a:prstGeom prst="roundRect">
+            <a:avLst>
+              <a:gd name="adj" fmla="val 8000"/>
+            </a:avLst>
+          </a:prstGeom>
+          <a:solidFill>
+            <a:srgbClr val="FBFBFD"/>
+          </a:solidFill>
+          <a:ln w="19050">
+            <a:solidFill>
+              <a:srgbClr val="00A0B0"/>
+            </a:solidFill>
+          </a:ln>
+        </p:spPr>
+        <p:style>
+          <a:lnRef idx="1">
+            <a:schemeClr val="accent1"/>
+          </a:lnRef>
+          <a:fillRef idx="3">
+            <a:schemeClr val="accent1"/>
+          </a:fillRef>
+          <a:effectRef idx="2">
+            <a:schemeClr val="accent1"/>
+          </a:effectRef>
+          <a:fontRef idx="minor">
+            <a:schemeClr val="lt1"/>
+          </a:fontRef>
+        </p:style>
+        <p:txBody>
+          <a:bodyPr rtlCol="0" anchor="ctr"/>
+          <a:lstStyle/>
+          <a:p>
+            <a:pPr algn="ctr"/>
+          </a:p>
+        </p:txBody>
+      </p:sp>
+      <p:sp>
+        <p:nvSpPr>
+          <p:cNvPr id="7" name="TextBox 6"/>
+          <p:cNvSpPr txBox="1"/>
+          <p:nvPr/>
+        </p:nvSpPr>
+        <p:spPr>
+          <a:xfrm>
+            <a:off x="2286000" y="1440180"/>
+            <a:ext cx="8686800" cy="777240"/>
+          </a:xfrm>
+          <a:prstGeom prst="rect">
+            <a:avLst/>
+          </a:prstGeom>
+          <a:noFill/>
+        </p:spPr>
+        <p:txBody>
+          <a:bodyPr wrap="square" lIns="45720" rIns="45720" tIns="18288" bIns="18288" anchor="ctr">
+            <a:spAutoFit/>
+          </a:bodyPr>
+          <a:lstStyle/>
+          <a:p>
+            <a:pPr algn="l"/>
+            <a:r>
+              <a:rPr sz="1800" b="0" i="0">
                 <a:solidFill>
                   <a:srgbClr val="1A1A2E"/>
                 </a:solidFill>
                 <a:latin typeface="Calibri"/>
               </a:rPr>
-              <a:t>PortSwigger Web Security Academy</a:t>
-            </a:r>
-          </a:p>
-          <a:p>
-            <a:pPr>
-              <a:lnSpc>
-                <a:spcPct val="150000"/>
-              </a:lnSpc>
-            </a:pPr>
-            <a:r>
-              <a:rPr sz="2000" b="1">
-                <a:solidFill>
-                  <a:srgbClr val="00A0B0"/>
-                </a:solidFill>
-                <a:latin typeface="Calibri"/>
-              </a:rPr>
-              <a:t>▸  </a:t>
-            </a:r>
-            <a:r>
-              <a:rPr sz="2000">
+              <a:t>La sicurezza si PROGETTA dall'inizio, non si aggiunge</a:t>
+            </a:r>
+          </a:p>
+        </p:txBody>
+      </p:sp>
+      <p:sp>
+        <p:nvSpPr>
+          <p:cNvPr id="8" name="Oval 7"/>
+          <p:cNvSpPr/>
+          <p:nvPr/>
+        </p:nvSpPr>
+        <p:spPr>
+          <a:xfrm>
+            <a:off x="914400" y="2354580"/>
+            <a:ext cx="777240" cy="777240"/>
+          </a:xfrm>
+          <a:prstGeom prst="ellipse">
+            <a:avLst/>
+          </a:prstGeom>
+          <a:solidFill>
+            <a:srgbClr val="00A0B0"/>
+          </a:solidFill>
+          <a:ln>
+            <a:noFill/>
+          </a:ln>
+        </p:spPr>
+        <p:style>
+          <a:lnRef idx="1">
+            <a:schemeClr val="accent1"/>
+          </a:lnRef>
+          <a:fillRef idx="3">
+            <a:schemeClr val="accent1"/>
+          </a:fillRef>
+          <a:effectRef idx="2">
+            <a:schemeClr val="accent1"/>
+          </a:effectRef>
+          <a:fontRef idx="minor">
+            <a:schemeClr val="lt1"/>
+          </a:fontRef>
+        </p:style>
+        <p:txBody>
+          <a:bodyPr rtlCol="0" anchor="ctr"/>
+          <a:lstStyle/>
+          <a:p>
+            <a:pPr algn="ctr"/>
+          </a:p>
+        </p:txBody>
+      </p:sp>
+      <p:sp>
+        <p:nvSpPr>
+          <p:cNvPr id="9" name="TextBox 8"/>
+          <p:cNvSpPr txBox="1"/>
+          <p:nvPr/>
+        </p:nvSpPr>
+        <p:spPr>
+          <a:xfrm>
+            <a:off x="914400" y="2354580"/>
+            <a:ext cx="777240" cy="777240"/>
+          </a:xfrm>
+          <a:prstGeom prst="rect">
+            <a:avLst/>
+          </a:prstGeom>
+          <a:noFill/>
+        </p:spPr>
+        <p:txBody>
+          <a:bodyPr wrap="square" lIns="45720" rIns="45720" tIns="18288" bIns="18288" anchor="ctr">
+            <a:spAutoFit/>
+          </a:bodyPr>
+          <a:lstStyle/>
+          <a:p>
+            <a:pPr algn="ctr"/>
+            <a:r>
+              <a:rPr sz="2800" b="1" i="0">
+                <a:solidFill>
+                  <a:srgbClr val="FFFFFF"/>
+                </a:solidFill>
+                <a:latin typeface="Calibri"/>
+              </a:rPr>
+              <a:t>2</a:t>
+            </a:r>
+          </a:p>
+        </p:txBody>
+      </p:sp>
+      <p:sp>
+        <p:nvSpPr>
+          <p:cNvPr id="10" name="Rounded Rectangle 9"/>
+          <p:cNvSpPr/>
+          <p:nvPr/>
+        </p:nvSpPr>
+        <p:spPr>
+          <a:xfrm>
+            <a:off x="2011680" y="2354580"/>
+            <a:ext cx="9144000" cy="777240"/>
+          </a:xfrm>
+          <a:prstGeom prst="roundRect">
+            <a:avLst>
+              <a:gd name="adj" fmla="val 8000"/>
+            </a:avLst>
+          </a:prstGeom>
+          <a:solidFill>
+            <a:srgbClr val="FBFBFD"/>
+          </a:solidFill>
+          <a:ln w="19050">
+            <a:solidFill>
+              <a:srgbClr val="00A0B0"/>
+            </a:solidFill>
+          </a:ln>
+        </p:spPr>
+        <p:style>
+          <a:lnRef idx="1">
+            <a:schemeClr val="accent1"/>
+          </a:lnRef>
+          <a:fillRef idx="3">
+            <a:schemeClr val="accent1"/>
+          </a:fillRef>
+          <a:effectRef idx="2">
+            <a:schemeClr val="accent1"/>
+          </a:effectRef>
+          <a:fontRef idx="minor">
+            <a:schemeClr val="lt1"/>
+          </a:fontRef>
+        </p:style>
+        <p:txBody>
+          <a:bodyPr rtlCol="0" anchor="ctr"/>
+          <a:lstStyle/>
+          <a:p>
+            <a:pPr algn="ctr"/>
+          </a:p>
+        </p:txBody>
+      </p:sp>
+      <p:sp>
+        <p:nvSpPr>
+          <p:cNvPr id="11" name="TextBox 10"/>
+          <p:cNvSpPr txBox="1"/>
+          <p:nvPr/>
+        </p:nvSpPr>
+        <p:spPr>
+          <a:xfrm>
+            <a:off x="2286000" y="2354580"/>
+            <a:ext cx="8686800" cy="777240"/>
+          </a:xfrm>
+          <a:prstGeom prst="rect">
+            <a:avLst/>
+          </a:prstGeom>
+          <a:noFill/>
+        </p:spPr>
+        <p:txBody>
+          <a:bodyPr wrap="square" lIns="45720" rIns="45720" tIns="18288" bIns="18288" anchor="ctr">
+            <a:spAutoFit/>
+          </a:bodyPr>
+          <a:lstStyle/>
+          <a:p>
+            <a:pPr algn="l"/>
+            <a:r>
+              <a:rPr sz="1800" b="0" i="0">
                 <a:solidFill>
                   <a:srgbClr val="1A1A2E"/>
                 </a:solidFill>
                 <a:latin typeface="Calibri"/>
               </a:rPr>
-              <a:t>  Il miglior corso gratuito al mondo, lab guidati</a:t>
-            </a:r>
-          </a:p>
-          <a:p>
-            <a:pPr>
-              <a:lnSpc>
-                <a:spcPct val="150000"/>
-              </a:lnSpc>
-            </a:pPr>
-            <a:r>
-              <a:rPr sz="2000" b="1">
-                <a:solidFill>
-                  <a:srgbClr val="00A0B0"/>
-                </a:solidFill>
-                <a:latin typeface="Calibri"/>
-              </a:rPr>
-              <a:t>▸  </a:t>
-            </a:r>
-            <a:r>
-              <a:rPr sz="2000">
+              <a:t>DEFENSE IN DEPTH sempre. Mai una sola difesa.</a:t>
+            </a:r>
+          </a:p>
+        </p:txBody>
+      </p:sp>
+      <p:sp>
+        <p:nvSpPr>
+          <p:cNvPr id="12" name="Oval 11"/>
+          <p:cNvSpPr/>
+          <p:nvPr/>
+        </p:nvSpPr>
+        <p:spPr>
+          <a:xfrm>
+            <a:off x="914400" y="3268980"/>
+            <a:ext cx="777240" cy="777240"/>
+          </a:xfrm>
+          <a:prstGeom prst="ellipse">
+            <a:avLst/>
+          </a:prstGeom>
+          <a:solidFill>
+            <a:srgbClr val="00A0B0"/>
+          </a:solidFill>
+          <a:ln>
+            <a:noFill/>
+          </a:ln>
+        </p:spPr>
+        <p:style>
+          <a:lnRef idx="1">
+            <a:schemeClr val="accent1"/>
+          </a:lnRef>
+          <a:fillRef idx="3">
+            <a:schemeClr val="accent1"/>
+          </a:fillRef>
+          <a:effectRef idx="2">
+            <a:schemeClr val="accent1"/>
+          </a:effectRef>
+          <a:fontRef idx="minor">
+            <a:schemeClr val="lt1"/>
+          </a:fontRef>
+        </p:style>
+        <p:txBody>
+          <a:bodyPr rtlCol="0" anchor="ctr"/>
+          <a:lstStyle/>
+          <a:p>
+            <a:pPr algn="ctr"/>
+          </a:p>
+        </p:txBody>
+      </p:sp>
+      <p:sp>
+        <p:nvSpPr>
+          <p:cNvPr id="13" name="TextBox 12"/>
+          <p:cNvSpPr txBox="1"/>
+          <p:nvPr/>
+        </p:nvSpPr>
+        <p:spPr>
+          <a:xfrm>
+            <a:off x="914400" y="3268980"/>
+            <a:ext cx="777240" cy="777240"/>
+          </a:xfrm>
+          <a:prstGeom prst="rect">
+            <a:avLst/>
+          </a:prstGeom>
+          <a:noFill/>
+        </p:spPr>
+        <p:txBody>
+          <a:bodyPr wrap="square" lIns="45720" rIns="45720" tIns="18288" bIns="18288" anchor="ctr">
+            <a:spAutoFit/>
+          </a:bodyPr>
+          <a:lstStyle/>
+          <a:p>
+            <a:pPr algn="ctr"/>
+            <a:r>
+              <a:rPr sz="2800" b="1" i="0">
+                <a:solidFill>
+                  <a:srgbClr val="FFFFFF"/>
+                </a:solidFill>
+                <a:latin typeface="Calibri"/>
+              </a:rPr>
+              <a:t>3</a:t>
+            </a:r>
+          </a:p>
+        </p:txBody>
+      </p:sp>
+      <p:sp>
+        <p:nvSpPr>
+          <p:cNvPr id="14" name="Rounded Rectangle 13"/>
+          <p:cNvSpPr/>
+          <p:nvPr/>
+        </p:nvSpPr>
+        <p:spPr>
+          <a:xfrm>
+            <a:off x="2011680" y="3268980"/>
+            <a:ext cx="9144000" cy="777240"/>
+          </a:xfrm>
+          <a:prstGeom prst="roundRect">
+            <a:avLst>
+              <a:gd name="adj" fmla="val 8000"/>
+            </a:avLst>
+          </a:prstGeom>
+          <a:solidFill>
+            <a:srgbClr val="FBFBFD"/>
+          </a:solidFill>
+          <a:ln w="19050">
+            <a:solidFill>
+              <a:srgbClr val="00A0B0"/>
+            </a:solidFill>
+          </a:ln>
+        </p:spPr>
+        <p:style>
+          <a:lnRef idx="1">
+            <a:schemeClr val="accent1"/>
+          </a:lnRef>
+          <a:fillRef idx="3">
+            <a:schemeClr val="accent1"/>
+          </a:fillRef>
+          <a:effectRef idx="2">
+            <a:schemeClr val="accent1"/>
+          </a:effectRef>
+          <a:fontRef idx="minor">
+            <a:schemeClr val="lt1"/>
+          </a:fontRef>
+        </p:style>
+        <p:txBody>
+          <a:bodyPr rtlCol="0" anchor="ctr"/>
+          <a:lstStyle/>
+          <a:p>
+            <a:pPr algn="ctr"/>
+          </a:p>
+        </p:txBody>
+      </p:sp>
+      <p:sp>
+        <p:nvSpPr>
+          <p:cNvPr id="15" name="TextBox 14"/>
+          <p:cNvSpPr txBox="1"/>
+          <p:nvPr/>
+        </p:nvSpPr>
+        <p:spPr>
+          <a:xfrm>
+            <a:off x="2286000" y="3268980"/>
+            <a:ext cx="8686800" cy="777240"/>
+          </a:xfrm>
+          <a:prstGeom prst="rect">
+            <a:avLst/>
+          </a:prstGeom>
+          <a:noFill/>
+        </p:spPr>
+        <p:txBody>
+          <a:bodyPr wrap="square" lIns="45720" rIns="45720" tIns="18288" bIns="18288" anchor="ctr">
+            <a:spAutoFit/>
+          </a:bodyPr>
+          <a:lstStyle/>
+          <a:p>
+            <a:pPr algn="l"/>
+            <a:r>
+              <a:rPr sz="1800" b="0" i="0">
                 <a:solidFill>
                   <a:srgbClr val="1A1A2E"/>
                 </a:solidFill>
                 <a:latin typeface="Calibri"/>
               </a:rPr>
-              <a:t/>
-            </a:r>
-          </a:p>
-          <a:p>
-            <a:pPr>
-              <a:lnSpc>
-                <a:spcPct val="150000"/>
-              </a:lnSpc>
-            </a:pPr>
-            <a:r>
-              <a:rPr sz="2000" b="1">
-                <a:solidFill>
-                  <a:srgbClr val="00A0B0"/>
-                </a:solidFill>
-                <a:latin typeface="Calibri"/>
-              </a:rPr>
-              <a:t>▸  </a:t>
-            </a:r>
-            <a:r>
-              <a:rPr sz="2000">
+              <a:t>MENTALITÀ AVVERSARIA. Cosa fa che non dovrebbe?</a:t>
+            </a:r>
+          </a:p>
+        </p:txBody>
+      </p:sp>
+      <p:sp>
+        <p:nvSpPr>
+          <p:cNvPr id="16" name="Oval 15"/>
+          <p:cNvSpPr/>
+          <p:nvPr/>
+        </p:nvSpPr>
+        <p:spPr>
+          <a:xfrm>
+            <a:off x="914400" y="4183380"/>
+            <a:ext cx="777240" cy="777240"/>
+          </a:xfrm>
+          <a:prstGeom prst="ellipse">
+            <a:avLst/>
+          </a:prstGeom>
+          <a:solidFill>
+            <a:srgbClr val="00A0B0"/>
+          </a:solidFill>
+          <a:ln>
+            <a:noFill/>
+          </a:ln>
+        </p:spPr>
+        <p:style>
+          <a:lnRef idx="1">
+            <a:schemeClr val="accent1"/>
+          </a:lnRef>
+          <a:fillRef idx="3">
+            <a:schemeClr val="accent1"/>
+          </a:fillRef>
+          <a:effectRef idx="2">
+            <a:schemeClr val="accent1"/>
+          </a:effectRef>
+          <a:fontRef idx="minor">
+            <a:schemeClr val="lt1"/>
+          </a:fontRef>
+        </p:style>
+        <p:txBody>
+          <a:bodyPr rtlCol="0" anchor="ctr"/>
+          <a:lstStyle/>
+          <a:p>
+            <a:pPr algn="ctr"/>
+          </a:p>
+        </p:txBody>
+      </p:sp>
+      <p:sp>
+        <p:nvSpPr>
+          <p:cNvPr id="17" name="TextBox 16"/>
+          <p:cNvSpPr txBox="1"/>
+          <p:nvPr/>
+        </p:nvSpPr>
+        <p:spPr>
+          <a:xfrm>
+            <a:off x="914400" y="4183380"/>
+            <a:ext cx="777240" cy="777240"/>
+          </a:xfrm>
+          <a:prstGeom prst="rect">
+            <a:avLst/>
+          </a:prstGeom>
+          <a:noFill/>
+        </p:spPr>
+        <p:txBody>
+          <a:bodyPr wrap="square" lIns="45720" rIns="45720" tIns="18288" bIns="18288" anchor="ctr">
+            <a:spAutoFit/>
+          </a:bodyPr>
+          <a:lstStyle/>
+          <a:p>
+            <a:pPr algn="ctr"/>
+            <a:r>
+              <a:rPr sz="2800" b="1" i="0">
+                <a:solidFill>
+                  <a:srgbClr val="FFFFFF"/>
+                </a:solidFill>
+                <a:latin typeface="Calibri"/>
+              </a:rPr>
+              <a:t>4</a:t>
+            </a:r>
+          </a:p>
+        </p:txBody>
+      </p:sp>
+      <p:sp>
+        <p:nvSpPr>
+          <p:cNvPr id="18" name="Rounded Rectangle 17"/>
+          <p:cNvSpPr/>
+          <p:nvPr/>
+        </p:nvSpPr>
+        <p:spPr>
+          <a:xfrm>
+            <a:off x="2011680" y="4183380"/>
+            <a:ext cx="9144000" cy="777240"/>
+          </a:xfrm>
+          <a:prstGeom prst="roundRect">
+            <a:avLst>
+              <a:gd name="adj" fmla="val 8000"/>
+            </a:avLst>
+          </a:prstGeom>
+          <a:solidFill>
+            <a:srgbClr val="FBFBFD"/>
+          </a:solidFill>
+          <a:ln w="19050">
+            <a:solidFill>
+              <a:srgbClr val="00A0B0"/>
+            </a:solidFill>
+          </a:ln>
+        </p:spPr>
+        <p:style>
+          <a:lnRef idx="1">
+            <a:schemeClr val="accent1"/>
+          </a:lnRef>
+          <a:fillRef idx="3">
+            <a:schemeClr val="accent1"/>
+          </a:fillRef>
+          <a:effectRef idx="2">
+            <a:schemeClr val="accent1"/>
+          </a:effectRef>
+          <a:fontRef idx="minor">
+            <a:schemeClr val="lt1"/>
+          </a:fontRef>
+        </p:style>
+        <p:txBody>
+          <a:bodyPr rtlCol="0" anchor="ctr"/>
+          <a:lstStyle/>
+          <a:p>
+            <a:pPr algn="ctr"/>
+          </a:p>
+        </p:txBody>
+      </p:sp>
+      <p:sp>
+        <p:nvSpPr>
+          <p:cNvPr id="19" name="TextBox 18"/>
+          <p:cNvSpPr txBox="1"/>
+          <p:nvPr/>
+        </p:nvSpPr>
+        <p:spPr>
+          <a:xfrm>
+            <a:off x="2286000" y="4183380"/>
+            <a:ext cx="8686800" cy="777240"/>
+          </a:xfrm>
+          <a:prstGeom prst="rect">
+            <a:avLst/>
+          </a:prstGeom>
+          <a:noFill/>
+        </p:spPr>
+        <p:txBody>
+          <a:bodyPr wrap="square" lIns="45720" rIns="45720" tIns="18288" bIns="18288" anchor="ctr">
+            <a:spAutoFit/>
+          </a:bodyPr>
+          <a:lstStyle/>
+          <a:p>
+            <a:pPr algn="l"/>
+            <a:r>
+              <a:rPr sz="1800" b="0" i="0">
                 <a:solidFill>
                   <a:srgbClr val="1A1A2E"/>
                 </a:solidFill>
                 <a:latin typeface="Calibri"/>
               </a:rPr>
-              <a:t>TryHackMe — beginner friendly</a:t>
-            </a:r>
-          </a:p>
-          <a:p>
-            <a:pPr>
-              <a:lnSpc>
-                <a:spcPct val="150000"/>
-              </a:lnSpc>
-            </a:pPr>
-            <a:r>
-              <a:rPr sz="2000" b="1">
-                <a:solidFill>
-                  <a:srgbClr val="00A0B0"/>
-                </a:solidFill>
-                <a:latin typeface="Calibri"/>
-              </a:rPr>
-              <a:t>▸  </a:t>
-            </a:r>
-            <a:r>
-              <a:rPr sz="2000">
+              <a:t>I fondamentali OWASP — riconosci a vista, correggi a memoria</a:t>
+            </a:r>
+          </a:p>
+        </p:txBody>
+      </p:sp>
+      <p:sp>
+        <p:nvSpPr>
+          <p:cNvPr id="20" name="Oval 19"/>
+          <p:cNvSpPr/>
+          <p:nvPr/>
+        </p:nvSpPr>
+        <p:spPr>
+          <a:xfrm>
+            <a:off x="914400" y="5097780"/>
+            <a:ext cx="777240" cy="777240"/>
+          </a:xfrm>
+          <a:prstGeom prst="ellipse">
+            <a:avLst/>
+          </a:prstGeom>
+          <a:solidFill>
+            <a:srgbClr val="00A0B0"/>
+          </a:solidFill>
+          <a:ln>
+            <a:noFill/>
+          </a:ln>
+        </p:spPr>
+        <p:style>
+          <a:lnRef idx="1">
+            <a:schemeClr val="accent1"/>
+          </a:lnRef>
+          <a:fillRef idx="3">
+            <a:schemeClr val="accent1"/>
+          </a:fillRef>
+          <a:effectRef idx="2">
+            <a:schemeClr val="accent1"/>
+          </a:effectRef>
+          <a:fontRef idx="minor">
+            <a:schemeClr val="lt1"/>
+          </a:fontRef>
+        </p:style>
+        <p:txBody>
+          <a:bodyPr rtlCol="0" anchor="ctr"/>
+          <a:lstStyle/>
+          <a:p>
+            <a:pPr algn="ctr"/>
+          </a:p>
+        </p:txBody>
+      </p:sp>
+      <p:sp>
+        <p:nvSpPr>
+          <p:cNvPr id="21" name="TextBox 20"/>
+          <p:cNvSpPr txBox="1"/>
+          <p:nvPr/>
+        </p:nvSpPr>
+        <p:spPr>
+          <a:xfrm>
+            <a:off x="914400" y="5097780"/>
+            <a:ext cx="777240" cy="777240"/>
+          </a:xfrm>
+          <a:prstGeom prst="rect">
+            <a:avLst/>
+          </a:prstGeom>
+          <a:noFill/>
+        </p:spPr>
+        <p:txBody>
+          <a:bodyPr wrap="square" lIns="45720" rIns="45720" tIns="18288" bIns="18288" anchor="ctr">
+            <a:spAutoFit/>
+          </a:bodyPr>
+          <a:lstStyle/>
+          <a:p>
+            <a:pPr algn="ctr"/>
+            <a:r>
+              <a:rPr sz="2800" b="1" i="0">
+                <a:solidFill>
+                  <a:srgbClr val="FFFFFF"/>
+                </a:solidFill>
+                <a:latin typeface="Calibri"/>
+              </a:rPr>
+              <a:t>5</a:t>
+            </a:r>
+          </a:p>
+        </p:txBody>
+      </p:sp>
+      <p:sp>
+        <p:nvSpPr>
+          <p:cNvPr id="22" name="Rounded Rectangle 21"/>
+          <p:cNvSpPr/>
+          <p:nvPr/>
+        </p:nvSpPr>
+        <p:spPr>
+          <a:xfrm>
+            <a:off x="2011680" y="5097780"/>
+            <a:ext cx="9144000" cy="777240"/>
+          </a:xfrm>
+          <a:prstGeom prst="roundRect">
+            <a:avLst>
+              <a:gd name="adj" fmla="val 8000"/>
+            </a:avLst>
+          </a:prstGeom>
+          <a:solidFill>
+            <a:srgbClr val="FBFBFD"/>
+          </a:solidFill>
+          <a:ln w="19050">
+            <a:solidFill>
+              <a:srgbClr val="00A0B0"/>
+            </a:solidFill>
+          </a:ln>
+        </p:spPr>
+        <p:style>
+          <a:lnRef idx="1">
+            <a:schemeClr val="accent1"/>
+          </a:lnRef>
+          <a:fillRef idx="3">
+            <a:schemeClr val="accent1"/>
+          </a:fillRef>
+          <a:effectRef idx="2">
+            <a:schemeClr val="accent1"/>
+          </a:effectRef>
+          <a:fontRef idx="minor">
+            <a:schemeClr val="lt1"/>
+          </a:fontRef>
+        </p:style>
+        <p:txBody>
+          <a:bodyPr rtlCol="0" anchor="ctr"/>
+          <a:lstStyle/>
+          <a:p>
+            <a:pPr algn="ctr"/>
+          </a:p>
+        </p:txBody>
+      </p:sp>
+      <p:sp>
+        <p:nvSpPr>
+          <p:cNvPr id="23" name="TextBox 22"/>
+          <p:cNvSpPr txBox="1"/>
+          <p:nvPr/>
+        </p:nvSpPr>
+        <p:spPr>
+          <a:xfrm>
+            <a:off x="2286000" y="5097780"/>
+            <a:ext cx="8686800" cy="777240"/>
+          </a:xfrm>
+          <a:prstGeom prst="rect">
+            <a:avLst/>
+          </a:prstGeom>
+          <a:noFill/>
+        </p:spPr>
+        <p:txBody>
+          <a:bodyPr wrap="square" lIns="45720" rIns="45720" tIns="18288" bIns="18288" anchor="ctr">
+            <a:spAutoFit/>
+          </a:bodyPr>
+          <a:lstStyle/>
+          <a:p>
+            <a:pPr algn="l"/>
+            <a:r>
+              <a:rPr sz="1800" b="0" i="0">
                 <a:solidFill>
                   <a:srgbClr val="1A1A2E"/>
                 </a:solidFill>
                 <a:latin typeface="Calibri"/>
               </a:rPr>
-              <a:t>HackTheBox starting point — più hard, cresci tanto</a:t>
-            </a:r>
-          </a:p>
-          <a:p>
-            <a:pPr>
-              <a:lnSpc>
-                <a:spcPct val="150000"/>
-              </a:lnSpc>
-            </a:pPr>
-            <a:r>
-              <a:rPr sz="2000" b="1">
-                <a:solidFill>
-                  <a:srgbClr val="00A0B0"/>
-                </a:solidFill>
-                <a:latin typeface="Calibri"/>
-              </a:rPr>
-              <a:t>▸  </a:t>
-            </a:r>
-            <a:r>
-              <a:rPr sz="2000">
-                <a:solidFill>
-                  <a:srgbClr val="1A1A2E"/>
-                </a:solidFill>
-                <a:latin typeface="Calibri"/>
-              </a:rPr>
-              <a:t>OWASP — cheat sheets, top 10, ASVS</a:t>
-            </a:r>
-          </a:p>
-          <a:p>
-            <a:pPr>
-              <a:lnSpc>
-                <a:spcPct val="150000"/>
-              </a:lnSpc>
-            </a:pPr>
-            <a:r>
-              <a:rPr sz="2000" b="1">
-                <a:solidFill>
-                  <a:srgbClr val="00A0B0"/>
-                </a:solidFill>
-                <a:latin typeface="Calibri"/>
-              </a:rPr>
-              <a:t>▸  </a:t>
-            </a:r>
-            <a:r>
-              <a:rPr sz="2000">
-                <a:solidFill>
-                  <a:srgbClr val="1A1A2E"/>
-                </a:solidFill>
-                <a:latin typeface="Calibri"/>
-              </a:rPr>
-              <a:t/>
-            </a:r>
-          </a:p>
-          <a:p>
-            <a:pPr>
-              <a:lnSpc>
-                <a:spcPct val="150000"/>
-              </a:lnSpc>
-            </a:pPr>
-            <a:r>
-              <a:rPr sz="2000" b="1">
-                <a:solidFill>
-                  <a:srgbClr val="00A0B0"/>
-                </a:solidFill>
-                <a:latin typeface="Calibri"/>
-              </a:rPr>
-              <a:t>▸  </a:t>
-            </a:r>
-            <a:r>
-              <a:rPr sz="2000">
-                <a:solidFill>
-                  <a:srgbClr val="1A1A2E"/>
-                </a:solidFill>
-                <a:latin typeface="Calibri"/>
-              </a:rPr>
-              <a:t>Certificazioni entry: CompTIA Security+, eJPT, PortSwigger BSCP</a:t>
+              <a:t>DOCUMENTA, TESTA, AUTOMATIZZA</a:t>
             </a:r>
           </a:p>
         </p:txBody>
       </p:sp>
       <p:cxnSp>
         <p:nvCxnSpPr>
-          <p:cNvPr id="5" name="Connector 4"/>
+          <p:cNvPr id="24" name="Connector 23"/>
           <p:cNvCxnSpPr/>
           <p:nvPr/>
         </p:nvCxnSpPr>
@@ -4100,14 +4904,14 @@
       </p:cxnSp>
       <p:sp>
         <p:nvSpPr>
-          <p:cNvPr id="6" name="TextBox 5"/>
+          <p:cNvPr id="25" name="TextBox 24"/>
           <p:cNvSpPr txBox="1"/>
           <p:nvPr/>
         </p:nvSpPr>
         <p:spPr>
           <a:xfrm>
             <a:off x="457200" y="6473952"/>
-            <a:ext cx="7315200" cy="320040"/>
+            <a:ext cx="7315200" cy="292608"/>
           </a:xfrm>
           <a:prstGeom prst="rect">
             <a:avLst/>
@@ -4128,21 +4932,21 @@
                 </a:solidFill>
                 <a:latin typeface="Calibri"/>
               </a:rPr>
-              <a:t>Secure Coding · Corso IFTS STEM · A. Manneschi</a:t>
-            </a:r>
-          </a:p>
-        </p:txBody>
-      </p:sp>
-      <p:sp>
-        <p:nvSpPr>
-          <p:cNvPr id="7" name="TextBox 6"/>
+              <a:t>Secure Coding · Corso IFTS STEM · A. Manneschi · 2024/2025</a:t>
+            </a:r>
+          </a:p>
+        </p:txBody>
+      </p:sp>
+      <p:sp>
+        <p:nvSpPr>
+          <p:cNvPr id="26" name="TextBox 25"/>
           <p:cNvSpPr txBox="1"/>
           <p:nvPr/>
         </p:nvSpPr>
         <p:spPr>
           <a:xfrm>
             <a:off x="10515600" y="6473952"/>
-            <a:ext cx="1188720" cy="320040"/>
+            <a:ext cx="1188720" cy="292608"/>
           </a:xfrm>
           <a:prstGeom prst="rect">
             <a:avLst/>
@@ -4163,7 +4967,7 @@
                 </a:solidFill>
                 <a:latin typeface="Calibri"/>
               </a:rPr>
-              <a:t>L8  ·  11/12</a:t>
+              <a:t>L8  ·  11/14</a:t>
             </a:r>
           </a:p>
         </p:txBody>
@@ -4195,7 +4999,7 @@
         <p:spPr>
           <a:xfrm>
             <a:off x="0" y="0"/>
-            <a:ext cx="12191695" cy="6858000"/>
+            <a:ext cx="12191695" cy="777240"/>
           </a:xfrm>
           <a:prstGeom prst="rect">
             <a:avLst/>
@@ -4231,16 +5035,492 @@
       </p:sp>
       <p:sp>
         <p:nvSpPr>
-          <p:cNvPr id="3" name="Oval 2"/>
+          <p:cNvPr id="3" name="TextBox 2"/>
+          <p:cNvSpPr txBox="1"/>
+          <p:nvPr/>
+        </p:nvSpPr>
+        <p:spPr>
+          <a:xfrm>
+            <a:off x="457200" y="164592"/>
+            <a:ext cx="10972800" cy="502920"/>
+          </a:xfrm>
+          <a:prstGeom prst="rect">
+            <a:avLst/>
+          </a:prstGeom>
+          <a:noFill/>
+        </p:spPr>
+        <p:txBody>
+          <a:bodyPr wrap="square" lIns="45720" rIns="45720" tIns="18288" bIns="18288" anchor="ctr">
+            <a:spAutoFit/>
+          </a:bodyPr>
+          <a:lstStyle/>
+          <a:p>
+            <a:pPr algn="l"/>
+            <a:r>
+              <a:rPr sz="2400" b="1" i="0">
+                <a:solidFill>
+                  <a:srgbClr val="FFFFFF"/>
+                </a:solidFill>
+                <a:latin typeface="Calibri"/>
+              </a:rPr>
+              <a:t>🚀  Per crescere ancora (gratuito)</a:t>
+            </a:r>
+          </a:p>
+        </p:txBody>
+      </p:sp>
+      <p:sp>
+        <p:nvSpPr>
+          <p:cNvPr id="4" name="TextBox 3"/>
+          <p:cNvSpPr txBox="1"/>
+          <p:nvPr/>
+        </p:nvSpPr>
+        <p:spPr>
+          <a:xfrm>
+            <a:off x="640080" y="1097280"/>
+            <a:ext cx="10972800" cy="5029200"/>
+          </a:xfrm>
+          <a:prstGeom prst="rect">
+            <a:avLst/>
+          </a:prstGeom>
+          <a:noFill/>
+        </p:spPr>
+        <p:txBody>
+          <a:bodyPr wrap="square">
+            <a:spAutoFit/>
+          </a:bodyPr>
+          <a:lstStyle/>
+          <a:p>
+            <a:pPr>
+              <a:lnSpc>
+                <a:spcPct val="150000"/>
+              </a:lnSpc>
+              <a:spcAft>
+                <a:spcPts val="400"/>
+              </a:spcAft>
+            </a:pPr>
+            <a:r>
+              <a:rPr sz="2000" b="1">
+                <a:solidFill>
+                  <a:srgbClr val="00A0B0"/>
+                </a:solidFill>
+                <a:latin typeface="Calibri"/>
+              </a:rPr>
+              <a:t>▸  </a:t>
+            </a:r>
+            <a:r>
+              <a:rPr sz="2000">
+                <a:solidFill>
+                  <a:srgbClr val="1A1A2E"/>
+                </a:solidFill>
+                <a:latin typeface="Calibri"/>
+              </a:rPr>
+              <a:t>PortSwigger Web Security Academy</a:t>
+            </a:r>
+          </a:p>
+          <a:p>
+            <a:pPr>
+              <a:lnSpc>
+                <a:spcPct val="150000"/>
+              </a:lnSpc>
+              <a:spcAft>
+                <a:spcPts val="400"/>
+              </a:spcAft>
+            </a:pPr>
+            <a:r>
+              <a:rPr sz="2000" b="1">
+                <a:solidFill>
+                  <a:srgbClr val="00A0B0"/>
+                </a:solidFill>
+                <a:latin typeface="Calibri"/>
+              </a:rPr>
+              <a:t>▸  </a:t>
+            </a:r>
+            <a:r>
+              <a:rPr sz="2000">
+                <a:solidFill>
+                  <a:srgbClr val="1A1A2E"/>
+                </a:solidFill>
+                <a:latin typeface="Calibri"/>
+              </a:rPr>
+              <a:t>  Il miglior corso gratuito al mondo, lab guidati</a:t>
+            </a:r>
+          </a:p>
+          <a:p>
+            <a:pPr>
+              <a:lnSpc>
+                <a:spcPct val="150000"/>
+              </a:lnSpc>
+              <a:spcAft>
+                <a:spcPts val="400"/>
+              </a:spcAft>
+            </a:pPr>
+            <a:r>
+              <a:rPr sz="2000" b="1">
+                <a:solidFill>
+                  <a:srgbClr val="00A0B0"/>
+                </a:solidFill>
+                <a:latin typeface="Calibri"/>
+              </a:rPr>
+              <a:t>▸  </a:t>
+            </a:r>
+            <a:r>
+              <a:rPr sz="2000">
+                <a:solidFill>
+                  <a:srgbClr val="1A1A2E"/>
+                </a:solidFill>
+                <a:latin typeface="Calibri"/>
+              </a:rPr>
+              <a:t/>
+            </a:r>
+          </a:p>
+          <a:p>
+            <a:pPr>
+              <a:lnSpc>
+                <a:spcPct val="150000"/>
+              </a:lnSpc>
+              <a:spcAft>
+                <a:spcPts val="400"/>
+              </a:spcAft>
+            </a:pPr>
+            <a:r>
+              <a:rPr sz="2000" b="1">
+                <a:solidFill>
+                  <a:srgbClr val="00A0B0"/>
+                </a:solidFill>
+                <a:latin typeface="Calibri"/>
+              </a:rPr>
+              <a:t>▸  </a:t>
+            </a:r>
+            <a:r>
+              <a:rPr sz="2000">
+                <a:solidFill>
+                  <a:srgbClr val="1A1A2E"/>
+                </a:solidFill>
+                <a:latin typeface="Calibri"/>
+              </a:rPr>
+              <a:t>TryHackMe — beginner friendly</a:t>
+            </a:r>
+          </a:p>
+          <a:p>
+            <a:pPr>
+              <a:lnSpc>
+                <a:spcPct val="150000"/>
+              </a:lnSpc>
+              <a:spcAft>
+                <a:spcPts val="400"/>
+              </a:spcAft>
+            </a:pPr>
+            <a:r>
+              <a:rPr sz="2000" b="1">
+                <a:solidFill>
+                  <a:srgbClr val="00A0B0"/>
+                </a:solidFill>
+                <a:latin typeface="Calibri"/>
+              </a:rPr>
+              <a:t>▸  </a:t>
+            </a:r>
+            <a:r>
+              <a:rPr sz="2000">
+                <a:solidFill>
+                  <a:srgbClr val="1A1A2E"/>
+                </a:solidFill>
+                <a:latin typeface="Calibri"/>
+              </a:rPr>
+              <a:t>HackTheBox starting point — più hard, cresci tanto</a:t>
+            </a:r>
+          </a:p>
+          <a:p>
+            <a:pPr>
+              <a:lnSpc>
+                <a:spcPct val="150000"/>
+              </a:lnSpc>
+              <a:spcAft>
+                <a:spcPts val="400"/>
+              </a:spcAft>
+            </a:pPr>
+            <a:r>
+              <a:rPr sz="2000" b="1">
+                <a:solidFill>
+                  <a:srgbClr val="00A0B0"/>
+                </a:solidFill>
+                <a:latin typeface="Calibri"/>
+              </a:rPr>
+              <a:t>▸  </a:t>
+            </a:r>
+            <a:r>
+              <a:rPr sz="2000">
+                <a:solidFill>
+                  <a:srgbClr val="1A1A2E"/>
+                </a:solidFill>
+                <a:latin typeface="Calibri"/>
+              </a:rPr>
+              <a:t>OWASP — cheat sheets, top 10, ASVS</a:t>
+            </a:r>
+          </a:p>
+          <a:p>
+            <a:pPr>
+              <a:lnSpc>
+                <a:spcPct val="150000"/>
+              </a:lnSpc>
+              <a:spcAft>
+                <a:spcPts val="400"/>
+              </a:spcAft>
+            </a:pPr>
+            <a:r>
+              <a:rPr sz="2000" b="1">
+                <a:solidFill>
+                  <a:srgbClr val="00A0B0"/>
+                </a:solidFill>
+                <a:latin typeface="Calibri"/>
+              </a:rPr>
+              <a:t>▸  </a:t>
+            </a:r>
+            <a:r>
+              <a:rPr sz="2000">
+                <a:solidFill>
+                  <a:srgbClr val="1A1A2E"/>
+                </a:solidFill>
+                <a:latin typeface="Calibri"/>
+              </a:rPr>
+              <a:t/>
+            </a:r>
+          </a:p>
+          <a:p>
+            <a:pPr>
+              <a:lnSpc>
+                <a:spcPct val="150000"/>
+              </a:lnSpc>
+              <a:spcAft>
+                <a:spcPts val="400"/>
+              </a:spcAft>
+            </a:pPr>
+            <a:r>
+              <a:rPr sz="2000" b="1">
+                <a:solidFill>
+                  <a:srgbClr val="00A0B0"/>
+                </a:solidFill>
+                <a:latin typeface="Calibri"/>
+              </a:rPr>
+              <a:t>▸  </a:t>
+            </a:r>
+            <a:r>
+              <a:rPr sz="2000">
+                <a:solidFill>
+                  <a:srgbClr val="1A1A2E"/>
+                </a:solidFill>
+                <a:latin typeface="Calibri"/>
+              </a:rPr>
+              <a:t>Certificazioni entry:</a:t>
+            </a:r>
+          </a:p>
+          <a:p>
+            <a:pPr>
+              <a:lnSpc>
+                <a:spcPct val="150000"/>
+              </a:lnSpc>
+              <a:spcAft>
+                <a:spcPts val="400"/>
+              </a:spcAft>
+            </a:pPr>
+            <a:r>
+              <a:rPr sz="2000" b="1">
+                <a:solidFill>
+                  <a:srgbClr val="00A0B0"/>
+                </a:solidFill>
+                <a:latin typeface="Calibri"/>
+              </a:rPr>
+              <a:t>▸  </a:t>
+            </a:r>
+            <a:r>
+              <a:rPr sz="2000">
+                <a:solidFill>
+                  <a:srgbClr val="1A1A2E"/>
+                </a:solidFill>
+                <a:latin typeface="Calibri"/>
+              </a:rPr>
+              <a:t>  CompTIA Security+ · eJPT · PortSwigger BSCP</a:t>
+            </a:r>
+          </a:p>
+        </p:txBody>
+      </p:sp>
+      <p:cxnSp>
+        <p:nvCxnSpPr>
+          <p:cNvPr id="5" name="Connector 4"/>
+          <p:cNvCxnSpPr/>
+          <p:nvPr/>
+        </p:nvCxnSpPr>
+        <p:spPr>
+          <a:xfrm>
+            <a:off x="457200" y="6446520"/>
+            <a:ext cx="11274552" cy="0"/>
+          </a:xfrm>
+          <a:prstGeom prst="line">
+            <a:avLst/>
+          </a:prstGeom>
+          <a:ln w="19050">
+            <a:solidFill>
+              <a:srgbClr val="00A0B0"/>
+            </a:solidFill>
+          </a:ln>
+        </p:spPr>
+        <p:style>
+          <a:lnRef idx="2">
+            <a:schemeClr val="accent1"/>
+          </a:lnRef>
+          <a:fillRef idx="0">
+            <a:schemeClr val="accent1"/>
+          </a:fillRef>
+          <a:effectRef idx="1">
+            <a:schemeClr val="accent1"/>
+          </a:effectRef>
+          <a:fontRef idx="minor">
+            <a:schemeClr val="tx1"/>
+          </a:fontRef>
+        </p:style>
+      </p:cxnSp>
+      <p:sp>
+        <p:nvSpPr>
+          <p:cNvPr id="6" name="TextBox 5"/>
+          <p:cNvSpPr txBox="1"/>
+          <p:nvPr/>
+        </p:nvSpPr>
+        <p:spPr>
+          <a:xfrm>
+            <a:off x="457200" y="6473952"/>
+            <a:ext cx="7315200" cy="292608"/>
+          </a:xfrm>
+          <a:prstGeom prst="rect">
+            <a:avLst/>
+          </a:prstGeom>
+          <a:noFill/>
+        </p:spPr>
+        <p:txBody>
+          <a:bodyPr wrap="square" lIns="45720" rIns="45720" tIns="18288" bIns="18288" anchor="t">
+            <a:spAutoFit/>
+          </a:bodyPr>
+          <a:lstStyle/>
+          <a:p>
+            <a:pPr algn="l"/>
+            <a:r>
+              <a:rPr sz="1000" b="0" i="0">
+                <a:solidFill>
+                  <a:srgbClr val="6B7280"/>
+                </a:solidFill>
+                <a:latin typeface="Calibri"/>
+              </a:rPr>
+              <a:t>Secure Coding · Corso IFTS STEM · A. Manneschi · 2024/2025</a:t>
+            </a:r>
+          </a:p>
+        </p:txBody>
+      </p:sp>
+      <p:sp>
+        <p:nvSpPr>
+          <p:cNvPr id="7" name="TextBox 6"/>
+          <p:cNvSpPr txBox="1"/>
+          <p:nvPr/>
+        </p:nvSpPr>
+        <p:spPr>
+          <a:xfrm>
+            <a:off x="10515600" y="6473952"/>
+            <a:ext cx="1188720" cy="292608"/>
+          </a:xfrm>
+          <a:prstGeom prst="rect">
+            <a:avLst/>
+          </a:prstGeom>
+          <a:noFill/>
+        </p:spPr>
+        <p:txBody>
+          <a:bodyPr wrap="square" lIns="45720" rIns="45720" tIns="18288" bIns="18288" anchor="t">
+            <a:spAutoFit/>
+          </a:bodyPr>
+          <a:lstStyle/>
+          <a:p>
+            <a:pPr algn="r"/>
+            <a:r>
+              <a:rPr sz="1000" b="1" i="0">
+                <a:solidFill>
+                  <a:srgbClr val="6B7280"/>
+                </a:solidFill>
+                <a:latin typeface="Calibri"/>
+              </a:rPr>
+              <a:t>L8  ·  12/14</a:t>
+            </a:r>
+          </a:p>
+        </p:txBody>
+      </p:sp>
+    </p:spTree>
+  </p:cSld>
+  <p:clrMapOvr>
+    <a:masterClrMapping/>
+  </p:clrMapOvr>
+</p:sld>
+</file>
+
+<file path=ppt/slides/slide13.xml><?xml version="1.0" encoding="utf-8"?>
+<p:sld xmlns:a="http://schemas.openxmlformats.org/drawingml/2006/main" xmlns:p="http://schemas.openxmlformats.org/presentationml/2006/main" xmlns:r="http://schemas.openxmlformats.org/officeDocument/2006/relationships">
+  <p:cSld>
+    <p:spTree>
+      <p:nvGrpSpPr>
+        <p:cNvPr id="1" name=""/>
+        <p:cNvGrpSpPr/>
+        <p:nvPr/>
+      </p:nvGrpSpPr>
+      <p:grpSpPr/>
+      <p:sp>
+        <p:nvSpPr>
+          <p:cNvPr id="2" name="Rectangle 1"/>
           <p:cNvSpPr/>
           <p:nvPr/>
         </p:nvSpPr>
         <p:spPr>
           <a:xfrm>
-            <a:off x="8686800" y="457200"/>
-            <a:ext cx="3200400" cy="3200400"/>
-          </a:xfrm>
-          <a:prstGeom prst="ellipse">
+            <a:off x="0" y="0"/>
+            <a:ext cx="12191695" cy="6858000"/>
+          </a:xfrm>
+          <a:prstGeom prst="rect">
+            <a:avLst/>
+          </a:prstGeom>
+          <a:solidFill>
+            <a:srgbClr val="F1F4F8"/>
+          </a:solidFill>
+          <a:ln>
+            <a:noFill/>
+          </a:ln>
+        </p:spPr>
+        <p:style>
+          <a:lnRef idx="1">
+            <a:schemeClr val="accent1"/>
+          </a:lnRef>
+          <a:fillRef idx="3">
+            <a:schemeClr val="accent1"/>
+          </a:fillRef>
+          <a:effectRef idx="2">
+            <a:schemeClr val="accent1"/>
+          </a:effectRef>
+          <a:fontRef idx="minor">
+            <a:schemeClr val="lt1"/>
+          </a:fontRef>
+        </p:style>
+        <p:txBody>
+          <a:bodyPr rtlCol="0" anchor="ctr"/>
+          <a:lstStyle/>
+          <a:p>
+            <a:pPr algn="ctr"/>
+          </a:p>
+        </p:txBody>
+      </p:sp>
+      <p:sp>
+        <p:nvSpPr>
+          <p:cNvPr id="3" name="Rectangle 2"/>
+          <p:cNvSpPr/>
+          <p:nvPr/>
+        </p:nvSpPr>
+        <p:spPr>
+          <a:xfrm>
+            <a:off x="0" y="0"/>
+            <a:ext cx="365760" cy="6858000"/>
+          </a:xfrm>
+          <a:prstGeom prst="rect">
             <a:avLst/>
           </a:prstGeom>
           <a:solidFill>
@@ -4280,8 +5560,8 @@
         </p:nvSpPr>
         <p:spPr>
           <a:xfrm>
-            <a:off x="731520" y="1645920"/>
-            <a:ext cx="7315200" cy="2286000"/>
+            <a:off x="914400" y="914400"/>
+            <a:ext cx="2286000" cy="2286000"/>
           </a:xfrm>
           <a:prstGeom prst="rect">
             <a:avLst/>
@@ -4296,13 +5576,13 @@
           <a:p>
             <a:pPr algn="l"/>
             <a:r>
-              <a:rPr sz="8800" b="1" i="0">
-                <a:solidFill>
-                  <a:srgbClr val="FFFFFF"/>
-                </a:solidFill>
-                <a:latin typeface="Calibri"/>
-              </a:rPr>
-              <a:t>Domande?</a:t>
+              <a:rPr sz="25000" b="1" i="0">
+                <a:solidFill>
+                  <a:srgbClr val="00A0B0"/>
+                </a:solidFill>
+                <a:latin typeface="Georgia"/>
+              </a:rPr>
+              <a:t>“</a:t>
             </a:r>
           </a:p>
         </p:txBody>
@@ -4315,8 +5595,8 @@
         </p:nvSpPr>
         <p:spPr>
           <a:xfrm>
-            <a:off x="8686800" y="457200"/>
-            <a:ext cx="3200400" cy="3200400"/>
+            <a:off x="2286000" y="2286000"/>
+            <a:ext cx="9144000" cy="3200400"/>
           </a:xfrm>
           <a:prstGeom prst="rect">
             <a:avLst/>
@@ -4329,69 +5609,34 @@
           </a:bodyPr>
           <a:lstStyle/>
           <a:p>
-            <a:pPr algn="ctr"/>
-            <a:r>
-              <a:rPr sz="18000" b="1" i="0">
-                <a:solidFill>
-                  <a:srgbClr val="FFFFFF"/>
-                </a:solidFill>
-                <a:latin typeface="Calibri"/>
-              </a:rPr>
-              <a:t>?</a:t>
-            </a:r>
-          </a:p>
-        </p:txBody>
-      </p:sp>
-      <p:sp>
-        <p:nvSpPr>
-          <p:cNvPr id="6" name="TextBox 5"/>
-          <p:cNvSpPr txBox="1"/>
-          <p:nvPr/>
-        </p:nvSpPr>
-        <p:spPr>
-          <a:xfrm>
-            <a:off x="731520" y="4114800"/>
-            <a:ext cx="10058400" cy="457200"/>
-          </a:xfrm>
-          <a:prstGeom prst="rect">
-            <a:avLst/>
-          </a:prstGeom>
-          <a:noFill/>
-        </p:spPr>
-        <p:txBody>
-          <a:bodyPr wrap="square" lIns="45720" rIns="45720" tIns="18288" bIns="18288" anchor="t">
-            <a:spAutoFit/>
-          </a:bodyPr>
-          <a:lstStyle/>
-          <a:p>
             <a:pPr algn="l"/>
             <a:r>
-              <a:rPr sz="2200" b="1" i="0">
-                <a:solidFill>
-                  <a:srgbClr val="00A0B0"/>
-                </a:solidFill>
-                <a:latin typeface="Calibri"/>
-              </a:rPr>
-              <a:t>Cosa portarti via:</a:t>
+              <a:rPr sz="3200" b="1" i="1">
+                <a:solidFill>
+                  <a:srgbClr val="0F2D52"/>
+                </a:solidFill>
+                <a:latin typeface="Georgia"/>
+              </a:rPr>
+              <a:t>In azienda probabilmente nessuno ti chiederà 'fai sicurezza'. Sarà compito tuo dirla.</a:t>
             </a:r>
           </a:p>
         </p:txBody>
       </p:sp>
       <p:cxnSp>
         <p:nvCxnSpPr>
-          <p:cNvPr id="7" name="Connector 6"/>
+          <p:cNvPr id="6" name="Connector 5"/>
           <p:cNvCxnSpPr/>
           <p:nvPr/>
         </p:nvCxnSpPr>
         <p:spPr>
           <a:xfrm>
-            <a:off x="457200" y="6446520"/>
-            <a:ext cx="11274552" cy="0"/>
+            <a:off x="2286000" y="5029200"/>
+            <a:ext cx="1828800" cy="0"/>
           </a:xfrm>
           <a:prstGeom prst="line">
             <a:avLst/>
           </a:prstGeom>
-          <a:ln w="19050">
+          <a:ln w="38100">
             <a:solidFill>
               <a:srgbClr val="00A0B0"/>
             </a:solidFill>
@@ -4412,6 +5657,41 @@
           </a:fontRef>
         </p:style>
       </p:cxnSp>
+      <p:cxnSp>
+        <p:nvCxnSpPr>
+          <p:cNvPr id="7" name="Connector 6"/>
+          <p:cNvCxnSpPr/>
+          <p:nvPr/>
+        </p:nvCxnSpPr>
+        <p:spPr>
+          <a:xfrm>
+            <a:off x="457200" y="6446520"/>
+            <a:ext cx="11274552" cy="0"/>
+          </a:xfrm>
+          <a:prstGeom prst="line">
+            <a:avLst/>
+          </a:prstGeom>
+          <a:ln w="19050">
+            <a:solidFill>
+              <a:srgbClr val="00A0B0"/>
+            </a:solidFill>
+          </a:ln>
+        </p:spPr>
+        <p:style>
+          <a:lnRef idx="2">
+            <a:schemeClr val="accent1"/>
+          </a:lnRef>
+          <a:fillRef idx="0">
+            <a:schemeClr val="accent1"/>
+          </a:fillRef>
+          <a:effectRef idx="1">
+            <a:schemeClr val="accent1"/>
+          </a:effectRef>
+          <a:fontRef idx="minor">
+            <a:schemeClr val="tx1"/>
+          </a:fontRef>
+        </p:style>
+      </p:cxnSp>
       <p:sp>
         <p:nvSpPr>
           <p:cNvPr id="8" name="TextBox 7"/>
@@ -4421,7 +5701,7 @@
         <p:spPr>
           <a:xfrm>
             <a:off x="457200" y="6473952"/>
-            <a:ext cx="7315200" cy="320040"/>
+            <a:ext cx="7315200" cy="292608"/>
           </a:xfrm>
           <a:prstGeom prst="rect">
             <a:avLst/>
@@ -4442,7 +5722,7 @@
                 </a:solidFill>
                 <a:latin typeface="Calibri"/>
               </a:rPr>
-              <a:t>Secure Coding · Corso IFTS STEM · A. Manneschi</a:t>
+              <a:t>Secure Coding · Corso IFTS STEM · A. Manneschi · 2024/2025</a:t>
             </a:r>
           </a:p>
         </p:txBody>
@@ -4456,7 +5736,7 @@
         <p:spPr>
           <a:xfrm>
             <a:off x="10515600" y="6473952"/>
-            <a:ext cx="1188720" cy="320040"/>
+            <a:ext cx="1188720" cy="292608"/>
           </a:xfrm>
           <a:prstGeom prst="rect">
             <a:avLst/>
@@ -4477,7 +5757,407 @@
                 </a:solidFill>
                 <a:latin typeface="Calibri"/>
               </a:rPr>
-              <a:t>L8  ·  12/12</a:t>
+              <a:t>L8  ·  13/14</a:t>
+            </a:r>
+          </a:p>
+        </p:txBody>
+      </p:sp>
+    </p:spTree>
+  </p:cSld>
+  <p:clrMapOvr>
+    <a:masterClrMapping/>
+  </p:clrMapOvr>
+</p:sld>
+</file>
+
+<file path=ppt/slides/slide14.xml><?xml version="1.0" encoding="utf-8"?>
+<p:sld xmlns:a="http://schemas.openxmlformats.org/drawingml/2006/main" xmlns:p="http://schemas.openxmlformats.org/presentationml/2006/main" xmlns:r="http://schemas.openxmlformats.org/officeDocument/2006/relationships">
+  <p:cSld>
+    <p:spTree>
+      <p:nvGrpSpPr>
+        <p:cNvPr id="1" name=""/>
+        <p:cNvGrpSpPr/>
+        <p:nvPr/>
+      </p:nvGrpSpPr>
+      <p:grpSpPr/>
+      <p:sp>
+        <p:nvSpPr>
+          <p:cNvPr id="2" name="Rectangle 1"/>
+          <p:cNvSpPr/>
+          <p:nvPr/>
+        </p:nvSpPr>
+        <p:spPr>
+          <a:xfrm>
+            <a:off x="0" y="0"/>
+            <a:ext cx="12191695" cy="6858000"/>
+          </a:xfrm>
+          <a:prstGeom prst="rect">
+            <a:avLst/>
+          </a:prstGeom>
+          <a:solidFill>
+            <a:srgbClr val="081B33"/>
+          </a:solidFill>
+          <a:ln>
+            <a:noFill/>
+          </a:ln>
+        </p:spPr>
+        <p:style>
+          <a:lnRef idx="1">
+            <a:schemeClr val="accent1"/>
+          </a:lnRef>
+          <a:fillRef idx="3">
+            <a:schemeClr val="accent1"/>
+          </a:fillRef>
+          <a:effectRef idx="2">
+            <a:schemeClr val="accent1"/>
+          </a:effectRef>
+          <a:fontRef idx="minor">
+            <a:schemeClr val="lt1"/>
+          </a:fontRef>
+        </p:style>
+        <p:txBody>
+          <a:bodyPr rtlCol="0" anchor="ctr"/>
+          <a:lstStyle/>
+          <a:p>
+            <a:pPr algn="ctr"/>
+          </a:p>
+        </p:txBody>
+      </p:sp>
+      <p:sp>
+        <p:nvSpPr>
+          <p:cNvPr id="3" name="Oval 2"/>
+          <p:cNvSpPr/>
+          <p:nvPr/>
+        </p:nvSpPr>
+        <p:spPr>
+          <a:xfrm>
+            <a:off x="8915400" y="228600"/>
+            <a:ext cx="2286000" cy="2286000"/>
+          </a:xfrm>
+          <a:prstGeom prst="ellipse">
+            <a:avLst/>
+          </a:prstGeom>
+          <a:noFill/>
+          <a:ln w="25400">
+            <a:solidFill>
+              <a:srgbClr val="00A0B0"/>
+            </a:solidFill>
+          </a:ln>
+        </p:spPr>
+        <p:style>
+          <a:lnRef idx="1">
+            <a:schemeClr val="accent1"/>
+          </a:lnRef>
+          <a:fillRef idx="3">
+            <a:schemeClr val="accent1"/>
+          </a:fillRef>
+          <a:effectRef idx="2">
+            <a:schemeClr val="accent1"/>
+          </a:effectRef>
+          <a:fontRef idx="minor">
+            <a:schemeClr val="lt1"/>
+          </a:fontRef>
+        </p:style>
+        <p:txBody>
+          <a:bodyPr rtlCol="0" anchor="ctr"/>
+          <a:lstStyle/>
+          <a:p>
+            <a:pPr algn="ctr"/>
+          </a:p>
+        </p:txBody>
+      </p:sp>
+      <p:sp>
+        <p:nvSpPr>
+          <p:cNvPr id="4" name="Oval 3"/>
+          <p:cNvSpPr/>
+          <p:nvPr/>
+        </p:nvSpPr>
+        <p:spPr>
+          <a:xfrm>
+            <a:off x="10149840" y="3749040"/>
+            <a:ext cx="1645920" cy="1645920"/>
+          </a:xfrm>
+          <a:prstGeom prst="ellipse">
+            <a:avLst/>
+          </a:prstGeom>
+          <a:noFill/>
+          <a:ln w="25400">
+            <a:solidFill>
+              <a:srgbClr val="00A0B0"/>
+            </a:solidFill>
+          </a:ln>
+        </p:spPr>
+        <p:style>
+          <a:lnRef idx="1">
+            <a:schemeClr val="accent1"/>
+          </a:lnRef>
+          <a:fillRef idx="3">
+            <a:schemeClr val="accent1"/>
+          </a:fillRef>
+          <a:effectRef idx="2">
+            <a:schemeClr val="accent1"/>
+          </a:effectRef>
+          <a:fontRef idx="minor">
+            <a:schemeClr val="lt1"/>
+          </a:fontRef>
+        </p:style>
+        <p:txBody>
+          <a:bodyPr rtlCol="0" anchor="ctr"/>
+          <a:lstStyle/>
+          <a:p>
+            <a:pPr algn="ctr"/>
+          </a:p>
+        </p:txBody>
+      </p:sp>
+      <p:sp>
+        <p:nvSpPr>
+          <p:cNvPr id="5" name="Oval 4"/>
+          <p:cNvSpPr/>
+          <p:nvPr/>
+        </p:nvSpPr>
+        <p:spPr>
+          <a:xfrm>
+            <a:off x="685800" y="4800600"/>
+            <a:ext cx="1371600" cy="1371600"/>
+          </a:xfrm>
+          <a:prstGeom prst="ellipse">
+            <a:avLst/>
+          </a:prstGeom>
+          <a:noFill/>
+          <a:ln w="25400">
+            <a:solidFill>
+              <a:srgbClr val="00A0B0"/>
+            </a:solidFill>
+          </a:ln>
+        </p:spPr>
+        <p:style>
+          <a:lnRef idx="1">
+            <a:schemeClr val="accent1"/>
+          </a:lnRef>
+          <a:fillRef idx="3">
+            <a:schemeClr val="accent1"/>
+          </a:fillRef>
+          <a:effectRef idx="2">
+            <a:schemeClr val="accent1"/>
+          </a:effectRef>
+          <a:fontRef idx="minor">
+            <a:schemeClr val="lt1"/>
+          </a:fontRef>
+        </p:style>
+        <p:txBody>
+          <a:bodyPr rtlCol="0" anchor="ctr"/>
+          <a:lstStyle/>
+          <a:p>
+            <a:pPr algn="ctr"/>
+          </a:p>
+        </p:txBody>
+      </p:sp>
+      <p:sp>
+        <p:nvSpPr>
+          <p:cNvPr id="6" name="TextBox 5"/>
+          <p:cNvSpPr txBox="1"/>
+          <p:nvPr/>
+        </p:nvSpPr>
+        <p:spPr>
+          <a:xfrm>
+            <a:off x="731520" y="1371600"/>
+            <a:ext cx="10058400" cy="2286000"/>
+          </a:xfrm>
+          <a:prstGeom prst="rect">
+            <a:avLst/>
+          </a:prstGeom>
+          <a:noFill/>
+        </p:spPr>
+        <p:txBody>
+          <a:bodyPr wrap="square" lIns="45720" rIns="45720" tIns="18288" bIns="18288" anchor="t">
+            <a:spAutoFit/>
+          </a:bodyPr>
+          <a:lstStyle/>
+          <a:p>
+            <a:pPr algn="l"/>
+            <a:r>
+              <a:rPr sz="11000" b="1" i="0">
+                <a:solidFill>
+                  <a:srgbClr val="FFFFFF"/>
+                </a:solidFill>
+                <a:latin typeface="Calibri"/>
+              </a:rPr>
+              <a:t>Domande?</a:t>
+            </a:r>
+          </a:p>
+        </p:txBody>
+      </p:sp>
+      <p:cxnSp>
+        <p:nvCxnSpPr>
+          <p:cNvPr id="7" name="Connector 6"/>
+          <p:cNvCxnSpPr/>
+          <p:nvPr/>
+        </p:nvCxnSpPr>
+        <p:spPr>
+          <a:xfrm>
+            <a:off x="731520" y="3840480"/>
+            <a:ext cx="2926080" cy="0"/>
+          </a:xfrm>
+          <a:prstGeom prst="line">
+            <a:avLst/>
+          </a:prstGeom>
+          <a:ln w="50800">
+            <a:solidFill>
+              <a:srgbClr val="00A0B0"/>
+            </a:solidFill>
+          </a:ln>
+        </p:spPr>
+        <p:style>
+          <a:lnRef idx="2">
+            <a:schemeClr val="accent1"/>
+          </a:lnRef>
+          <a:fillRef idx="0">
+            <a:schemeClr val="accent1"/>
+          </a:fillRef>
+          <a:effectRef idx="1">
+            <a:schemeClr val="accent1"/>
+          </a:effectRef>
+          <a:fontRef idx="minor">
+            <a:schemeClr val="tx1"/>
+          </a:fontRef>
+        </p:style>
+      </p:cxnSp>
+      <p:sp>
+        <p:nvSpPr>
+          <p:cNvPr id="8" name="TextBox 7"/>
+          <p:cNvSpPr txBox="1"/>
+          <p:nvPr/>
+        </p:nvSpPr>
+        <p:spPr>
+          <a:xfrm>
+            <a:off x="731520" y="4114800"/>
+            <a:ext cx="10058400" cy="457200"/>
+          </a:xfrm>
+          <a:prstGeom prst="rect">
+            <a:avLst/>
+          </a:prstGeom>
+          <a:noFill/>
+        </p:spPr>
+        <p:txBody>
+          <a:bodyPr wrap="square" lIns="45720" rIns="45720" tIns="18288" bIns="18288" anchor="t">
+            <a:spAutoFit/>
+          </a:bodyPr>
+          <a:lstStyle/>
+          <a:p>
+            <a:pPr algn="l"/>
+            <a:r>
+              <a:rPr sz="2000" b="1" i="0">
+                <a:solidFill>
+                  <a:srgbClr val="00A0B0"/>
+                </a:solidFill>
+                <a:latin typeface="Calibri"/>
+              </a:rPr>
+              <a:t>Riepilogo · Q&amp;A · Discussione</a:t>
+            </a:r>
+          </a:p>
+        </p:txBody>
+      </p:sp>
+      <p:cxnSp>
+        <p:nvCxnSpPr>
+          <p:cNvPr id="9" name="Connector 8"/>
+          <p:cNvCxnSpPr/>
+          <p:nvPr/>
+        </p:nvCxnSpPr>
+        <p:spPr>
+          <a:xfrm>
+            <a:off x="457200" y="6446520"/>
+            <a:ext cx="11274552" cy="0"/>
+          </a:xfrm>
+          <a:prstGeom prst="line">
+            <a:avLst/>
+          </a:prstGeom>
+          <a:ln w="19050">
+            <a:solidFill>
+              <a:srgbClr val="00A0B0"/>
+            </a:solidFill>
+          </a:ln>
+        </p:spPr>
+        <p:style>
+          <a:lnRef idx="2">
+            <a:schemeClr val="accent1"/>
+          </a:lnRef>
+          <a:fillRef idx="0">
+            <a:schemeClr val="accent1"/>
+          </a:fillRef>
+          <a:effectRef idx="1">
+            <a:schemeClr val="accent1"/>
+          </a:effectRef>
+          <a:fontRef idx="minor">
+            <a:schemeClr val="tx1"/>
+          </a:fontRef>
+        </p:style>
+      </p:cxnSp>
+      <p:sp>
+        <p:nvSpPr>
+          <p:cNvPr id="10" name="TextBox 9"/>
+          <p:cNvSpPr txBox="1"/>
+          <p:nvPr/>
+        </p:nvSpPr>
+        <p:spPr>
+          <a:xfrm>
+            <a:off x="457200" y="6473952"/>
+            <a:ext cx="7315200" cy="292608"/>
+          </a:xfrm>
+          <a:prstGeom prst="rect">
+            <a:avLst/>
+          </a:prstGeom>
+          <a:noFill/>
+        </p:spPr>
+        <p:txBody>
+          <a:bodyPr wrap="square" lIns="45720" rIns="45720" tIns="18288" bIns="18288" anchor="t">
+            <a:spAutoFit/>
+          </a:bodyPr>
+          <a:lstStyle/>
+          <a:p>
+            <a:pPr algn="l"/>
+            <a:r>
+              <a:rPr sz="1000" b="0" i="0">
+                <a:solidFill>
+                  <a:srgbClr val="6B7280"/>
+                </a:solidFill>
+                <a:latin typeface="Calibri"/>
+              </a:rPr>
+              <a:t>Secure Coding · Corso IFTS STEM · A. Manneschi · 2024/2025</a:t>
+            </a:r>
+          </a:p>
+        </p:txBody>
+      </p:sp>
+      <p:sp>
+        <p:nvSpPr>
+          <p:cNvPr id="11" name="TextBox 10"/>
+          <p:cNvSpPr txBox="1"/>
+          <p:nvPr/>
+        </p:nvSpPr>
+        <p:spPr>
+          <a:xfrm>
+            <a:off x="10515600" y="6473952"/>
+            <a:ext cx="1188720" cy="292608"/>
+          </a:xfrm>
+          <a:prstGeom prst="rect">
+            <a:avLst/>
+          </a:prstGeom>
+          <a:noFill/>
+        </p:spPr>
+        <p:txBody>
+          <a:bodyPr wrap="square" lIns="45720" rIns="45720" tIns="18288" bIns="18288" anchor="t">
+            <a:spAutoFit/>
+          </a:bodyPr>
+          <a:lstStyle/>
+          <a:p>
+            <a:pPr algn="r"/>
+            <a:r>
+              <a:rPr sz="1000" b="1" i="0">
+                <a:solidFill>
+                  <a:srgbClr val="6B7280"/>
+                </a:solidFill>
+                <a:latin typeface="Calibri"/>
+              </a:rPr>
+              <a:t>L8  ·  14/14</a:t>
             </a:r>
           </a:p>
         </p:txBody>
@@ -4509,13 +6189,13 @@
         <p:spPr>
           <a:xfrm>
             <a:off x="0" y="0"/>
-            <a:ext cx="12191695" cy="777240"/>
+            <a:ext cx="4114800" cy="6858000"/>
           </a:xfrm>
           <a:prstGeom prst="rect">
             <a:avLst/>
           </a:prstGeom>
           <a:solidFill>
-            <a:srgbClr val="0F2D52"/>
+            <a:srgbClr val="081B33"/>
           </a:solidFill>
           <a:ln>
             <a:noFill/>
@@ -4545,14 +6225,100 @@
       </p:sp>
       <p:sp>
         <p:nvSpPr>
-          <p:cNvPr id="3" name="TextBox 2"/>
+          <p:cNvPr id="3" name="Rectangle 2"/>
+          <p:cNvSpPr/>
+          <p:nvPr/>
+        </p:nvSpPr>
+        <p:spPr>
+          <a:xfrm>
+            <a:off x="4114800" y="0"/>
+            <a:ext cx="8046720" cy="6858000"/>
+          </a:xfrm>
+          <a:prstGeom prst="rect">
+            <a:avLst/>
+          </a:prstGeom>
+          <a:solidFill>
+            <a:srgbClr val="F1F4F8"/>
+          </a:solidFill>
+          <a:ln>
+            <a:noFill/>
+          </a:ln>
+        </p:spPr>
+        <p:style>
+          <a:lnRef idx="1">
+            <a:schemeClr val="accent1"/>
+          </a:lnRef>
+          <a:fillRef idx="3">
+            <a:schemeClr val="accent1"/>
+          </a:fillRef>
+          <a:effectRef idx="2">
+            <a:schemeClr val="accent1"/>
+          </a:effectRef>
+          <a:fontRef idx="minor">
+            <a:schemeClr val="lt1"/>
+          </a:fontRef>
+        </p:style>
+        <p:txBody>
+          <a:bodyPr rtlCol="0" anchor="ctr"/>
+          <a:lstStyle/>
+          <a:p>
+            <a:pPr algn="ctr"/>
+          </a:p>
+        </p:txBody>
+      </p:sp>
+      <p:sp>
+        <p:nvSpPr>
+          <p:cNvPr id="4" name="Rectangle 3"/>
+          <p:cNvSpPr/>
+          <p:nvPr/>
+        </p:nvSpPr>
+        <p:spPr>
+          <a:xfrm>
+            <a:off x="4114800" y="0"/>
+            <a:ext cx="137160" cy="6858000"/>
+          </a:xfrm>
+          <a:prstGeom prst="rect">
+            <a:avLst/>
+          </a:prstGeom>
+          <a:solidFill>
+            <a:srgbClr val="00A0B0"/>
+          </a:solidFill>
+          <a:ln>
+            <a:noFill/>
+          </a:ln>
+        </p:spPr>
+        <p:style>
+          <a:lnRef idx="1">
+            <a:schemeClr val="accent1"/>
+          </a:lnRef>
+          <a:fillRef idx="3">
+            <a:schemeClr val="accent1"/>
+          </a:fillRef>
+          <a:effectRef idx="2">
+            <a:schemeClr val="accent1"/>
+          </a:effectRef>
+          <a:fontRef idx="minor">
+            <a:schemeClr val="lt1"/>
+          </a:fontRef>
+        </p:style>
+        <p:txBody>
+          <a:bodyPr rtlCol="0" anchor="ctr"/>
+          <a:lstStyle/>
+          <a:p>
+            <a:pPr algn="ctr"/>
+          </a:p>
+        </p:txBody>
+      </p:sp>
+      <p:sp>
+        <p:nvSpPr>
+          <p:cNvPr id="5" name="TextBox 4"/>
           <p:cNvSpPr txBox="1"/>
           <p:nvPr/>
         </p:nvSpPr>
         <p:spPr>
           <a:xfrm>
-            <a:off x="457200" y="164592"/>
-            <a:ext cx="10972800" cy="502920"/>
+            <a:off x="274320" y="2103120"/>
+            <a:ext cx="3657600" cy="2286000"/>
           </a:xfrm>
           <a:prstGeom prst="rect">
             <a:avLst/>
@@ -4560,34 +6326,34 @@
           <a:noFill/>
         </p:spPr>
         <p:txBody>
-          <a:bodyPr wrap="square" lIns="45720" rIns="45720" tIns="18288" bIns="18288" anchor="ctr">
+          <a:bodyPr wrap="square" lIns="45720" rIns="45720" tIns="18288" bIns="18288" anchor="t">
             <a:spAutoFit/>
           </a:bodyPr>
           <a:lstStyle/>
           <a:p>
-            <a:pPr algn="l"/>
-            <a:r>
-              <a:rPr sz="2400" b="1" i="0">
-                <a:solidFill>
-                  <a:srgbClr val="FFFFFF"/>
-                </a:solidFill>
-                <a:latin typeface="Calibri"/>
-              </a:rPr>
-              <a:t>Cosa farai oggi</a:t>
-            </a:r>
-          </a:p>
-        </p:txBody>
-      </p:sp>
-      <p:sp>
-        <p:nvSpPr>
-          <p:cNvPr id="4" name="TextBox 3"/>
+            <a:pPr algn="ctr"/>
+            <a:r>
+              <a:rPr sz="17000" b="1" i="0">
+                <a:solidFill>
+                  <a:srgbClr val="00A0B0"/>
+                </a:solidFill>
+                <a:latin typeface="Calibri"/>
+              </a:rPr>
+              <a:t>01</a:t>
+            </a:r>
+          </a:p>
+        </p:txBody>
+      </p:sp>
+      <p:sp>
+        <p:nvSpPr>
+          <p:cNvPr id="6" name="TextBox 5"/>
           <p:cNvSpPr txBox="1"/>
           <p:nvPr/>
         </p:nvSpPr>
         <p:spPr>
           <a:xfrm>
-            <a:off x="640080" y="1005840"/>
-            <a:ext cx="10972800" cy="5029200"/>
+            <a:off x="274320" y="4572000"/>
+            <a:ext cx="3657600" cy="457200"/>
           </a:xfrm>
           <a:prstGeom prst="rect">
             <a:avLst/>
@@ -4595,190 +6361,97 @@
           <a:noFill/>
         </p:spPr>
         <p:txBody>
-          <a:bodyPr wrap="square">
+          <a:bodyPr wrap="square" lIns="45720" rIns="45720" tIns="18288" bIns="18288" anchor="t">
             <a:spAutoFit/>
           </a:bodyPr>
           <a:lstStyle/>
           <a:p>
-            <a:pPr>
-              <a:lnSpc>
-                <a:spcPct val="150000"/>
-              </a:lnSpc>
-            </a:pPr>
-            <a:r>
-              <a:rPr sz="2000" b="1">
-                <a:solidFill>
-                  <a:srgbClr val="00A0B0"/>
-                </a:solidFill>
-                <a:latin typeface="Calibri"/>
-              </a:rPr>
-              <a:t>▸  </a:t>
-            </a:r>
-            <a:r>
-              <a:rPr sz="2000">
-                <a:solidFill>
-                  <a:srgbClr val="1A1A2E"/>
-                </a:solidFill>
-                <a:latin typeface="Calibri"/>
-              </a:rPr>
-              <a:t>Hai imparato 7 capitoli di secure coding</a:t>
-            </a:r>
-          </a:p>
-          <a:p>
-            <a:pPr>
-              <a:lnSpc>
-                <a:spcPct val="150000"/>
-              </a:lnSpc>
-            </a:pPr>
-            <a:r>
-              <a:rPr sz="2000" b="1">
-                <a:solidFill>
-                  <a:srgbClr val="00A0B0"/>
-                </a:solidFill>
-                <a:latin typeface="Calibri"/>
-              </a:rPr>
-              <a:t>▸  </a:t>
-            </a:r>
-            <a:r>
-              <a:rPr sz="2000">
-                <a:solidFill>
-                  <a:srgbClr val="1A1A2E"/>
-                </a:solidFill>
-                <a:latin typeface="Calibri"/>
-              </a:rPr>
-              <a:t>Oggi applichi tutto su un'app vera, in 80 minuti</a:t>
-            </a:r>
-          </a:p>
-          <a:p>
-            <a:pPr>
-              <a:lnSpc>
-                <a:spcPct val="150000"/>
-              </a:lnSpc>
-            </a:pPr>
-            <a:r>
-              <a:rPr sz="2000" b="1">
-                <a:solidFill>
-                  <a:srgbClr val="00A0B0"/>
-                </a:solidFill>
-                <a:latin typeface="Calibri"/>
-              </a:rPr>
-              <a:t>▸  </a:t>
-            </a:r>
-            <a:r>
-              <a:rPr sz="2000">
-                <a:solidFill>
-                  <a:srgbClr val="1A1A2E"/>
-                </a:solidFill>
-                <a:latin typeface="Calibri"/>
-              </a:rPr>
-              <a:t/>
-            </a:r>
-          </a:p>
-          <a:p>
-            <a:pPr>
-              <a:lnSpc>
-                <a:spcPct val="150000"/>
-              </a:lnSpc>
-            </a:pPr>
-            <a:r>
-              <a:rPr sz="2000" b="1">
-                <a:solidFill>
-                  <a:srgbClr val="00A0B0"/>
-                </a:solidFill>
-                <a:latin typeface="Calibri"/>
-              </a:rPr>
-              <a:t>▸  </a:t>
-            </a:r>
-            <a:r>
-              <a:rPr sz="2000">
-                <a:solidFill>
-                  <a:srgbClr val="1A1A2E"/>
-                </a:solidFill>
-                <a:latin typeface="Calibri"/>
-              </a:rPr>
-              <a:t>SCENARIO:</a:t>
-            </a:r>
-          </a:p>
-          <a:p>
-            <a:pPr>
-              <a:lnSpc>
-                <a:spcPct val="150000"/>
-              </a:lnSpc>
-            </a:pPr>
-            <a:r>
-              <a:rPr sz="2000" b="1">
-                <a:solidFill>
-                  <a:srgbClr val="00A0B0"/>
-                </a:solidFill>
-                <a:latin typeface="Calibri"/>
-              </a:rPr>
-              <a:t>▸  </a:t>
-            </a:r>
-            <a:r>
-              <a:rPr sz="2000">
-                <a:solidFill>
-                  <a:srgbClr val="1A1A2E"/>
-                </a:solidFill>
-                <a:latin typeface="Calibri"/>
-              </a:rPr>
-              <a:t>Sei un junior security analyst.</a:t>
-            </a:r>
-          </a:p>
-          <a:p>
-            <a:pPr>
-              <a:lnSpc>
-                <a:spcPct val="150000"/>
-              </a:lnSpc>
-            </a:pPr>
-            <a:r>
-              <a:rPr sz="2000" b="1">
-                <a:solidFill>
-                  <a:srgbClr val="00A0B0"/>
-                </a:solidFill>
-                <a:latin typeface="Calibri"/>
-              </a:rPr>
-              <a:t>▸  </a:t>
-            </a:r>
-            <a:r>
-              <a:rPr sz="2000">
-                <a:solidFill>
-                  <a:srgbClr val="1A1A2E"/>
-                </a:solidFill>
-                <a:latin typeface="Calibri"/>
-              </a:rPr>
-              <a:t>Ti viene affidata una piccola app per una review prima del rilascio.</a:t>
-            </a:r>
-          </a:p>
-          <a:p>
-            <a:pPr>
-              <a:lnSpc>
-                <a:spcPct val="150000"/>
-              </a:lnSpc>
-            </a:pPr>
-            <a:r>
-              <a:rPr sz="2000" b="1">
-                <a:solidFill>
-                  <a:srgbClr val="00A0B0"/>
-                </a:solidFill>
-                <a:latin typeface="Calibri"/>
-              </a:rPr>
-              <a:t>▸  </a:t>
-            </a:r>
-            <a:r>
-              <a:rPr sz="2000">
-                <a:solidFill>
-                  <a:srgbClr val="1A1A2E"/>
-                </a:solidFill>
-                <a:latin typeface="Calibri"/>
-              </a:rPr>
-              <a:t>Output: mini-report scritto.</a:t>
+            <a:pPr algn="ctr"/>
+            <a:r>
+              <a:rPr sz="2000" b="1" i="0">
+                <a:solidFill>
+                  <a:srgbClr val="6FD8E0"/>
+                </a:solidFill>
+                <a:latin typeface="Calibri"/>
+              </a:rPr>
+              <a:t>PARTE</a:t>
+            </a:r>
+          </a:p>
+        </p:txBody>
+      </p:sp>
+      <p:sp>
+        <p:nvSpPr>
+          <p:cNvPr id="7" name="TextBox 6"/>
+          <p:cNvSpPr txBox="1"/>
+          <p:nvPr/>
+        </p:nvSpPr>
+        <p:spPr>
+          <a:xfrm>
+            <a:off x="4572000" y="2286000"/>
+            <a:ext cx="7315200" cy="1645920"/>
+          </a:xfrm>
+          <a:prstGeom prst="rect">
+            <a:avLst/>
+          </a:prstGeom>
+          <a:noFill/>
+        </p:spPr>
+        <p:txBody>
+          <a:bodyPr wrap="square" lIns="45720" rIns="45720" tIns="18288" bIns="18288" anchor="t">
+            <a:spAutoFit/>
+          </a:bodyPr>
+          <a:lstStyle/>
+          <a:p>
+            <a:pPr algn="l"/>
+            <a:r>
+              <a:rPr sz="4400" b="1" i="0">
+                <a:solidFill>
+                  <a:srgbClr val="0F2D52"/>
+                </a:solidFill>
+                <a:latin typeface="Calibri"/>
+              </a:rPr>
+              <a:t>Lo scenario</a:t>
+            </a:r>
+          </a:p>
+        </p:txBody>
+      </p:sp>
+      <p:sp>
+        <p:nvSpPr>
+          <p:cNvPr id="8" name="TextBox 7"/>
+          <p:cNvSpPr txBox="1"/>
+          <p:nvPr/>
+        </p:nvSpPr>
+        <p:spPr>
+          <a:xfrm>
+            <a:off x="4572000" y="3931920"/>
+            <a:ext cx="7315200" cy="1828800"/>
+          </a:xfrm>
+          <a:prstGeom prst="rect">
+            <a:avLst/>
+          </a:prstGeom>
+          <a:noFill/>
+        </p:spPr>
+        <p:txBody>
+          <a:bodyPr wrap="square" lIns="45720" rIns="45720" tIns="18288" bIns="18288" anchor="t">
+            <a:spAutoFit/>
+          </a:bodyPr>
+          <a:lstStyle/>
+          <a:p>
+            <a:pPr algn="l"/>
+            <a:r>
+              <a:rPr sz="1800" b="0" i="1">
+                <a:solidFill>
+                  <a:srgbClr val="6B7280"/>
+                </a:solidFill>
+                <a:latin typeface="Calibri"/>
+              </a:rPr>
+              <a:t>BancaPiccola. Tu, junior security analyst. 80 minuti.</a:t>
             </a:r>
           </a:p>
         </p:txBody>
       </p:sp>
       <p:cxnSp>
         <p:nvCxnSpPr>
-          <p:cNvPr id="5" name="Connector 4"/>
+          <p:cNvPr id="9" name="Connector 8"/>
           <p:cNvCxnSpPr/>
           <p:nvPr/>
         </p:nvCxnSpPr>
@@ -4813,14 +6486,14 @@
       </p:cxnSp>
       <p:sp>
         <p:nvSpPr>
-          <p:cNvPr id="6" name="TextBox 5"/>
+          <p:cNvPr id="10" name="TextBox 9"/>
           <p:cNvSpPr txBox="1"/>
           <p:nvPr/>
         </p:nvSpPr>
         <p:spPr>
           <a:xfrm>
             <a:off x="457200" y="6473952"/>
-            <a:ext cx="7315200" cy="320040"/>
+            <a:ext cx="7315200" cy="292608"/>
           </a:xfrm>
           <a:prstGeom prst="rect">
             <a:avLst/>
@@ -4841,21 +6514,21 @@
                 </a:solidFill>
                 <a:latin typeface="Calibri"/>
               </a:rPr>
-              <a:t>Secure Coding · Corso IFTS STEM · A. Manneschi</a:t>
-            </a:r>
-          </a:p>
-        </p:txBody>
-      </p:sp>
-      <p:sp>
-        <p:nvSpPr>
-          <p:cNvPr id="7" name="TextBox 6"/>
+              <a:t>Secure Coding · Corso IFTS STEM · A. Manneschi · 2024/2025</a:t>
+            </a:r>
+          </a:p>
+        </p:txBody>
+      </p:sp>
+      <p:sp>
+        <p:nvSpPr>
+          <p:cNvPr id="11" name="TextBox 10"/>
           <p:cNvSpPr txBox="1"/>
           <p:nvPr/>
         </p:nvSpPr>
         <p:spPr>
           <a:xfrm>
             <a:off x="10515600" y="6473952"/>
-            <a:ext cx="1188720" cy="320040"/>
+            <a:ext cx="1188720" cy="292608"/>
           </a:xfrm>
           <a:prstGeom prst="rect">
             <a:avLst/>
@@ -4876,7 +6549,7 @@
                 </a:solidFill>
                 <a:latin typeface="Calibri"/>
               </a:rPr>
-              <a:t>L8  ·  2/12</a:t>
+              <a:t>L8  ·  2/14</a:t>
             </a:r>
           </a:p>
         </p:txBody>
@@ -4972,144 +6645,21 @@
                 </a:solidFill>
                 <a:latin typeface="Calibri"/>
               </a:rPr>
-              <a:t>Regole del lab</a:t>
-            </a:r>
-          </a:p>
-        </p:txBody>
-      </p:sp>
-      <p:sp>
-        <p:nvSpPr>
-          <p:cNvPr id="4" name="Rectangle 3"/>
-          <p:cNvSpPr/>
-          <p:nvPr/>
-        </p:nvSpPr>
-        <p:spPr>
-          <a:xfrm>
-            <a:off x="457200" y="1097280"/>
-            <a:ext cx="5486400" cy="640080"/>
-          </a:xfrm>
-          <a:prstGeom prst="rect">
-            <a:avLst/>
-          </a:prstGeom>
-          <a:solidFill>
-            <a:srgbClr val="06A77D"/>
-          </a:solidFill>
-          <a:ln>
-            <a:noFill/>
-          </a:ln>
-        </p:spPr>
-        <p:style>
-          <a:lnRef idx="1">
-            <a:schemeClr val="accent1"/>
-          </a:lnRef>
-          <a:fillRef idx="3">
-            <a:schemeClr val="accent1"/>
-          </a:fillRef>
-          <a:effectRef idx="2">
-            <a:schemeClr val="accent1"/>
-          </a:effectRef>
-          <a:fontRef idx="minor">
-            <a:schemeClr val="lt1"/>
-          </a:fontRef>
-        </p:style>
-        <p:txBody>
-          <a:bodyPr rtlCol="0" anchor="ctr"/>
-          <a:lstStyle/>
-          <a:p>
-            <a:pPr algn="ctr"/>
-          </a:p>
-        </p:txBody>
-      </p:sp>
-      <p:sp>
-        <p:nvSpPr>
-          <p:cNvPr id="5" name="TextBox 4"/>
+              <a:t>🎯  Cosa farai oggi</a:t>
+            </a:r>
+          </a:p>
+        </p:txBody>
+      </p:sp>
+      <p:sp>
+        <p:nvSpPr>
+          <p:cNvPr id="4" name="TextBox 3"/>
           <p:cNvSpPr txBox="1"/>
           <p:nvPr/>
         </p:nvSpPr>
         <p:spPr>
           <a:xfrm>
-            <a:off x="457200" y="1097280"/>
-            <a:ext cx="5486400" cy="640080"/>
-          </a:xfrm>
-          <a:prstGeom prst="rect">
-            <a:avLst/>
-          </a:prstGeom>
-          <a:noFill/>
-        </p:spPr>
-        <p:txBody>
-          <a:bodyPr wrap="square" lIns="45720" rIns="45720" tIns="18288" bIns="18288" anchor="ctr">
-            <a:spAutoFit/>
-          </a:bodyPr>
-          <a:lstStyle/>
-          <a:p>
-            <a:pPr algn="ctr"/>
-            <a:r>
-              <a:rPr sz="1800" b="1" i="0">
-                <a:solidFill>
-                  <a:srgbClr val="FFFFFF"/>
-                </a:solidFill>
-                <a:latin typeface="Calibri"/>
-              </a:rPr>
-              <a:t>✅ PERMESSO</a:t>
-            </a:r>
-          </a:p>
-        </p:txBody>
-      </p:sp>
-      <p:sp>
-        <p:nvSpPr>
-          <p:cNvPr id="6" name="Rectangle 5"/>
-          <p:cNvSpPr/>
-          <p:nvPr/>
-        </p:nvSpPr>
-        <p:spPr>
-          <a:xfrm>
-            <a:off x="457200" y="1737360"/>
-            <a:ext cx="5486400" cy="4937760"/>
-          </a:xfrm>
-          <a:prstGeom prst="rect">
-            <a:avLst/>
-          </a:prstGeom>
-          <a:solidFill>
-            <a:srgbClr val="F1F4F8"/>
-          </a:solidFill>
-          <a:ln>
-            <a:solidFill>
-              <a:srgbClr val="06A77D"/>
-            </a:solidFill>
-          </a:ln>
-        </p:spPr>
-        <p:style>
-          <a:lnRef idx="1">
-            <a:schemeClr val="accent1"/>
-          </a:lnRef>
-          <a:fillRef idx="3">
-            <a:schemeClr val="accent1"/>
-          </a:fillRef>
-          <a:effectRef idx="2">
-            <a:schemeClr val="accent1"/>
-          </a:effectRef>
-          <a:fontRef idx="minor">
-            <a:schemeClr val="lt1"/>
-          </a:fontRef>
-        </p:style>
-        <p:txBody>
-          <a:bodyPr rtlCol="0" anchor="ctr"/>
-          <a:lstStyle/>
-          <a:p>
-            <a:pPr algn="ctr"/>
-          </a:p>
-        </p:txBody>
-      </p:sp>
-      <p:sp>
-        <p:nvSpPr>
-          <p:cNvPr id="7" name="TextBox 6"/>
-          <p:cNvSpPr txBox="1"/>
-          <p:nvPr/>
-        </p:nvSpPr>
-        <p:spPr>
-          <a:xfrm>
-            <a:off x="640080" y="1874519"/>
-            <a:ext cx="5120640" cy="4937760"/>
+            <a:off x="640080" y="1097280"/>
+            <a:ext cx="10972800" cy="5029200"/>
           </a:xfrm>
           <a:prstGeom prst="rect">
             <a:avLst/>
@@ -5124,11 +6674,14 @@
           <a:p>
             <a:pPr>
               <a:lnSpc>
-                <a:spcPct val="140000"/>
+                <a:spcPct val="150000"/>
               </a:lnSpc>
+              <a:spcAft>
+                <a:spcPts val="400"/>
+              </a:spcAft>
             </a:pPr>
             <a:r>
-              <a:rPr sz="1500" b="1">
+              <a:rPr sz="2000" b="1">
                 <a:solidFill>
                   <a:srgbClr val="00A0B0"/>
                 </a:solidFill>
@@ -5137,23 +6690,26 @@
               <a:t>▸  </a:t>
             </a:r>
             <a:r>
-              <a:rPr sz="1500">
+              <a:rPr sz="2000">
                 <a:solidFill>
                   <a:srgbClr val="1A1A2E"/>
                 </a:solidFill>
                 <a:latin typeface="Calibri"/>
               </a:rPr>
-              <a:t>Leggere il codice sorgente</a:t>
+              <a:t>Hai imparato 7 capitoli di secure coding</a:t>
             </a:r>
           </a:p>
           <a:p>
             <a:pPr>
               <a:lnSpc>
-                <a:spcPct val="140000"/>
+                <a:spcPct val="150000"/>
               </a:lnSpc>
+              <a:spcAft>
+                <a:spcPts val="400"/>
+              </a:spcAft>
             </a:pPr>
             <a:r>
-              <a:rPr sz="1500" b="1">
+              <a:rPr sz="2000" b="1">
                 <a:solidFill>
                   <a:srgbClr val="00A0B0"/>
                 </a:solidFill>
@@ -5162,23 +6718,26 @@
               <a:t>▸  </a:t>
             </a:r>
             <a:r>
-              <a:rPr sz="1500">
+              <a:rPr sz="2000">
                 <a:solidFill>
                   <a:srgbClr val="1A1A2E"/>
                 </a:solidFill>
                 <a:latin typeface="Calibri"/>
               </a:rPr>
-              <a:t>DevTools, curl, sqlite3, DB Browser</a:t>
+              <a:t>Oggi APPLICHI tutto su un'app vera, in 80 minuti</a:t>
             </a:r>
           </a:p>
           <a:p>
             <a:pPr>
               <a:lnSpc>
-                <a:spcPct val="140000"/>
+                <a:spcPct val="150000"/>
               </a:lnSpc>
+              <a:spcAft>
+                <a:spcPts val="400"/>
+              </a:spcAft>
             </a:pPr>
             <a:r>
-              <a:rPr sz="1500" b="1">
+              <a:rPr sz="2000" b="1">
                 <a:solidFill>
                   <a:srgbClr val="00A0B0"/>
                 </a:solidFill>
@@ -5187,23 +6746,26 @@
               <a:t>▸  </a:t>
             </a:r>
             <a:r>
-              <a:rPr sz="1500">
+              <a:rPr sz="2000">
                 <a:solidFill>
                   <a:srgbClr val="1A1A2E"/>
                 </a:solidFill>
                 <a:latin typeface="Calibri"/>
               </a:rPr>
-              <a:t>Lavorare a coppie</a:t>
+              <a:t/>
             </a:r>
           </a:p>
           <a:p>
             <a:pPr>
               <a:lnSpc>
-                <a:spcPct val="140000"/>
+                <a:spcPct val="150000"/>
               </a:lnSpc>
+              <a:spcAft>
+                <a:spcPts val="400"/>
+              </a:spcAft>
             </a:pPr>
             <a:r>
-              <a:rPr sz="1500" b="1">
+              <a:rPr sz="2000" b="1">
                 <a:solidFill>
                   <a:srgbClr val="00A0B0"/>
                 </a:solidFill>
@@ -5212,23 +6774,26 @@
               <a:t>▸  </a:t>
             </a:r>
             <a:r>
-              <a:rPr sz="1500">
+              <a:rPr sz="2000">
                 <a:solidFill>
                   <a:srgbClr val="1A1A2E"/>
                 </a:solidFill>
                 <a:latin typeface="Calibri"/>
               </a:rPr>
-              <a:t>1 hint gratis dal docente</a:t>
+              <a:t>SCENARIO:</a:t>
             </a:r>
           </a:p>
           <a:p>
             <a:pPr>
               <a:lnSpc>
-                <a:spcPct val="140000"/>
+                <a:spcPct val="150000"/>
               </a:lnSpc>
+              <a:spcAft>
+                <a:spcPts val="400"/>
+              </a:spcAft>
             </a:pPr>
             <a:r>
-              <a:rPr sz="1500" b="1">
+              <a:rPr sz="2000" b="1">
                 <a:solidFill>
                   <a:srgbClr val="00A0B0"/>
                 </a:solidFill>
@@ -5237,169 +6802,26 @@
               <a:t>▸  </a:t>
             </a:r>
             <a:r>
-              <a:rPr sz="1500">
+              <a:rPr sz="2000">
                 <a:solidFill>
                   <a:srgbClr val="1A1A2E"/>
                 </a:solidFill>
                 <a:latin typeface="Calibri"/>
               </a:rPr>
-              <a:t>Consultare le dispense</a:t>
-            </a:r>
-          </a:p>
-        </p:txBody>
-      </p:sp>
-      <p:sp>
-        <p:nvSpPr>
-          <p:cNvPr id="8" name="Rectangle 7"/>
-          <p:cNvSpPr/>
-          <p:nvPr/>
-        </p:nvSpPr>
-        <p:spPr>
-          <a:xfrm>
-            <a:off x="6217920" y="1097280"/>
-            <a:ext cx="5486400" cy="640080"/>
-          </a:xfrm>
-          <a:prstGeom prst="rect">
-            <a:avLst/>
-          </a:prstGeom>
-          <a:solidFill>
-            <a:srgbClr val="E63946"/>
-          </a:solidFill>
-          <a:ln>
-            <a:noFill/>
-          </a:ln>
-        </p:spPr>
-        <p:style>
-          <a:lnRef idx="1">
-            <a:schemeClr val="accent1"/>
-          </a:lnRef>
-          <a:fillRef idx="3">
-            <a:schemeClr val="accent1"/>
-          </a:fillRef>
-          <a:effectRef idx="2">
-            <a:schemeClr val="accent1"/>
-          </a:effectRef>
-          <a:fontRef idx="minor">
-            <a:schemeClr val="lt1"/>
-          </a:fontRef>
-        </p:style>
-        <p:txBody>
-          <a:bodyPr rtlCol="0" anchor="ctr"/>
-          <a:lstStyle/>
-          <a:p>
-            <a:pPr algn="ctr"/>
-          </a:p>
-        </p:txBody>
-      </p:sp>
-      <p:sp>
-        <p:nvSpPr>
-          <p:cNvPr id="9" name="TextBox 8"/>
-          <p:cNvSpPr txBox="1"/>
-          <p:nvPr/>
-        </p:nvSpPr>
-        <p:spPr>
-          <a:xfrm>
-            <a:off x="6217920" y="1097280"/>
-            <a:ext cx="5486400" cy="640080"/>
-          </a:xfrm>
-          <a:prstGeom prst="rect">
-            <a:avLst/>
-          </a:prstGeom>
-          <a:noFill/>
-        </p:spPr>
-        <p:txBody>
-          <a:bodyPr wrap="square" lIns="45720" rIns="45720" tIns="18288" bIns="18288" anchor="ctr">
-            <a:spAutoFit/>
-          </a:bodyPr>
-          <a:lstStyle/>
-          <a:p>
-            <a:pPr algn="ctr"/>
-            <a:r>
-              <a:rPr sz="1800" b="1" i="0">
-                <a:solidFill>
-                  <a:srgbClr val="FFFFFF"/>
-                </a:solidFill>
-                <a:latin typeface="Calibri"/>
-              </a:rPr>
-              <a:t>🚫 NON PERMESSO</a:t>
-            </a:r>
-          </a:p>
-        </p:txBody>
-      </p:sp>
-      <p:sp>
-        <p:nvSpPr>
-          <p:cNvPr id="10" name="Rectangle 9"/>
-          <p:cNvSpPr/>
-          <p:nvPr/>
-        </p:nvSpPr>
-        <p:spPr>
-          <a:xfrm>
-            <a:off x="6217920" y="1737360"/>
-            <a:ext cx="5486400" cy="4937760"/>
-          </a:xfrm>
-          <a:prstGeom prst="rect">
-            <a:avLst/>
-          </a:prstGeom>
-          <a:solidFill>
-            <a:srgbClr val="F1F4F8"/>
-          </a:solidFill>
-          <a:ln>
-            <a:solidFill>
-              <a:srgbClr val="E63946"/>
-            </a:solidFill>
-          </a:ln>
-        </p:spPr>
-        <p:style>
-          <a:lnRef idx="1">
-            <a:schemeClr val="accent1"/>
-          </a:lnRef>
-          <a:fillRef idx="3">
-            <a:schemeClr val="accent1"/>
-          </a:fillRef>
-          <a:effectRef idx="2">
-            <a:schemeClr val="accent1"/>
-          </a:effectRef>
-          <a:fontRef idx="minor">
-            <a:schemeClr val="lt1"/>
-          </a:fontRef>
-        </p:style>
-        <p:txBody>
-          <a:bodyPr rtlCol="0" anchor="ctr"/>
-          <a:lstStyle/>
-          <a:p>
-            <a:pPr algn="ctr"/>
-          </a:p>
-        </p:txBody>
-      </p:sp>
-      <p:sp>
-        <p:nvSpPr>
-          <p:cNvPr id="11" name="TextBox 10"/>
-          <p:cNvSpPr txBox="1"/>
-          <p:nvPr/>
-        </p:nvSpPr>
-        <p:spPr>
-          <a:xfrm>
-            <a:off x="6400800" y="1874519"/>
-            <a:ext cx="5120640" cy="4937760"/>
-          </a:xfrm>
-          <a:prstGeom prst="rect">
-            <a:avLst/>
-          </a:prstGeom>
-          <a:noFill/>
-        </p:spPr>
-        <p:txBody>
-          <a:bodyPr wrap="square">
-            <a:spAutoFit/>
-          </a:bodyPr>
-          <a:lstStyle/>
+              <a:t>Sei un junior security analyst</a:t>
+            </a:r>
+          </a:p>
           <a:p>
             <a:pPr>
               <a:lnSpc>
-                <a:spcPct val="140000"/>
+                <a:spcPct val="150000"/>
               </a:lnSpc>
+              <a:spcAft>
+                <a:spcPts val="400"/>
+              </a:spcAft>
             </a:pPr>
             <a:r>
-              <a:rPr sz="1500" b="1">
+              <a:rPr sz="2000" b="1">
                 <a:solidFill>
                   <a:srgbClr val="00A0B0"/>
                 </a:solidFill>
@@ -5408,23 +6830,26 @@
               <a:t>▸  </a:t>
             </a:r>
             <a:r>
-              <a:rPr sz="1500">
+              <a:rPr sz="2000">
                 <a:solidFill>
                   <a:srgbClr val="1A1A2E"/>
                 </a:solidFill>
                 <a:latin typeface="Calibri"/>
               </a:rPr>
-              <a:t>Aprire la versione corretta</a:t>
+              <a:t>Ti viene affidata una piccola app per una review prima del rilascio</a:t>
             </a:r>
           </a:p>
           <a:p>
             <a:pPr>
               <a:lnSpc>
-                <a:spcPct val="140000"/>
+                <a:spcPct val="150000"/>
               </a:lnSpc>
+              <a:spcAft>
+                <a:spcPts val="400"/>
+              </a:spcAft>
             </a:pPr>
             <a:r>
-              <a:rPr sz="1500" b="1">
+              <a:rPr sz="2000" b="1">
                 <a:solidFill>
                   <a:srgbClr val="00A0B0"/>
                 </a:solidFill>
@@ -5433,70 +6858,20 @@
               <a:t>▸  </a:t>
             </a:r>
             <a:r>
-              <a:rPr sz="1500">
+              <a:rPr sz="2000">
                 <a:solidFill>
                   <a:srgbClr val="1A1A2E"/>
                 </a:solidFill>
                 <a:latin typeface="Calibri"/>
               </a:rPr>
-              <a:t>Cercare la soluzione su Google</a:t>
-            </a:r>
-          </a:p>
-          <a:p>
-            <a:pPr>
-              <a:lnSpc>
-                <a:spcPct val="140000"/>
-              </a:lnSpc>
-            </a:pPr>
-            <a:r>
-              <a:rPr sz="1500" b="1">
-                <a:solidFill>
-                  <a:srgbClr val="00A0B0"/>
-                </a:solidFill>
-                <a:latin typeface="Calibri"/>
-              </a:rPr>
-              <a:t>▸  </a:t>
-            </a:r>
-            <a:r>
-              <a:rPr sz="1500">
-                <a:solidFill>
-                  <a:srgbClr val="1A1A2E"/>
-                </a:solidFill>
-                <a:latin typeface="Calibri"/>
-              </a:rPr>
-              <a:t>Copiare il report</a:t>
-            </a:r>
-          </a:p>
-          <a:p>
-            <a:pPr>
-              <a:lnSpc>
-                <a:spcPct val="140000"/>
-              </a:lnSpc>
-            </a:pPr>
-            <a:r>
-              <a:rPr sz="1500" b="1">
-                <a:solidFill>
-                  <a:srgbClr val="00A0B0"/>
-                </a:solidFill>
-                <a:latin typeface="Calibri"/>
-              </a:rPr>
-              <a:t>▸  </a:t>
-            </a:r>
-            <a:r>
-              <a:rPr sz="1500">
-                <a:solidFill>
-                  <a:srgbClr val="1A1A2E"/>
-                </a:solidFill>
-                <a:latin typeface="Calibri"/>
-              </a:rPr>
-              <a:t>2° hint costa -5% sul voto</a:t>
+              <a:t>Output: mini-report scritto</a:t>
             </a:r>
           </a:p>
         </p:txBody>
       </p:sp>
       <p:cxnSp>
         <p:nvCxnSpPr>
-          <p:cNvPr id="12" name="Connector 11"/>
+          <p:cNvPr id="5" name="Connector 4"/>
           <p:cNvCxnSpPr/>
           <p:nvPr/>
         </p:nvCxnSpPr>
@@ -5531,14 +6906,14 @@
       </p:cxnSp>
       <p:sp>
         <p:nvSpPr>
-          <p:cNvPr id="13" name="TextBox 12"/>
+          <p:cNvPr id="6" name="TextBox 5"/>
           <p:cNvSpPr txBox="1"/>
           <p:nvPr/>
         </p:nvSpPr>
         <p:spPr>
           <a:xfrm>
             <a:off x="457200" y="6473952"/>
-            <a:ext cx="7315200" cy="320040"/>
+            <a:ext cx="7315200" cy="292608"/>
           </a:xfrm>
           <a:prstGeom prst="rect">
             <a:avLst/>
@@ -5559,21 +6934,21 @@
                 </a:solidFill>
                 <a:latin typeface="Calibri"/>
               </a:rPr>
-              <a:t>Secure Coding · Corso IFTS STEM · A. Manneschi</a:t>
-            </a:r>
-          </a:p>
-        </p:txBody>
-      </p:sp>
-      <p:sp>
-        <p:nvSpPr>
-          <p:cNvPr id="14" name="TextBox 13"/>
+              <a:t>Secure Coding · Corso IFTS STEM · A. Manneschi · 2024/2025</a:t>
+            </a:r>
+          </a:p>
+        </p:txBody>
+      </p:sp>
+      <p:sp>
+        <p:nvSpPr>
+          <p:cNvPr id="7" name="TextBox 6"/>
           <p:cNvSpPr txBox="1"/>
           <p:nvPr/>
         </p:nvSpPr>
         <p:spPr>
           <a:xfrm>
             <a:off x="10515600" y="6473952"/>
-            <a:ext cx="1188720" cy="320040"/>
+            <a:ext cx="1188720" cy="292608"/>
           </a:xfrm>
           <a:prstGeom prst="rect">
             <a:avLst/>
@@ -5594,7 +6969,7 @@
                 </a:solidFill>
                 <a:latin typeface="Calibri"/>
               </a:rPr>
-              <a:t>L8  ·  3/12</a:t>
+              <a:t>L8  ·  3/14</a:t>
             </a:r>
           </a:p>
         </p:txBody>
@@ -5690,21 +7065,148 @@
                 </a:solidFill>
                 <a:latin typeface="Calibri"/>
               </a:rPr>
-              <a:t>Cheat-sheet di campo (1)</a:t>
-            </a:r>
-          </a:p>
-        </p:txBody>
-      </p:sp>
-      <p:sp>
-        <p:nvSpPr>
-          <p:cNvPr id="4" name="TextBox 3"/>
+              <a:t>Regole del lab</a:t>
+            </a:r>
+          </a:p>
+        </p:txBody>
+      </p:sp>
+      <p:sp>
+        <p:nvSpPr>
+          <p:cNvPr id="4" name="Rounded Rectangle 3"/>
+          <p:cNvSpPr/>
+          <p:nvPr/>
+        </p:nvSpPr>
+        <p:spPr>
+          <a:xfrm>
+            <a:off x="457200" y="1051560"/>
+            <a:ext cx="5486400" cy="640080"/>
+          </a:xfrm>
+          <a:prstGeom prst="roundRect">
+            <a:avLst>
+              <a:gd name="adj" fmla="val 8000"/>
+            </a:avLst>
+          </a:prstGeom>
+          <a:solidFill>
+            <a:srgbClr val="06A77D"/>
+          </a:solidFill>
+          <a:ln>
+            <a:noFill/>
+          </a:ln>
+        </p:spPr>
+        <p:style>
+          <a:lnRef idx="1">
+            <a:schemeClr val="accent1"/>
+          </a:lnRef>
+          <a:fillRef idx="3">
+            <a:schemeClr val="accent1"/>
+          </a:fillRef>
+          <a:effectRef idx="2">
+            <a:schemeClr val="accent1"/>
+          </a:effectRef>
+          <a:fontRef idx="minor">
+            <a:schemeClr val="lt1"/>
+          </a:fontRef>
+        </p:style>
+        <p:txBody>
+          <a:bodyPr rtlCol="0" anchor="ctr"/>
+          <a:lstStyle/>
+          <a:p>
+            <a:pPr algn="ctr"/>
+          </a:p>
+        </p:txBody>
+      </p:sp>
+      <p:sp>
+        <p:nvSpPr>
+          <p:cNvPr id="5" name="TextBox 4"/>
           <p:cNvSpPr txBox="1"/>
           <p:nvPr/>
         </p:nvSpPr>
         <p:spPr>
           <a:xfrm>
-            <a:off x="640080" y="1005840"/>
-            <a:ext cx="10972800" cy="5029200"/>
+            <a:off x="457200" y="1051560"/>
+            <a:ext cx="5486400" cy="640080"/>
+          </a:xfrm>
+          <a:prstGeom prst="rect">
+            <a:avLst/>
+          </a:prstGeom>
+          <a:noFill/>
+        </p:spPr>
+        <p:txBody>
+          <a:bodyPr wrap="square" lIns="45720" rIns="45720" tIns="18288" bIns="18288" anchor="ctr">
+            <a:spAutoFit/>
+          </a:bodyPr>
+          <a:lstStyle/>
+          <a:p>
+            <a:pPr algn="ctr"/>
+            <a:r>
+              <a:rPr sz="1800" b="1" i="0">
+                <a:solidFill>
+                  <a:srgbClr val="FFFFFF"/>
+                </a:solidFill>
+                <a:latin typeface="Calibri"/>
+              </a:rPr>
+              <a:t>✅ PERMESSO</a:t>
+            </a:r>
+          </a:p>
+        </p:txBody>
+      </p:sp>
+      <p:sp>
+        <p:nvSpPr>
+          <p:cNvPr id="6" name="Rounded Rectangle 5"/>
+          <p:cNvSpPr/>
+          <p:nvPr/>
+        </p:nvSpPr>
+        <p:spPr>
+          <a:xfrm>
+            <a:off x="457200" y="1737360"/>
+            <a:ext cx="5486400" cy="4572000"/>
+          </a:xfrm>
+          <a:prstGeom prst="roundRect">
+            <a:avLst>
+              <a:gd name="adj" fmla="val 8000"/>
+            </a:avLst>
+          </a:prstGeom>
+          <a:solidFill>
+            <a:srgbClr val="FBFBFD"/>
+          </a:solidFill>
+          <a:ln w="25400">
+            <a:solidFill>
+              <a:srgbClr val="06A77D"/>
+            </a:solidFill>
+          </a:ln>
+        </p:spPr>
+        <p:style>
+          <a:lnRef idx="1">
+            <a:schemeClr val="accent1"/>
+          </a:lnRef>
+          <a:fillRef idx="3">
+            <a:schemeClr val="accent1"/>
+          </a:fillRef>
+          <a:effectRef idx="2">
+            <a:schemeClr val="accent1"/>
+          </a:effectRef>
+          <a:fontRef idx="minor">
+            <a:schemeClr val="lt1"/>
+          </a:fontRef>
+        </p:style>
+        <p:txBody>
+          <a:bodyPr rtlCol="0" anchor="ctr"/>
+          <a:lstStyle/>
+          <a:p>
+            <a:pPr algn="ctr"/>
+          </a:p>
+        </p:txBody>
+      </p:sp>
+      <p:sp>
+        <p:nvSpPr>
+          <p:cNvPr id="7" name="TextBox 6"/>
+          <p:cNvSpPr txBox="1"/>
+          <p:nvPr/>
+        </p:nvSpPr>
+        <p:spPr>
+          <a:xfrm>
+            <a:off x="640080" y="1874519"/>
+            <a:ext cx="5120640" cy="4572000"/>
           </a:xfrm>
           <a:prstGeom prst="rect">
             <a:avLst/>
@@ -5721,24 +7223,27 @@
               <a:lnSpc>
                 <a:spcPct val="150000"/>
               </a:lnSpc>
+              <a:spcAft>
+                <a:spcPts val="400"/>
+              </a:spcAft>
             </a:pPr>
             <a:r>
-              <a:rPr sz="2000" b="1">
-                <a:solidFill>
-                  <a:srgbClr val="00A0B0"/>
+              <a:rPr sz="1500" b="1">
+                <a:solidFill>
+                  <a:srgbClr val="06A77D"/>
                 </a:solidFill>
                 <a:latin typeface="Calibri"/>
               </a:rPr>
               <a:t>▸  </a:t>
             </a:r>
             <a:r>
-              <a:rPr sz="2000">
+              <a:rPr sz="1500">
                 <a:solidFill>
                   <a:srgbClr val="1A1A2E"/>
                 </a:solidFill>
                 <a:latin typeface="Calibri"/>
               </a:rPr>
-              <a:t>SQL Injection?</a:t>
+              <a:t>Leggere il codice sorgente</a:t>
             </a:r>
           </a:p>
           <a:p>
@@ -5746,24 +7251,27 @@
               <a:lnSpc>
                 <a:spcPct val="150000"/>
               </a:lnSpc>
+              <a:spcAft>
+                <a:spcPts val="400"/>
+              </a:spcAft>
             </a:pPr>
             <a:r>
-              <a:rPr sz="2000" b="1">
-                <a:solidFill>
-                  <a:srgbClr val="00A0B0"/>
+              <a:rPr sz="1500" b="1">
+                <a:solidFill>
+                  <a:srgbClr val="06A77D"/>
                 </a:solidFill>
                 <a:latin typeface="Calibri"/>
               </a:rPr>
               <a:t>▸  </a:t>
             </a:r>
             <a:r>
-              <a:rPr sz="2000">
+              <a:rPr sz="1500">
                 <a:solidFill>
                   <a:srgbClr val="1A1A2E"/>
                 </a:solidFill>
                 <a:latin typeface="Calibri"/>
               </a:rPr>
-              <a:t>  Form login, ricerca, parametri in WHERE</a:t>
+              <a:t>DevTools, curl, sqlite3, DB Browser</a:t>
             </a:r>
           </a:p>
           <a:p>
@@ -5771,24 +7279,27 @@
               <a:lnSpc>
                 <a:spcPct val="150000"/>
               </a:lnSpc>
+              <a:spcAft>
+                <a:spcPts val="400"/>
+              </a:spcAft>
             </a:pPr>
             <a:r>
-              <a:rPr sz="2000" b="1">
-                <a:solidFill>
-                  <a:srgbClr val="00A0B0"/>
+              <a:rPr sz="1500" b="1">
+                <a:solidFill>
+                  <a:srgbClr val="06A77D"/>
                 </a:solidFill>
                 <a:latin typeface="Calibri"/>
               </a:rPr>
               <a:t>▸  </a:t>
             </a:r>
             <a:r>
-              <a:rPr sz="2000">
+              <a:rPr sz="1500">
                 <a:solidFill>
                   <a:srgbClr val="1A1A2E"/>
                 </a:solidFill>
                 <a:latin typeface="Calibri"/>
               </a:rPr>
-              <a:t>  Test: '   ' OR '1'='1'   admin' --</a:t>
+              <a:t>Lavorare a coppie</a:t>
             </a:r>
           </a:p>
           <a:p>
@@ -5796,24 +7307,27 @@
               <a:lnSpc>
                 <a:spcPct val="150000"/>
               </a:lnSpc>
+              <a:spcAft>
+                <a:spcPts val="400"/>
+              </a:spcAft>
             </a:pPr>
             <a:r>
-              <a:rPr sz="2000" b="1">
-                <a:solidFill>
-                  <a:srgbClr val="00A0B0"/>
+              <a:rPr sz="1500" b="1">
+                <a:solidFill>
+                  <a:srgbClr val="06A77D"/>
                 </a:solidFill>
                 <a:latin typeface="Calibri"/>
               </a:rPr>
               <a:t>▸  </a:t>
             </a:r>
             <a:r>
-              <a:rPr sz="2000">
+              <a:rPr sz="1500">
                 <a:solidFill>
                   <a:srgbClr val="1A1A2E"/>
                 </a:solidFill>
                 <a:latin typeface="Calibri"/>
               </a:rPr>
-              <a:t/>
+              <a:t>1 hint gratis dal docente</a:t>
             </a:r>
           </a:p>
           <a:p>
@@ -5821,49 +7335,205 @@
               <a:lnSpc>
                 <a:spcPct val="150000"/>
               </a:lnSpc>
+              <a:spcAft>
+                <a:spcPts val="400"/>
+              </a:spcAft>
             </a:pPr>
             <a:r>
-              <a:rPr sz="2000" b="1">
-                <a:solidFill>
-                  <a:srgbClr val="00A0B0"/>
+              <a:rPr sz="1500" b="1">
+                <a:solidFill>
+                  <a:srgbClr val="06A77D"/>
                 </a:solidFill>
                 <a:latin typeface="Calibri"/>
               </a:rPr>
               <a:t>▸  </a:t>
             </a:r>
             <a:r>
-              <a:rPr sz="2000">
+              <a:rPr sz="1500">
                 <a:solidFill>
                   <a:srgbClr val="1A1A2E"/>
                 </a:solidFill>
                 <a:latin typeface="Calibri"/>
               </a:rPr>
-              <a:t>IDOR?</a:t>
-            </a:r>
-          </a:p>
+              <a:t>Consultare le dispense</a:t>
+            </a:r>
+          </a:p>
+        </p:txBody>
+      </p:sp>
+      <p:sp>
+        <p:nvSpPr>
+          <p:cNvPr id="8" name="Rounded Rectangle 7"/>
+          <p:cNvSpPr/>
+          <p:nvPr/>
+        </p:nvSpPr>
+        <p:spPr>
+          <a:xfrm>
+            <a:off x="6217920" y="1051560"/>
+            <a:ext cx="5486400" cy="640080"/>
+          </a:xfrm>
+          <a:prstGeom prst="roundRect">
+            <a:avLst>
+              <a:gd name="adj" fmla="val 8000"/>
+            </a:avLst>
+          </a:prstGeom>
+          <a:solidFill>
+            <a:srgbClr val="E63946"/>
+          </a:solidFill>
+          <a:ln>
+            <a:noFill/>
+          </a:ln>
+        </p:spPr>
+        <p:style>
+          <a:lnRef idx="1">
+            <a:schemeClr val="accent1"/>
+          </a:lnRef>
+          <a:fillRef idx="3">
+            <a:schemeClr val="accent1"/>
+          </a:fillRef>
+          <a:effectRef idx="2">
+            <a:schemeClr val="accent1"/>
+          </a:effectRef>
+          <a:fontRef idx="minor">
+            <a:schemeClr val="lt1"/>
+          </a:fontRef>
+        </p:style>
+        <p:txBody>
+          <a:bodyPr rtlCol="0" anchor="ctr"/>
+          <a:lstStyle/>
+          <a:p>
+            <a:pPr algn="ctr"/>
+          </a:p>
+        </p:txBody>
+      </p:sp>
+      <p:sp>
+        <p:nvSpPr>
+          <p:cNvPr id="9" name="TextBox 8"/>
+          <p:cNvSpPr txBox="1"/>
+          <p:nvPr/>
+        </p:nvSpPr>
+        <p:spPr>
+          <a:xfrm>
+            <a:off x="6217920" y="1051560"/>
+            <a:ext cx="5486400" cy="640080"/>
+          </a:xfrm>
+          <a:prstGeom prst="rect">
+            <a:avLst/>
+          </a:prstGeom>
+          <a:noFill/>
+        </p:spPr>
+        <p:txBody>
+          <a:bodyPr wrap="square" lIns="45720" rIns="45720" tIns="18288" bIns="18288" anchor="ctr">
+            <a:spAutoFit/>
+          </a:bodyPr>
+          <a:lstStyle/>
+          <a:p>
+            <a:pPr algn="ctr"/>
+            <a:r>
+              <a:rPr sz="1800" b="1" i="0">
+                <a:solidFill>
+                  <a:srgbClr val="FFFFFF"/>
+                </a:solidFill>
+                <a:latin typeface="Calibri"/>
+              </a:rPr>
+              <a:t>🚫 NON PERMESSO</a:t>
+            </a:r>
+          </a:p>
+        </p:txBody>
+      </p:sp>
+      <p:sp>
+        <p:nvSpPr>
+          <p:cNvPr id="10" name="Rounded Rectangle 9"/>
+          <p:cNvSpPr/>
+          <p:nvPr/>
+        </p:nvSpPr>
+        <p:spPr>
+          <a:xfrm>
+            <a:off x="6217920" y="1737360"/>
+            <a:ext cx="5486400" cy="4572000"/>
+          </a:xfrm>
+          <a:prstGeom prst="roundRect">
+            <a:avLst>
+              <a:gd name="adj" fmla="val 8000"/>
+            </a:avLst>
+          </a:prstGeom>
+          <a:solidFill>
+            <a:srgbClr val="FBFBFD"/>
+          </a:solidFill>
+          <a:ln w="25400">
+            <a:solidFill>
+              <a:srgbClr val="E63946"/>
+            </a:solidFill>
+          </a:ln>
+        </p:spPr>
+        <p:style>
+          <a:lnRef idx="1">
+            <a:schemeClr val="accent1"/>
+          </a:lnRef>
+          <a:fillRef idx="3">
+            <a:schemeClr val="accent1"/>
+          </a:fillRef>
+          <a:effectRef idx="2">
+            <a:schemeClr val="accent1"/>
+          </a:effectRef>
+          <a:fontRef idx="minor">
+            <a:schemeClr val="lt1"/>
+          </a:fontRef>
+        </p:style>
+        <p:txBody>
+          <a:bodyPr rtlCol="0" anchor="ctr"/>
+          <a:lstStyle/>
+          <a:p>
+            <a:pPr algn="ctr"/>
+          </a:p>
+        </p:txBody>
+      </p:sp>
+      <p:sp>
+        <p:nvSpPr>
+          <p:cNvPr id="11" name="TextBox 10"/>
+          <p:cNvSpPr txBox="1"/>
+          <p:nvPr/>
+        </p:nvSpPr>
+        <p:spPr>
+          <a:xfrm>
+            <a:off x="6400800" y="1874519"/>
+            <a:ext cx="5120640" cy="4572000"/>
+          </a:xfrm>
+          <a:prstGeom prst="rect">
+            <a:avLst/>
+          </a:prstGeom>
+          <a:noFill/>
+        </p:spPr>
+        <p:txBody>
+          <a:bodyPr wrap="square">
+            <a:spAutoFit/>
+          </a:bodyPr>
+          <a:lstStyle/>
           <a:p>
             <a:pPr>
               <a:lnSpc>
                 <a:spcPct val="150000"/>
               </a:lnSpc>
+              <a:spcAft>
+                <a:spcPts val="400"/>
+              </a:spcAft>
             </a:pPr>
             <a:r>
-              <a:rPr sz="2000" b="1">
-                <a:solidFill>
-                  <a:srgbClr val="00A0B0"/>
+              <a:rPr sz="1500" b="1">
+                <a:solidFill>
+                  <a:srgbClr val="E63946"/>
                 </a:solidFill>
                 <a:latin typeface="Calibri"/>
               </a:rPr>
               <a:t>▸  </a:t>
             </a:r>
             <a:r>
-              <a:rPr sz="2000">
+              <a:rPr sz="1500">
                 <a:solidFill>
                   <a:srgbClr val="1A1A2E"/>
                 </a:solidFill>
                 <a:latin typeface="Calibri"/>
               </a:rPr>
-              <a:t>  URL con ID numerici (/fattura/42)</a:t>
+              <a:t>Aprire la versione corretta</a:t>
             </a:r>
           </a:p>
           <a:p>
@@ -5871,24 +7541,27 @@
               <a:lnSpc>
                 <a:spcPct val="150000"/>
               </a:lnSpc>
+              <a:spcAft>
+                <a:spcPts val="400"/>
+              </a:spcAft>
             </a:pPr>
             <a:r>
-              <a:rPr sz="2000" b="1">
-                <a:solidFill>
-                  <a:srgbClr val="00A0B0"/>
+              <a:rPr sz="1500" b="1">
+                <a:solidFill>
+                  <a:srgbClr val="E63946"/>
                 </a:solidFill>
                 <a:latin typeface="Calibri"/>
               </a:rPr>
               <a:t>▸  </a:t>
             </a:r>
             <a:r>
-              <a:rPr sz="2000">
+              <a:rPr sz="1500">
                 <a:solidFill>
                   <a:srgbClr val="1A1A2E"/>
                 </a:solidFill>
                 <a:latin typeface="Calibri"/>
               </a:rPr>
-              <a:t>  Cambia l'ID, vedi se accedi</a:t>
+              <a:t>Cercare la soluzione su Google</a:t>
             </a:r>
           </a:p>
           <a:p>
@@ -5896,24 +7569,27 @@
               <a:lnSpc>
                 <a:spcPct val="150000"/>
               </a:lnSpc>
+              <a:spcAft>
+                <a:spcPts val="400"/>
+              </a:spcAft>
             </a:pPr>
             <a:r>
-              <a:rPr sz="2000" b="1">
-                <a:solidFill>
-                  <a:srgbClr val="00A0B0"/>
+              <a:rPr sz="1500" b="1">
+                <a:solidFill>
+                  <a:srgbClr val="E63946"/>
                 </a:solidFill>
                 <a:latin typeface="Calibri"/>
               </a:rPr>
               <a:t>▸  </a:t>
             </a:r>
             <a:r>
-              <a:rPr sz="2000">
+              <a:rPr sz="1500">
                 <a:solidFill>
                   <a:srgbClr val="1A1A2E"/>
                 </a:solidFill>
                 <a:latin typeface="Calibri"/>
               </a:rPr>
-              <a:t/>
+              <a:t>Copiare il report</a:t>
             </a:r>
           </a:p>
           <a:p>
@@ -5921,24 +7597,27 @@
               <a:lnSpc>
                 <a:spcPct val="150000"/>
               </a:lnSpc>
+              <a:spcAft>
+                <a:spcPts val="400"/>
+              </a:spcAft>
             </a:pPr>
             <a:r>
-              <a:rPr sz="2000" b="1">
-                <a:solidFill>
-                  <a:srgbClr val="00A0B0"/>
+              <a:rPr sz="1500" b="1">
+                <a:solidFill>
+                  <a:srgbClr val="E63946"/>
                 </a:solidFill>
                 <a:latin typeface="Calibri"/>
               </a:rPr>
               <a:t>▸  </a:t>
             </a:r>
             <a:r>
-              <a:rPr sz="2000">
+              <a:rPr sz="1500">
                 <a:solidFill>
                   <a:srgbClr val="1A1A2E"/>
                 </a:solidFill>
                 <a:latin typeface="Calibri"/>
               </a:rPr>
-              <a:t>XSS?</a:t>
+              <a:t>2° hint costa -5% sul voto</a:t>
             </a:r>
           </a:p>
           <a:p>
@@ -5946,56 +7625,34 @@
               <a:lnSpc>
                 <a:spcPct val="150000"/>
               </a:lnSpc>
+              <a:spcAft>
+                <a:spcPts val="400"/>
+              </a:spcAft>
             </a:pPr>
             <a:r>
-              <a:rPr sz="2000" b="1">
-                <a:solidFill>
-                  <a:srgbClr val="00A0B0"/>
+              <a:rPr sz="1500" b="1">
+                <a:solidFill>
+                  <a:srgbClr val="E63946"/>
                 </a:solidFill>
                 <a:latin typeface="Calibri"/>
               </a:rPr>
               <a:t>▸  </a:t>
             </a:r>
             <a:r>
-              <a:rPr sz="2000">
+              <a:rPr sz="1500">
                 <a:solidFill>
                   <a:srgbClr val="1A1A2E"/>
                 </a:solidFill>
                 <a:latin typeface="Calibri"/>
               </a:rPr>
-              <a:t>  Campi rivisualizzati (commenti, profilo)</a:t>
-            </a:r>
-          </a:p>
-          <a:p>
-            <a:pPr>
-              <a:lnSpc>
-                <a:spcPct val="150000"/>
-              </a:lnSpc>
-            </a:pPr>
-            <a:r>
-              <a:rPr sz="2000" b="1">
-                <a:solidFill>
-                  <a:srgbClr val="00A0B0"/>
-                </a:solidFill>
-                <a:latin typeface="Calibri"/>
-              </a:rPr>
-              <a:t>▸  </a:t>
-            </a:r>
-            <a:r>
-              <a:rPr sz="2000">
-                <a:solidFill>
-                  <a:srgbClr val="1A1A2E"/>
-                </a:solidFill>
-                <a:latin typeface="Calibri"/>
-              </a:rPr>
-              <a:t>  Test: &lt;script&gt;alert(1)&lt;/script&gt;</a:t>
+              <a:t/>
             </a:r>
           </a:p>
         </p:txBody>
       </p:sp>
       <p:cxnSp>
         <p:nvCxnSpPr>
-          <p:cNvPr id="5" name="Connector 4"/>
+          <p:cNvPr id="12" name="Connector 11"/>
           <p:cNvCxnSpPr/>
           <p:nvPr/>
         </p:nvCxnSpPr>
@@ -6030,14 +7687,14 @@
       </p:cxnSp>
       <p:sp>
         <p:nvSpPr>
-          <p:cNvPr id="6" name="TextBox 5"/>
+          <p:cNvPr id="13" name="TextBox 12"/>
           <p:cNvSpPr txBox="1"/>
           <p:nvPr/>
         </p:nvSpPr>
         <p:spPr>
           <a:xfrm>
             <a:off x="457200" y="6473952"/>
-            <a:ext cx="7315200" cy="320040"/>
+            <a:ext cx="7315200" cy="292608"/>
           </a:xfrm>
           <a:prstGeom prst="rect">
             <a:avLst/>
@@ -6058,21 +7715,21 @@
                 </a:solidFill>
                 <a:latin typeface="Calibri"/>
               </a:rPr>
-              <a:t>Secure Coding · Corso IFTS STEM · A. Manneschi</a:t>
-            </a:r>
-          </a:p>
-        </p:txBody>
-      </p:sp>
-      <p:sp>
-        <p:nvSpPr>
-          <p:cNvPr id="7" name="TextBox 6"/>
+              <a:t>Secure Coding · Corso IFTS STEM · A. Manneschi · 2024/2025</a:t>
+            </a:r>
+          </a:p>
+        </p:txBody>
+      </p:sp>
+      <p:sp>
+        <p:nvSpPr>
+          <p:cNvPr id="14" name="TextBox 13"/>
           <p:cNvSpPr txBox="1"/>
           <p:nvPr/>
         </p:nvSpPr>
         <p:spPr>
           <a:xfrm>
             <a:off x="10515600" y="6473952"/>
-            <a:ext cx="1188720" cy="320040"/>
+            <a:ext cx="1188720" cy="292608"/>
           </a:xfrm>
           <a:prstGeom prst="rect">
             <a:avLst/>
@@ -6093,7 +7750,7 @@
                 </a:solidFill>
                 <a:latin typeface="Calibri"/>
               </a:rPr>
-              <a:t>L8  ·  4/12</a:t>
+              <a:t>L8  ·  4/14</a:t>
             </a:r>
           </a:p>
         </p:txBody>
@@ -6189,7 +7846,7 @@
                 </a:solidFill>
                 <a:latin typeface="Calibri"/>
               </a:rPr>
-              <a:t>Cheat-sheet di campo (2)</a:t>
+              <a:t>🔍  Cheat-sheet di campo (1)</a:t>
             </a:r>
           </a:p>
         </p:txBody>
@@ -6202,7 +7859,7 @@
         </p:nvSpPr>
         <p:spPr>
           <a:xfrm>
-            <a:off x="640080" y="1005840"/>
+            <a:off x="640080" y="1097280"/>
             <a:ext cx="10972800" cy="5029200"/>
           </a:xfrm>
           <a:prstGeom prst="rect">
@@ -6220,6 +7877,9 @@
               <a:lnSpc>
                 <a:spcPct val="150000"/>
               </a:lnSpc>
+              <a:spcAft>
+                <a:spcPts val="400"/>
+              </a:spcAft>
             </a:pPr>
             <a:r>
               <a:rPr sz="2000" b="1">
@@ -6237,7 +7897,7 @@
                 </a:solidFill>
                 <a:latin typeface="Calibri"/>
               </a:rPr>
-              <a:t>Crypto Failures?</a:t>
+              <a:t>SQL Injection?</a:t>
             </a:r>
           </a:p>
           <a:p>
@@ -6245,6 +7905,9 @@
               <a:lnSpc>
                 <a:spcPct val="150000"/>
               </a:lnSpc>
+              <a:spcAft>
+                <a:spcPts val="400"/>
+              </a:spcAft>
             </a:pPr>
             <a:r>
               <a:rPr sz="2000" b="1">
@@ -6262,7 +7925,7 @@
                 </a:solidFill>
                 <a:latin typeface="Calibri"/>
               </a:rPr>
-              <a:t>  Apri il DB con DB Browser</a:t>
+              <a:t>  Form login, ricerca, parametri in WHERE</a:t>
             </a:r>
           </a:p>
           <a:p>
@@ -6270,6 +7933,9 @@
               <a:lnSpc>
                 <a:spcPct val="150000"/>
               </a:lnSpc>
+              <a:spcAft>
+                <a:spcPts val="400"/>
+              </a:spcAft>
             </a:pPr>
             <a:r>
               <a:rPr sz="2000" b="1">
@@ -6287,7 +7953,7 @@
                 </a:solidFill>
                 <a:latin typeface="Calibri"/>
               </a:rPr>
-              <a:t>  Password in chiaro? MD5? bcrypt?</a:t>
+              <a:t>  Test: '   ' OR '1'='1'   admin' --</a:t>
             </a:r>
           </a:p>
           <a:p>
@@ -6295,6 +7961,9 @@
               <a:lnSpc>
                 <a:spcPct val="150000"/>
               </a:lnSpc>
+              <a:spcAft>
+                <a:spcPts val="400"/>
+              </a:spcAft>
             </a:pPr>
             <a:r>
               <a:rPr sz="2000" b="1">
@@ -6320,6 +7989,9 @@
               <a:lnSpc>
                 <a:spcPct val="150000"/>
               </a:lnSpc>
+              <a:spcAft>
+                <a:spcPts val="400"/>
+              </a:spcAft>
             </a:pPr>
             <a:r>
               <a:rPr sz="2000" b="1">
@@ -6337,7 +8009,7 @@
                 </a:solidFill>
                 <a:latin typeface="Calibri"/>
               </a:rPr>
-              <a:t>Path Traversal?</a:t>
+              <a:t>IDOR?</a:t>
             </a:r>
           </a:p>
           <a:p>
@@ -6345,6 +8017,9 @@
               <a:lnSpc>
                 <a:spcPct val="150000"/>
               </a:lnSpc>
+              <a:spcAft>
+                <a:spcPts val="400"/>
+              </a:spcAft>
             </a:pPr>
             <a:r>
               <a:rPr sz="2000" b="1">
@@ -6362,7 +8037,7 @@
                 </a:solidFill>
                 <a:latin typeface="Calibri"/>
               </a:rPr>
-              <a:t>  Endpoint con parametro filename</a:t>
+              <a:t>  URL con ID numerici (/fattura/42)</a:t>
             </a:r>
           </a:p>
           <a:p>
@@ -6370,6 +8045,9 @@
               <a:lnSpc>
                 <a:spcPct val="150000"/>
               </a:lnSpc>
+              <a:spcAft>
+                <a:spcPts val="400"/>
+              </a:spcAft>
             </a:pPr>
             <a:r>
               <a:rPr sz="2000" b="1">
@@ -6387,7 +8065,7 @@
                 </a:solidFill>
                 <a:latin typeface="Calibri"/>
               </a:rPr>
-              <a:t>  Test: ?file=../etc/passwd</a:t>
+              <a:t>  Cambia l'ID, vedi se accedi</a:t>
             </a:r>
           </a:p>
           <a:p>
@@ -6395,6 +8073,9 @@
               <a:lnSpc>
                 <a:spcPct val="150000"/>
               </a:lnSpc>
+              <a:spcAft>
+                <a:spcPts val="400"/>
+              </a:spcAft>
             </a:pPr>
             <a:r>
               <a:rPr sz="2000" b="1">
@@ -6420,6 +8101,9 @@
               <a:lnSpc>
                 <a:spcPct val="150000"/>
               </a:lnSpc>
+              <a:spcAft>
+                <a:spcPts val="400"/>
+              </a:spcAft>
             </a:pPr>
             <a:r>
               <a:rPr sz="2000" b="1">
@@ -6437,7 +8121,7 @@
                 </a:solidFill>
                 <a:latin typeface="Calibri"/>
               </a:rPr>
-              <a:t>BONUS — Cookie / Header / CVE in dipendenze</a:t>
+              <a:t>XSS?</a:t>
             </a:r>
           </a:p>
           <a:p>
@@ -6445,6 +8129,9 @@
               <a:lnSpc>
                 <a:spcPct val="150000"/>
               </a:lnSpc>
+              <a:spcAft>
+                <a:spcPts val="400"/>
+              </a:spcAft>
             </a:pPr>
             <a:r>
               <a:rPr sz="2000" b="1">
@@ -6462,7 +8149,7 @@
                 </a:solidFill>
                 <a:latin typeface="Calibri"/>
               </a:rPr>
-              <a:t>  DevTools → Application → Cookies</a:t>
+              <a:t>  Campi rivisualizzati (commenti, profilo)</a:t>
             </a:r>
           </a:p>
           <a:p>
@@ -6470,6 +8157,9 @@
               <a:lnSpc>
                 <a:spcPct val="150000"/>
               </a:lnSpc>
+              <a:spcAft>
+                <a:spcPts val="400"/>
+              </a:spcAft>
             </a:pPr>
             <a:r>
               <a:rPr sz="2000" b="1">
@@ -6487,7 +8177,7 @@
                 </a:solidFill>
                 <a:latin typeface="Calibri"/>
               </a:rPr>
-              <a:t>  pip-audit -r requirements.txt</a:t>
+              <a:t>  Test: &lt;script&gt;alert(1)&lt;/script&gt;</a:t>
             </a:r>
           </a:p>
         </p:txBody>
@@ -6536,7 +8226,7 @@
         <p:spPr>
           <a:xfrm>
             <a:off x="457200" y="6473952"/>
-            <a:ext cx="7315200" cy="320040"/>
+            <a:ext cx="7315200" cy="292608"/>
           </a:xfrm>
           <a:prstGeom prst="rect">
             <a:avLst/>
@@ -6557,7 +8247,7 @@
                 </a:solidFill>
                 <a:latin typeface="Calibri"/>
               </a:rPr>
-              <a:t>Secure Coding · Corso IFTS STEM · A. Manneschi</a:t>
+              <a:t>Secure Coding · Corso IFTS STEM · A. Manneschi · 2024/2025</a:t>
             </a:r>
           </a:p>
         </p:txBody>
@@ -6571,7 +8261,7 @@
         <p:spPr>
           <a:xfrm>
             <a:off x="10515600" y="6473952"/>
-            <a:ext cx="1188720" cy="320040"/>
+            <a:ext cx="1188720" cy="292608"/>
           </a:xfrm>
           <a:prstGeom prst="rect">
             <a:avLst/>
@@ -6592,7 +8282,7 @@
                 </a:solidFill>
                 <a:latin typeface="Calibri"/>
               </a:rPr>
-              <a:t>L8  ·  5/12</a:t>
+              <a:t>L8  ·  5/14</a:t>
             </a:r>
           </a:p>
         </p:txBody>
@@ -6688,7 +8378,7 @@
                 </a:solidFill>
                 <a:latin typeface="Calibri"/>
               </a:rPr>
-              <a:t>Mini-report richiesto</a:t>
+              <a:t>📋  Cheat-sheet di campo (2)</a:t>
             </a:r>
           </a:p>
         </p:txBody>
@@ -6701,7 +8391,7 @@
         </p:nvSpPr>
         <p:spPr>
           <a:xfrm>
-            <a:off x="640080" y="1005840"/>
+            <a:off x="640080" y="1097280"/>
             <a:ext cx="10972800" cy="5029200"/>
           </a:xfrm>
           <a:prstGeom prst="rect">
@@ -6719,6 +8409,9 @@
               <a:lnSpc>
                 <a:spcPct val="150000"/>
               </a:lnSpc>
+              <a:spcAft>
+                <a:spcPts val="400"/>
+              </a:spcAft>
             </a:pPr>
             <a:r>
               <a:rPr sz="2000" b="1">
@@ -6736,7 +8429,7 @@
                 </a:solidFill>
                 <a:latin typeface="Calibri"/>
               </a:rPr>
-              <a:t>Almeno 3 vulnerabilità identificate</a:t>
+              <a:t>Crypto Failures?</a:t>
             </a:r>
           </a:p>
           <a:p>
@@ -6744,6 +8437,9 @@
               <a:lnSpc>
                 <a:spcPct val="150000"/>
               </a:lnSpc>
+              <a:spcAft>
+                <a:spcPts val="400"/>
+              </a:spcAft>
             </a:pPr>
             <a:r>
               <a:rPr sz="2000" b="1">
@@ -6761,7 +8457,7 @@
                 </a:solidFill>
                 <a:latin typeface="Calibri"/>
               </a:rPr>
-              <a:t>Per ognuna:</a:t>
+              <a:t>  Apri il DB con DB Browser</a:t>
             </a:r>
           </a:p>
           <a:p>
@@ -6769,6 +8465,9 @@
               <a:lnSpc>
                 <a:spcPct val="150000"/>
               </a:lnSpc>
+              <a:spcAft>
+                <a:spcPts val="400"/>
+              </a:spcAft>
             </a:pPr>
             <a:r>
               <a:rPr sz="2000" b="1">
@@ -6786,7 +8485,7 @@
                 </a:solidFill>
                 <a:latin typeface="Calibri"/>
               </a:rPr>
-              <a:t>  Descrizione (cos'è, dove si trova)</a:t>
+              <a:t>  Password in chiaro? MD5? bcrypt?</a:t>
             </a:r>
           </a:p>
           <a:p>
@@ -6794,6 +8493,9 @@
               <a:lnSpc>
                 <a:spcPct val="150000"/>
               </a:lnSpc>
+              <a:spcAft>
+                <a:spcPts val="400"/>
+              </a:spcAft>
             </a:pPr>
             <a:r>
               <a:rPr sz="2000" b="1">
@@ -6811,7 +8513,7 @@
                 </a:solidFill>
                 <a:latin typeface="Calibri"/>
               </a:rPr>
-              <a:t>  Proof of Concept funzionante</a:t>
+              <a:t/>
             </a:r>
           </a:p>
           <a:p>
@@ -6819,6 +8521,9 @@
               <a:lnSpc>
                 <a:spcPct val="150000"/>
               </a:lnSpc>
+              <a:spcAft>
+                <a:spcPts val="400"/>
+              </a:spcAft>
             </a:pPr>
             <a:r>
               <a:rPr sz="2000" b="1">
@@ -6836,7 +8541,7 @@
                 </a:solidFill>
                 <a:latin typeface="Calibri"/>
               </a:rPr>
-              <a:t>  Fix proposto in codice</a:t>
+              <a:t>Path Traversal?</a:t>
             </a:r>
           </a:p>
           <a:p>
@@ -6844,6 +8549,9 @@
               <a:lnSpc>
                 <a:spcPct val="150000"/>
               </a:lnSpc>
+              <a:spcAft>
+                <a:spcPts val="400"/>
+              </a:spcAft>
             </a:pPr>
             <a:r>
               <a:rPr sz="2000" b="1">
@@ -6861,7 +8569,7 @@
                 </a:solidFill>
                 <a:latin typeface="Calibri"/>
               </a:rPr>
-              <a:t>  Severity (Low / Medium / High / Critical)</a:t>
+              <a:t>  Endpoint con parametro filename</a:t>
             </a:r>
           </a:p>
           <a:p>
@@ -6869,6 +8577,9 @@
               <a:lnSpc>
                 <a:spcPct val="150000"/>
               </a:lnSpc>
+              <a:spcAft>
+                <a:spcPts val="400"/>
+              </a:spcAft>
             </a:pPr>
             <a:r>
               <a:rPr sz="2000" b="1">
@@ -6886,7 +8597,7 @@
                 </a:solidFill>
                 <a:latin typeface="Calibri"/>
               </a:rPr>
-              <a:t>  Categoria OWASP</a:t>
+              <a:t>  Test: ?file=../etc/passwd</a:t>
             </a:r>
           </a:p>
           <a:p>
@@ -6894,6 +8605,9 @@
               <a:lnSpc>
                 <a:spcPct val="150000"/>
               </a:lnSpc>
+              <a:spcAft>
+                <a:spcPts val="400"/>
+              </a:spcAft>
             </a:pPr>
             <a:r>
               <a:rPr sz="2000" b="1">
@@ -6911,7 +8625,7 @@
                 </a:solidFill>
                 <a:latin typeface="Calibri"/>
               </a:rPr>
-              <a:t>  Norma violata (se applicabile)</a:t>
+              <a:t/>
             </a:r>
           </a:p>
           <a:p>
@@ -6919,6 +8633,9 @@
               <a:lnSpc>
                 <a:spcPct val="150000"/>
               </a:lnSpc>
+              <a:spcAft>
+                <a:spcPts val="400"/>
+              </a:spcAft>
             </a:pPr>
             <a:r>
               <a:rPr sz="2000" b="1">
@@ -6936,7 +8653,7 @@
                 </a:solidFill>
                 <a:latin typeface="Calibri"/>
               </a:rPr>
-              <a:t/>
+              <a:t>BONUS — Cookie / Header / CVE in dipendenze</a:t>
             </a:r>
           </a:p>
           <a:p>
@@ -6944,6 +8661,9 @@
               <a:lnSpc>
                 <a:spcPct val="150000"/>
               </a:lnSpc>
+              <a:spcAft>
+                <a:spcPts val="400"/>
+              </a:spcAft>
             </a:pPr>
             <a:r>
               <a:rPr sz="2000" b="1">
@@ -6961,7 +8681,35 @@
                 </a:solidFill>
                 <a:latin typeface="Calibri"/>
               </a:rPr>
-              <a:t>Lunghezza: 1-2 pagine. Formato libero.</a:t>
+              <a:t>  DevTools → Application → Cookies</a:t>
+            </a:r>
+          </a:p>
+          <a:p>
+            <a:pPr>
+              <a:lnSpc>
+                <a:spcPct val="150000"/>
+              </a:lnSpc>
+              <a:spcAft>
+                <a:spcPts val="400"/>
+              </a:spcAft>
+            </a:pPr>
+            <a:r>
+              <a:rPr sz="2000" b="1">
+                <a:solidFill>
+                  <a:srgbClr val="00A0B0"/>
+                </a:solidFill>
+                <a:latin typeface="Calibri"/>
+              </a:rPr>
+              <a:t>▸  </a:t>
+            </a:r>
+            <a:r>
+              <a:rPr sz="2000">
+                <a:solidFill>
+                  <a:srgbClr val="1A1A2E"/>
+                </a:solidFill>
+                <a:latin typeface="Calibri"/>
+              </a:rPr>
+              <a:t>  pip-audit -r requirements.txt</a:t>
             </a:r>
           </a:p>
         </p:txBody>
@@ -7010,7 +8758,7 @@
         <p:spPr>
           <a:xfrm>
             <a:off x="457200" y="6473952"/>
-            <a:ext cx="7315200" cy="320040"/>
+            <a:ext cx="7315200" cy="292608"/>
           </a:xfrm>
           <a:prstGeom prst="rect">
             <a:avLst/>
@@ -7031,7 +8779,7 @@
                 </a:solidFill>
                 <a:latin typeface="Calibri"/>
               </a:rPr>
-              <a:t>Secure Coding · Corso IFTS STEM · A. Manneschi</a:t>
+              <a:t>Secure Coding · Corso IFTS STEM · A. Manneschi · 2024/2025</a:t>
             </a:r>
           </a:p>
         </p:txBody>
@@ -7045,7 +8793,7 @@
         <p:spPr>
           <a:xfrm>
             <a:off x="10515600" y="6473952"/>
-            <a:ext cx="1188720" cy="320040"/>
+            <a:ext cx="1188720" cy="292608"/>
           </a:xfrm>
           <a:prstGeom prst="rect">
             <a:avLst/>
@@ -7066,7 +8814,7 @@
                 </a:solidFill>
                 <a:latin typeface="Calibri"/>
               </a:rPr>
-              <a:t>L8  ·  6/12</a:t>
+              <a:t>L8  ·  6/14</a:t>
             </a:r>
           </a:p>
         </p:txBody>
@@ -7162,6 +8910,538 @@
                 </a:solidFill>
                 <a:latin typeface="Calibri"/>
               </a:rPr>
+              <a:t>📄  Output richiesto</a:t>
+            </a:r>
+          </a:p>
+        </p:txBody>
+      </p:sp>
+      <p:sp>
+        <p:nvSpPr>
+          <p:cNvPr id="4" name="TextBox 3"/>
+          <p:cNvSpPr txBox="1"/>
+          <p:nvPr/>
+        </p:nvSpPr>
+        <p:spPr>
+          <a:xfrm>
+            <a:off x="640080" y="1097280"/>
+            <a:ext cx="10972800" cy="5029200"/>
+          </a:xfrm>
+          <a:prstGeom prst="rect">
+            <a:avLst/>
+          </a:prstGeom>
+          <a:noFill/>
+        </p:spPr>
+        <p:txBody>
+          <a:bodyPr wrap="square">
+            <a:spAutoFit/>
+          </a:bodyPr>
+          <a:lstStyle/>
+          <a:p>
+            <a:pPr>
+              <a:lnSpc>
+                <a:spcPct val="150000"/>
+              </a:lnSpc>
+              <a:spcAft>
+                <a:spcPts val="400"/>
+              </a:spcAft>
+            </a:pPr>
+            <a:r>
+              <a:rPr sz="2000" b="1">
+                <a:solidFill>
+                  <a:srgbClr val="00A0B0"/>
+                </a:solidFill>
+                <a:latin typeface="Calibri"/>
+              </a:rPr>
+              <a:t>▸  </a:t>
+            </a:r>
+            <a:r>
+              <a:rPr sz="2000">
+                <a:solidFill>
+                  <a:srgbClr val="1A1A2E"/>
+                </a:solidFill>
+                <a:latin typeface="Calibri"/>
+              </a:rPr>
+              <a:t>Almeno 3 vulnerabilità identificate</a:t>
+            </a:r>
+          </a:p>
+          <a:p>
+            <a:pPr>
+              <a:lnSpc>
+                <a:spcPct val="150000"/>
+              </a:lnSpc>
+              <a:spcAft>
+                <a:spcPts val="400"/>
+              </a:spcAft>
+            </a:pPr>
+            <a:r>
+              <a:rPr sz="2000" b="1">
+                <a:solidFill>
+                  <a:srgbClr val="00A0B0"/>
+                </a:solidFill>
+                <a:latin typeface="Calibri"/>
+              </a:rPr>
+              <a:t>▸  </a:t>
+            </a:r>
+            <a:r>
+              <a:rPr sz="2000">
+                <a:solidFill>
+                  <a:srgbClr val="1A1A2E"/>
+                </a:solidFill>
+                <a:latin typeface="Calibri"/>
+              </a:rPr>
+              <a:t/>
+            </a:r>
+          </a:p>
+          <a:p>
+            <a:pPr>
+              <a:lnSpc>
+                <a:spcPct val="150000"/>
+              </a:lnSpc>
+              <a:spcAft>
+                <a:spcPts val="400"/>
+              </a:spcAft>
+            </a:pPr>
+            <a:r>
+              <a:rPr sz="2000" b="1">
+                <a:solidFill>
+                  <a:srgbClr val="00A0B0"/>
+                </a:solidFill>
+                <a:latin typeface="Calibri"/>
+              </a:rPr>
+              <a:t>▸  </a:t>
+            </a:r>
+            <a:r>
+              <a:rPr sz="2000">
+                <a:solidFill>
+                  <a:srgbClr val="1A1A2E"/>
+                </a:solidFill>
+                <a:latin typeface="Calibri"/>
+              </a:rPr>
+              <a:t>Per ognuna:</a:t>
+            </a:r>
+          </a:p>
+          <a:p>
+            <a:pPr>
+              <a:lnSpc>
+                <a:spcPct val="150000"/>
+              </a:lnSpc>
+              <a:spcAft>
+                <a:spcPts val="400"/>
+              </a:spcAft>
+            </a:pPr>
+            <a:r>
+              <a:rPr sz="2000" b="1">
+                <a:solidFill>
+                  <a:srgbClr val="00A0B0"/>
+                </a:solidFill>
+                <a:latin typeface="Calibri"/>
+              </a:rPr>
+              <a:t>▸  </a:t>
+            </a:r>
+            <a:r>
+              <a:rPr sz="2000">
+                <a:solidFill>
+                  <a:srgbClr val="1A1A2E"/>
+                </a:solidFill>
+                <a:latin typeface="Calibri"/>
+              </a:rPr>
+              <a:t>  Descrizione (cos'è, dove si trova)</a:t>
+            </a:r>
+          </a:p>
+          <a:p>
+            <a:pPr>
+              <a:lnSpc>
+                <a:spcPct val="150000"/>
+              </a:lnSpc>
+              <a:spcAft>
+                <a:spcPts val="400"/>
+              </a:spcAft>
+            </a:pPr>
+            <a:r>
+              <a:rPr sz="2000" b="1">
+                <a:solidFill>
+                  <a:srgbClr val="00A0B0"/>
+                </a:solidFill>
+                <a:latin typeface="Calibri"/>
+              </a:rPr>
+              <a:t>▸  </a:t>
+            </a:r>
+            <a:r>
+              <a:rPr sz="2000">
+                <a:solidFill>
+                  <a:srgbClr val="1A1A2E"/>
+                </a:solidFill>
+                <a:latin typeface="Calibri"/>
+              </a:rPr>
+              <a:t>  Proof of Concept funzionante</a:t>
+            </a:r>
+          </a:p>
+          <a:p>
+            <a:pPr>
+              <a:lnSpc>
+                <a:spcPct val="150000"/>
+              </a:lnSpc>
+              <a:spcAft>
+                <a:spcPts val="400"/>
+              </a:spcAft>
+            </a:pPr>
+            <a:r>
+              <a:rPr sz="2000" b="1">
+                <a:solidFill>
+                  <a:srgbClr val="00A0B0"/>
+                </a:solidFill>
+                <a:latin typeface="Calibri"/>
+              </a:rPr>
+              <a:t>▸  </a:t>
+            </a:r>
+            <a:r>
+              <a:rPr sz="2000">
+                <a:solidFill>
+                  <a:srgbClr val="1A1A2E"/>
+                </a:solidFill>
+                <a:latin typeface="Calibri"/>
+              </a:rPr>
+              <a:t>  Fix proposto in codice</a:t>
+            </a:r>
+          </a:p>
+          <a:p>
+            <a:pPr>
+              <a:lnSpc>
+                <a:spcPct val="150000"/>
+              </a:lnSpc>
+              <a:spcAft>
+                <a:spcPts val="400"/>
+              </a:spcAft>
+            </a:pPr>
+            <a:r>
+              <a:rPr sz="2000" b="1">
+                <a:solidFill>
+                  <a:srgbClr val="00A0B0"/>
+                </a:solidFill>
+                <a:latin typeface="Calibri"/>
+              </a:rPr>
+              <a:t>▸  </a:t>
+            </a:r>
+            <a:r>
+              <a:rPr sz="2000">
+                <a:solidFill>
+                  <a:srgbClr val="1A1A2E"/>
+                </a:solidFill>
+                <a:latin typeface="Calibri"/>
+              </a:rPr>
+              <a:t>  Severity (Low / Medium / High / Critical)</a:t>
+            </a:r>
+          </a:p>
+          <a:p>
+            <a:pPr>
+              <a:lnSpc>
+                <a:spcPct val="150000"/>
+              </a:lnSpc>
+              <a:spcAft>
+                <a:spcPts val="400"/>
+              </a:spcAft>
+            </a:pPr>
+            <a:r>
+              <a:rPr sz="2000" b="1">
+                <a:solidFill>
+                  <a:srgbClr val="00A0B0"/>
+                </a:solidFill>
+                <a:latin typeface="Calibri"/>
+              </a:rPr>
+              <a:t>▸  </a:t>
+            </a:r>
+            <a:r>
+              <a:rPr sz="2000">
+                <a:solidFill>
+                  <a:srgbClr val="1A1A2E"/>
+                </a:solidFill>
+                <a:latin typeface="Calibri"/>
+              </a:rPr>
+              <a:t>  Categoria OWASP</a:t>
+            </a:r>
+          </a:p>
+          <a:p>
+            <a:pPr>
+              <a:lnSpc>
+                <a:spcPct val="150000"/>
+              </a:lnSpc>
+              <a:spcAft>
+                <a:spcPts val="400"/>
+              </a:spcAft>
+            </a:pPr>
+            <a:r>
+              <a:rPr sz="2000" b="1">
+                <a:solidFill>
+                  <a:srgbClr val="00A0B0"/>
+                </a:solidFill>
+                <a:latin typeface="Calibri"/>
+              </a:rPr>
+              <a:t>▸  </a:t>
+            </a:r>
+            <a:r>
+              <a:rPr sz="2000">
+                <a:solidFill>
+                  <a:srgbClr val="1A1A2E"/>
+                </a:solidFill>
+                <a:latin typeface="Calibri"/>
+              </a:rPr>
+              <a:t>  Norma violata (se applicabile)</a:t>
+            </a:r>
+          </a:p>
+          <a:p>
+            <a:pPr>
+              <a:lnSpc>
+                <a:spcPct val="150000"/>
+              </a:lnSpc>
+              <a:spcAft>
+                <a:spcPts val="400"/>
+              </a:spcAft>
+            </a:pPr>
+            <a:r>
+              <a:rPr sz="2000" b="1">
+                <a:solidFill>
+                  <a:srgbClr val="00A0B0"/>
+                </a:solidFill>
+                <a:latin typeface="Calibri"/>
+              </a:rPr>
+              <a:t>▸  </a:t>
+            </a:r>
+            <a:r>
+              <a:rPr sz="2000">
+                <a:solidFill>
+                  <a:srgbClr val="1A1A2E"/>
+                </a:solidFill>
+                <a:latin typeface="Calibri"/>
+              </a:rPr>
+              <a:t/>
+            </a:r>
+          </a:p>
+          <a:p>
+            <a:pPr>
+              <a:lnSpc>
+                <a:spcPct val="150000"/>
+              </a:lnSpc>
+              <a:spcAft>
+                <a:spcPts val="400"/>
+              </a:spcAft>
+            </a:pPr>
+            <a:r>
+              <a:rPr sz="2000" b="1">
+                <a:solidFill>
+                  <a:srgbClr val="00A0B0"/>
+                </a:solidFill>
+                <a:latin typeface="Calibri"/>
+              </a:rPr>
+              <a:t>▸  </a:t>
+            </a:r>
+            <a:r>
+              <a:rPr sz="2000">
+                <a:solidFill>
+                  <a:srgbClr val="1A1A2E"/>
+                </a:solidFill>
+                <a:latin typeface="Calibri"/>
+              </a:rPr>
+              <a:t>Lunghezza: 1-2 pagine. Formato libero.</a:t>
+            </a:r>
+          </a:p>
+        </p:txBody>
+      </p:sp>
+      <p:cxnSp>
+        <p:nvCxnSpPr>
+          <p:cNvPr id="5" name="Connector 4"/>
+          <p:cNvCxnSpPr/>
+          <p:nvPr/>
+        </p:nvCxnSpPr>
+        <p:spPr>
+          <a:xfrm>
+            <a:off x="457200" y="6446520"/>
+            <a:ext cx="11274552" cy="0"/>
+          </a:xfrm>
+          <a:prstGeom prst="line">
+            <a:avLst/>
+          </a:prstGeom>
+          <a:ln w="19050">
+            <a:solidFill>
+              <a:srgbClr val="00A0B0"/>
+            </a:solidFill>
+          </a:ln>
+        </p:spPr>
+        <p:style>
+          <a:lnRef idx="2">
+            <a:schemeClr val="accent1"/>
+          </a:lnRef>
+          <a:fillRef idx="0">
+            <a:schemeClr val="accent1"/>
+          </a:fillRef>
+          <a:effectRef idx="1">
+            <a:schemeClr val="accent1"/>
+          </a:effectRef>
+          <a:fontRef idx="minor">
+            <a:schemeClr val="tx1"/>
+          </a:fontRef>
+        </p:style>
+      </p:cxnSp>
+      <p:sp>
+        <p:nvSpPr>
+          <p:cNvPr id="6" name="TextBox 5"/>
+          <p:cNvSpPr txBox="1"/>
+          <p:nvPr/>
+        </p:nvSpPr>
+        <p:spPr>
+          <a:xfrm>
+            <a:off x="457200" y="6473952"/>
+            <a:ext cx="7315200" cy="292608"/>
+          </a:xfrm>
+          <a:prstGeom prst="rect">
+            <a:avLst/>
+          </a:prstGeom>
+          <a:noFill/>
+        </p:spPr>
+        <p:txBody>
+          <a:bodyPr wrap="square" lIns="45720" rIns="45720" tIns="18288" bIns="18288" anchor="t">
+            <a:spAutoFit/>
+          </a:bodyPr>
+          <a:lstStyle/>
+          <a:p>
+            <a:pPr algn="l"/>
+            <a:r>
+              <a:rPr sz="1000" b="0" i="0">
+                <a:solidFill>
+                  <a:srgbClr val="6B7280"/>
+                </a:solidFill>
+                <a:latin typeface="Calibri"/>
+              </a:rPr>
+              <a:t>Secure Coding · Corso IFTS STEM · A. Manneschi · 2024/2025</a:t>
+            </a:r>
+          </a:p>
+        </p:txBody>
+      </p:sp>
+      <p:sp>
+        <p:nvSpPr>
+          <p:cNvPr id="7" name="TextBox 6"/>
+          <p:cNvSpPr txBox="1"/>
+          <p:nvPr/>
+        </p:nvSpPr>
+        <p:spPr>
+          <a:xfrm>
+            <a:off x="10515600" y="6473952"/>
+            <a:ext cx="1188720" cy="292608"/>
+          </a:xfrm>
+          <a:prstGeom prst="rect">
+            <a:avLst/>
+          </a:prstGeom>
+          <a:noFill/>
+        </p:spPr>
+        <p:txBody>
+          <a:bodyPr wrap="square" lIns="45720" rIns="45720" tIns="18288" bIns="18288" anchor="t">
+            <a:spAutoFit/>
+          </a:bodyPr>
+          <a:lstStyle/>
+          <a:p>
+            <a:pPr algn="r"/>
+            <a:r>
+              <a:rPr sz="1000" b="1" i="0">
+                <a:solidFill>
+                  <a:srgbClr val="6B7280"/>
+                </a:solidFill>
+                <a:latin typeface="Calibri"/>
+              </a:rPr>
+              <a:t>L8  ·  7/14</a:t>
+            </a:r>
+          </a:p>
+        </p:txBody>
+      </p:sp>
+    </p:spTree>
+  </p:cSld>
+  <p:clrMapOvr>
+    <a:masterClrMapping/>
+  </p:clrMapOvr>
+</p:sld>
+</file>
+
+<file path=ppt/slides/slide8.xml><?xml version="1.0" encoding="utf-8"?>
+<p:sld xmlns:a="http://schemas.openxmlformats.org/drawingml/2006/main" xmlns:p="http://schemas.openxmlformats.org/presentationml/2006/main" xmlns:r="http://schemas.openxmlformats.org/officeDocument/2006/relationships">
+  <p:cSld>
+    <p:spTree>
+      <p:nvGrpSpPr>
+        <p:cNvPr id="1" name=""/>
+        <p:cNvGrpSpPr/>
+        <p:nvPr/>
+      </p:nvGrpSpPr>
+      <p:grpSpPr/>
+      <p:sp>
+        <p:nvSpPr>
+          <p:cNvPr id="2" name="Rectangle 1"/>
+          <p:cNvSpPr/>
+          <p:nvPr/>
+        </p:nvSpPr>
+        <p:spPr>
+          <a:xfrm>
+            <a:off x="0" y="0"/>
+            <a:ext cx="12191695" cy="777240"/>
+          </a:xfrm>
+          <a:prstGeom prst="rect">
+            <a:avLst/>
+          </a:prstGeom>
+          <a:solidFill>
+            <a:srgbClr val="0F2D52"/>
+          </a:solidFill>
+          <a:ln>
+            <a:noFill/>
+          </a:ln>
+        </p:spPr>
+        <p:style>
+          <a:lnRef idx="1">
+            <a:schemeClr val="accent1"/>
+          </a:lnRef>
+          <a:fillRef idx="3">
+            <a:schemeClr val="accent1"/>
+          </a:fillRef>
+          <a:effectRef idx="2">
+            <a:schemeClr val="accent1"/>
+          </a:effectRef>
+          <a:fontRef idx="minor">
+            <a:schemeClr val="lt1"/>
+          </a:fontRef>
+        </p:style>
+        <p:txBody>
+          <a:bodyPr rtlCol="0" anchor="ctr"/>
+          <a:lstStyle/>
+          <a:p>
+            <a:pPr algn="ctr"/>
+          </a:p>
+        </p:txBody>
+      </p:sp>
+      <p:sp>
+        <p:nvSpPr>
+          <p:cNvPr id="3" name="TextBox 2"/>
+          <p:cNvSpPr txBox="1"/>
+          <p:nvPr/>
+        </p:nvSpPr>
+        <p:spPr>
+          <a:xfrm>
+            <a:off x="457200" y="164592"/>
+            <a:ext cx="10972800" cy="502920"/>
+          </a:xfrm>
+          <a:prstGeom prst="rect">
+            <a:avLst/>
+          </a:prstGeom>
+          <a:noFill/>
+        </p:spPr>
+        <p:txBody>
+          <a:bodyPr wrap="square" lIns="45720" rIns="45720" tIns="18288" bIns="18288" anchor="ctr">
+            <a:spAutoFit/>
+          </a:bodyPr>
+          <a:lstStyle/>
+          <a:p>
+            <a:pPr algn="l"/>
+            <a:r>
+              <a:rPr sz="2400" b="1" i="0">
+                <a:solidFill>
+                  <a:srgbClr val="FFFFFF"/>
+                </a:solidFill>
+                <a:latin typeface="Calibri"/>
+              </a:rPr>
               <a:t>Griglia di valutazione (su 100)</a:t>
             </a:r>
           </a:p>
@@ -7177,7 +9457,7 @@
         </p:nvGraphicFramePr>
         <p:xfrm>
           <a:off x="457200" y="1188720"/>
-          <a:ext cx="11247120" cy="5029200"/>
+          <a:ext cx="11247120" cy="4937760"/>
         </p:xfrm>
         <a:graphic>
           <a:graphicData uri="http://schemas.openxmlformats.org/drawingml/2006/table">
@@ -7189,7 +9469,7 @@
                 <a:gridCol w="5623560"/>
                 <a:gridCol w="5623560"/>
               </a:tblGrid>
-              <a:tr h="718457">
+              <a:tr h="705394">
                 <a:tc>
                   <a:txBody>
                     <a:bodyPr/>
@@ -7197,7 +9477,7 @@
                     <a:p>
                       <a:pPr algn="ctr"/>
                       <a:r>
-                        <a:rPr sz="1400" b="1">
+                        <a:rPr sz="1300" b="1">
                           <a:solidFill>
                             <a:srgbClr val="FFFFFF"/>
                           </a:solidFill>
@@ -7220,7 +9500,7 @@
                     <a:p>
                       <a:pPr algn="ctr"/>
                       <a:r>
-                        <a:rPr sz="1400" b="1">
+                        <a:rPr sz="1300" b="1">
                           <a:solidFill>
                             <a:srgbClr val="FFFFFF"/>
                           </a:solidFill>
@@ -7237,15 +9517,14 @@
                   </a:tcPr>
                 </a:tc>
               </a:tr>
-              <a:tr h="718457">
+              <a:tr h="705394">
                 <a:tc>
                   <a:txBody>
                     <a:bodyPr/>
                     <a:lstStyle/>
                     <a:p>
-                      <a:pPr algn="l"/>
                       <a:r>
-                        <a:rPr sz="1200">
+                        <a:rPr sz="1100">
                           <a:solidFill>
                             <a:srgbClr val="1A1A2E"/>
                           </a:solidFill>
@@ -7266,9 +9545,8 @@
                     <a:bodyPr/>
                     <a:lstStyle/>
                     <a:p>
-                      <a:pPr algn="l"/>
                       <a:r>
-                        <a:rPr sz="1200">
+                        <a:rPr sz="1100">
                           <a:solidFill>
                             <a:srgbClr val="1A1A2E"/>
                           </a:solidFill>
@@ -7285,15 +9563,14 @@
                   </a:tcPr>
                 </a:tc>
               </a:tr>
-              <a:tr h="718457">
+              <a:tr h="705394">
                 <a:tc>
                   <a:txBody>
                     <a:bodyPr/>
                     <a:lstStyle/>
                     <a:p>
-                      <a:pPr algn="l"/>
                       <a:r>
-                        <a:rPr sz="1200">
+                        <a:rPr sz="1100">
                           <a:solidFill>
                             <a:srgbClr val="1A1A2E"/>
                           </a:solidFill>
@@ -7314,9 +9591,8 @@
                     <a:bodyPr/>
                     <a:lstStyle/>
                     <a:p>
-                      <a:pPr algn="l"/>
                       <a:r>
-                        <a:rPr sz="1200">
+                        <a:rPr sz="1100">
                           <a:solidFill>
                             <a:srgbClr val="1A1A2E"/>
                           </a:solidFill>
@@ -7333,15 +9609,14 @@
                   </a:tcPr>
                 </a:tc>
               </a:tr>
-              <a:tr h="718457">
+              <a:tr h="705394">
                 <a:tc>
                   <a:txBody>
                     <a:bodyPr/>
                     <a:lstStyle/>
                     <a:p>
-                      <a:pPr algn="l"/>
                       <a:r>
-                        <a:rPr sz="1200">
+                        <a:rPr sz="1100">
                           <a:solidFill>
                             <a:srgbClr val="1A1A2E"/>
                           </a:solidFill>
@@ -7362,9 +9637,8 @@
                     <a:bodyPr/>
                     <a:lstStyle/>
                     <a:p>
-                      <a:pPr algn="l"/>
                       <a:r>
-                        <a:rPr sz="1200">
+                        <a:rPr sz="1100">
                           <a:solidFill>
                             <a:srgbClr val="1A1A2E"/>
                           </a:solidFill>
@@ -7381,15 +9655,14 @@
                   </a:tcPr>
                 </a:tc>
               </a:tr>
-              <a:tr h="718457">
+              <a:tr h="705394">
                 <a:tc>
                   <a:txBody>
                     <a:bodyPr/>
                     <a:lstStyle/>
                     <a:p>
-                      <a:pPr algn="l"/>
                       <a:r>
-                        <a:rPr sz="1200">
+                        <a:rPr sz="1100">
                           <a:solidFill>
                             <a:srgbClr val="1A1A2E"/>
                           </a:solidFill>
@@ -7410,9 +9683,8 @@
                     <a:bodyPr/>
                     <a:lstStyle/>
                     <a:p>
-                      <a:pPr algn="l"/>
                       <a:r>
-                        <a:rPr sz="1200">
+                        <a:rPr sz="1100">
                           <a:solidFill>
                             <a:srgbClr val="1A1A2E"/>
                           </a:solidFill>
@@ -7429,15 +9701,14 @@
                   </a:tcPr>
                 </a:tc>
               </a:tr>
-              <a:tr h="718457">
+              <a:tr h="705394">
                 <a:tc>
                   <a:txBody>
                     <a:bodyPr/>
                     <a:lstStyle/>
                     <a:p>
-                      <a:pPr algn="l"/>
                       <a:r>
-                        <a:rPr sz="1200">
+                        <a:rPr sz="1100">
                           <a:solidFill>
                             <a:srgbClr val="1A1A2E"/>
                           </a:solidFill>
@@ -7458,9 +9729,8 @@
                     <a:bodyPr/>
                     <a:lstStyle/>
                     <a:p>
-                      <a:pPr algn="l"/>
                       <a:r>
-                        <a:rPr sz="1200">
+                        <a:rPr sz="1100">
                           <a:solidFill>
                             <a:srgbClr val="1A1A2E"/>
                           </a:solidFill>
@@ -7477,15 +9747,14 @@
                   </a:tcPr>
                 </a:tc>
               </a:tr>
-              <a:tr h="718458">
+              <a:tr h="705396">
                 <a:tc>
                   <a:txBody>
                     <a:bodyPr/>
                     <a:lstStyle/>
                     <a:p>
-                      <a:pPr algn="l"/>
                       <a:r>
-                        <a:rPr sz="1200">
+                        <a:rPr sz="1100">
                           <a:solidFill>
                             <a:srgbClr val="1A1A2E"/>
                           </a:solidFill>
@@ -7506,9 +9775,8 @@
                     <a:bodyPr/>
                     <a:lstStyle/>
                     <a:p>
-                      <a:pPr algn="l"/>
                       <a:r>
-                        <a:rPr sz="1200">
+                        <a:rPr sz="1100">
                           <a:solidFill>
                             <a:srgbClr val="1A1A2E"/>
                           </a:solidFill>
@@ -7573,7 +9841,7 @@
         <p:spPr>
           <a:xfrm>
             <a:off x="457200" y="6473952"/>
-            <a:ext cx="7315200" cy="320040"/>
+            <a:ext cx="7315200" cy="292608"/>
           </a:xfrm>
           <a:prstGeom prst="rect">
             <a:avLst/>
@@ -7594,7 +9862,7 @@
                 </a:solidFill>
                 <a:latin typeface="Calibri"/>
               </a:rPr>
-              <a:t>Secure Coding · Corso IFTS STEM · A. Manneschi</a:t>
+              <a:t>Secure Coding · Corso IFTS STEM · A. Manneschi · 2024/2025</a:t>
             </a:r>
           </a:p>
         </p:txBody>
@@ -7608,7 +9876,7 @@
         <p:spPr>
           <a:xfrm>
             <a:off x="10515600" y="6473952"/>
-            <a:ext cx="1188720" cy="320040"/>
+            <a:ext cx="1188720" cy="292608"/>
           </a:xfrm>
           <a:prstGeom prst="rect">
             <a:avLst/>
@@ -7629,406 +9897,7 @@
                 </a:solidFill>
                 <a:latin typeface="Calibri"/>
               </a:rPr>
-              <a:t>L8  ·  7/12</a:t>
-            </a:r>
-          </a:p>
-        </p:txBody>
-      </p:sp>
-    </p:spTree>
-  </p:cSld>
-  <p:clrMapOvr>
-    <a:masterClrMapping/>
-  </p:clrMapOvr>
-</p:sld>
-</file>
-
-<file path=ppt/slides/slide8.xml><?xml version="1.0" encoding="utf-8"?>
-<p:sld xmlns:a="http://schemas.openxmlformats.org/drawingml/2006/main" xmlns:p="http://schemas.openxmlformats.org/presentationml/2006/main" xmlns:r="http://schemas.openxmlformats.org/officeDocument/2006/relationships">
-  <p:cSld>
-    <p:spTree>
-      <p:nvGrpSpPr>
-        <p:cNvPr id="1" name=""/>
-        <p:cNvGrpSpPr/>
-        <p:nvPr/>
-      </p:nvGrpSpPr>
-      <p:grpSpPr/>
-      <p:sp>
-        <p:nvSpPr>
-          <p:cNvPr id="2" name="Rectangle 1"/>
-          <p:cNvSpPr/>
-          <p:nvPr/>
-        </p:nvSpPr>
-        <p:spPr>
-          <a:xfrm>
-            <a:off x="0" y="0"/>
-            <a:ext cx="12191695" cy="777240"/>
-          </a:xfrm>
-          <a:prstGeom prst="rect">
-            <a:avLst/>
-          </a:prstGeom>
-          <a:solidFill>
-            <a:srgbClr val="0F2D52"/>
-          </a:solidFill>
-          <a:ln>
-            <a:noFill/>
-          </a:ln>
-        </p:spPr>
-        <p:style>
-          <a:lnRef idx="1">
-            <a:schemeClr val="accent1"/>
-          </a:lnRef>
-          <a:fillRef idx="3">
-            <a:schemeClr val="accent1"/>
-          </a:fillRef>
-          <a:effectRef idx="2">
-            <a:schemeClr val="accent1"/>
-          </a:effectRef>
-          <a:fontRef idx="minor">
-            <a:schemeClr val="lt1"/>
-          </a:fontRef>
-        </p:style>
-        <p:txBody>
-          <a:bodyPr rtlCol="0" anchor="ctr"/>
-          <a:lstStyle/>
-          <a:p>
-            <a:pPr algn="ctr"/>
-          </a:p>
-        </p:txBody>
-      </p:sp>
-      <p:sp>
-        <p:nvSpPr>
-          <p:cNvPr id="3" name="TextBox 2"/>
-          <p:cNvSpPr txBox="1"/>
-          <p:nvPr/>
-        </p:nvSpPr>
-        <p:spPr>
-          <a:xfrm>
-            <a:off x="457200" y="164592"/>
-            <a:ext cx="10972800" cy="502920"/>
-          </a:xfrm>
-          <a:prstGeom prst="rect">
-            <a:avLst/>
-          </a:prstGeom>
-          <a:noFill/>
-        </p:spPr>
-        <p:txBody>
-          <a:bodyPr wrap="square" lIns="45720" rIns="45720" tIns="18288" bIns="18288" anchor="ctr">
-            <a:spAutoFit/>
-          </a:bodyPr>
-          <a:lstStyle/>
-          <a:p>
-            <a:pPr algn="l"/>
-            <a:r>
-              <a:rPr sz="2400" b="1" i="0">
-                <a:solidFill>
-                  <a:srgbClr val="FFFFFF"/>
-                </a:solidFill>
-                <a:latin typeface="Calibri"/>
-              </a:rPr>
-              <a:t>Cosa distingue un report eccellente</a:t>
-            </a:r>
-          </a:p>
-        </p:txBody>
-      </p:sp>
-      <p:sp>
-        <p:nvSpPr>
-          <p:cNvPr id="4" name="TextBox 3"/>
-          <p:cNvSpPr txBox="1"/>
-          <p:nvPr/>
-        </p:nvSpPr>
-        <p:spPr>
-          <a:xfrm>
-            <a:off x="640080" y="1005840"/>
-            <a:ext cx="10972800" cy="5029200"/>
-          </a:xfrm>
-          <a:prstGeom prst="rect">
-            <a:avLst/>
-          </a:prstGeom>
-          <a:noFill/>
-        </p:spPr>
-        <p:txBody>
-          <a:bodyPr wrap="square">
-            <a:spAutoFit/>
-          </a:bodyPr>
-          <a:lstStyle/>
-          <a:p>
-            <a:pPr>
-              <a:lnSpc>
-                <a:spcPct val="150000"/>
-              </a:lnSpc>
-            </a:pPr>
-            <a:r>
-              <a:rPr sz="2000" b="1">
-                <a:solidFill>
-                  <a:srgbClr val="00A0B0"/>
-                </a:solidFill>
-                <a:latin typeface="Calibri"/>
-              </a:rPr>
-              <a:t>▸  </a:t>
-            </a:r>
-            <a:r>
-              <a:rPr sz="2000">
-                <a:solidFill>
-                  <a:srgbClr val="1A1A2E"/>
-                </a:solidFill>
-                <a:latin typeface="Calibri"/>
-              </a:rPr>
-              <a:t>Ha trovato almeno una vulnerabilità 'bonus'</a:t>
-            </a:r>
-          </a:p>
-          <a:p>
-            <a:pPr>
-              <a:lnSpc>
-                <a:spcPct val="150000"/>
-              </a:lnSpc>
-            </a:pPr>
-            <a:r>
-              <a:rPr sz="2000" b="1">
-                <a:solidFill>
-                  <a:srgbClr val="00A0B0"/>
-                </a:solidFill>
-                <a:latin typeface="Calibri"/>
-              </a:rPr>
-              <a:t>▸  </a:t>
-            </a:r>
-            <a:r>
-              <a:rPr sz="2000">
-                <a:solidFill>
-                  <a:srgbClr val="1A1A2E"/>
-                </a:solidFill>
-                <a:latin typeface="Calibri"/>
-              </a:rPr>
-              <a:t>  (cookie senza HttpOnly, CVE in deps, header mancanti)</a:t>
-            </a:r>
-          </a:p>
-          <a:p>
-            <a:pPr>
-              <a:lnSpc>
-                <a:spcPct val="150000"/>
-              </a:lnSpc>
-            </a:pPr>
-            <a:r>
-              <a:rPr sz="2000" b="1">
-                <a:solidFill>
-                  <a:srgbClr val="00A0B0"/>
-                </a:solidFill>
-                <a:latin typeface="Calibri"/>
-              </a:rPr>
-              <a:t>▸  </a:t>
-            </a:r>
-            <a:r>
-              <a:rPr sz="2000">
-                <a:solidFill>
-                  <a:srgbClr val="1A1A2E"/>
-                </a:solidFill>
-                <a:latin typeface="Calibri"/>
-              </a:rPr>
-              <a:t/>
-            </a:r>
-          </a:p>
-          <a:p>
-            <a:pPr>
-              <a:lnSpc>
-                <a:spcPct val="150000"/>
-              </a:lnSpc>
-            </a:pPr>
-            <a:r>
-              <a:rPr sz="2000" b="1">
-                <a:solidFill>
-                  <a:srgbClr val="00A0B0"/>
-                </a:solidFill>
-                <a:latin typeface="Calibri"/>
-              </a:rPr>
-              <a:t>▸  </a:t>
-            </a:r>
-            <a:r>
-              <a:rPr sz="2000">
-                <a:solidFill>
-                  <a:srgbClr val="1A1A2E"/>
-                </a:solidFill>
-                <a:latin typeface="Calibri"/>
-              </a:rPr>
-              <a:t>PoC riproducibili passo-passo</a:t>
-            </a:r>
-          </a:p>
-          <a:p>
-            <a:pPr>
-              <a:lnSpc>
-                <a:spcPct val="150000"/>
-              </a:lnSpc>
-            </a:pPr>
-            <a:r>
-              <a:rPr sz="2000" b="1">
-                <a:solidFill>
-                  <a:srgbClr val="00A0B0"/>
-                </a:solidFill>
-                <a:latin typeface="Calibri"/>
-              </a:rPr>
-              <a:t>▸  </a:t>
-            </a:r>
-            <a:r>
-              <a:rPr sz="2000">
-                <a:solidFill>
-                  <a:srgbClr val="1A1A2E"/>
-                </a:solidFill>
-                <a:latin typeface="Calibri"/>
-              </a:rPr>
-              <a:t>Fix non solo 'patch puntuale' ma raccomandazioni architetturali</a:t>
-            </a:r>
-          </a:p>
-          <a:p>
-            <a:pPr>
-              <a:lnSpc>
-                <a:spcPct val="150000"/>
-              </a:lnSpc>
-            </a:pPr>
-            <a:r>
-              <a:rPr sz="2000" b="1">
-                <a:solidFill>
-                  <a:srgbClr val="00A0B0"/>
-                </a:solidFill>
-                <a:latin typeface="Calibri"/>
-              </a:rPr>
-              <a:t>▸  </a:t>
-            </a:r>
-            <a:r>
-              <a:rPr sz="2000">
-                <a:solidFill>
-                  <a:srgbClr val="1A1A2E"/>
-                </a:solidFill>
-                <a:latin typeface="Calibri"/>
-              </a:rPr>
-              <a:t>Cita correttamente GDPR/NIS 2 dove applicabile</a:t>
-            </a:r>
-          </a:p>
-          <a:p>
-            <a:pPr>
-              <a:lnSpc>
-                <a:spcPct val="150000"/>
-              </a:lnSpc>
-            </a:pPr>
-            <a:r>
-              <a:rPr sz="2000" b="1">
-                <a:solidFill>
-                  <a:srgbClr val="00A0B0"/>
-                </a:solidFill>
-                <a:latin typeface="Calibri"/>
-              </a:rPr>
-              <a:t>▸  </a:t>
-            </a:r>
-            <a:r>
-              <a:rPr sz="2000">
-                <a:solidFill>
-                  <a:srgbClr val="1A1A2E"/>
-                </a:solidFill>
-                <a:latin typeface="Calibri"/>
-              </a:rPr>
-              <a:t>Executive summary chiaro in 3 frasi</a:t>
-            </a:r>
-          </a:p>
-        </p:txBody>
-      </p:sp>
-      <p:cxnSp>
-        <p:nvCxnSpPr>
-          <p:cNvPr id="5" name="Connector 4"/>
-          <p:cNvCxnSpPr/>
-          <p:nvPr/>
-        </p:nvCxnSpPr>
-        <p:spPr>
-          <a:xfrm>
-            <a:off x="457200" y="6446520"/>
-            <a:ext cx="11274552" cy="0"/>
-          </a:xfrm>
-          <a:prstGeom prst="line">
-            <a:avLst/>
-          </a:prstGeom>
-          <a:ln w="19050">
-            <a:solidFill>
-              <a:srgbClr val="00A0B0"/>
-            </a:solidFill>
-          </a:ln>
-        </p:spPr>
-        <p:style>
-          <a:lnRef idx="2">
-            <a:schemeClr val="accent1"/>
-          </a:lnRef>
-          <a:fillRef idx="0">
-            <a:schemeClr val="accent1"/>
-          </a:fillRef>
-          <a:effectRef idx="1">
-            <a:schemeClr val="accent1"/>
-          </a:effectRef>
-          <a:fontRef idx="minor">
-            <a:schemeClr val="tx1"/>
-          </a:fontRef>
-        </p:style>
-      </p:cxnSp>
-      <p:sp>
-        <p:nvSpPr>
-          <p:cNvPr id="6" name="TextBox 5"/>
-          <p:cNvSpPr txBox="1"/>
-          <p:nvPr/>
-        </p:nvSpPr>
-        <p:spPr>
-          <a:xfrm>
-            <a:off x="457200" y="6473952"/>
-            <a:ext cx="7315200" cy="320040"/>
-          </a:xfrm>
-          <a:prstGeom prst="rect">
-            <a:avLst/>
-          </a:prstGeom>
-          <a:noFill/>
-        </p:spPr>
-        <p:txBody>
-          <a:bodyPr wrap="square" lIns="45720" rIns="45720" tIns="18288" bIns="18288" anchor="t">
-            <a:spAutoFit/>
-          </a:bodyPr>
-          <a:lstStyle/>
-          <a:p>
-            <a:pPr algn="l"/>
-            <a:r>
-              <a:rPr sz="1000" b="0" i="0">
-                <a:solidFill>
-                  <a:srgbClr val="6B7280"/>
-                </a:solidFill>
-                <a:latin typeface="Calibri"/>
-              </a:rPr>
-              <a:t>Secure Coding · Corso IFTS STEM · A. Manneschi</a:t>
-            </a:r>
-          </a:p>
-        </p:txBody>
-      </p:sp>
-      <p:sp>
-        <p:nvSpPr>
-          <p:cNvPr id="7" name="TextBox 6"/>
-          <p:cNvSpPr txBox="1"/>
-          <p:nvPr/>
-        </p:nvSpPr>
-        <p:spPr>
-          <a:xfrm>
-            <a:off x="10515600" y="6473952"/>
-            <a:ext cx="1188720" cy="320040"/>
-          </a:xfrm>
-          <a:prstGeom prst="rect">
-            <a:avLst/>
-          </a:prstGeom>
-          <a:noFill/>
-        </p:spPr>
-        <p:txBody>
-          <a:bodyPr wrap="square" lIns="45720" rIns="45720" tIns="18288" bIns="18288" anchor="t">
-            <a:spAutoFit/>
-          </a:bodyPr>
-          <a:lstStyle/>
-          <a:p>
-            <a:pPr algn="r"/>
-            <a:r>
-              <a:rPr sz="1000" b="1" i="0">
-                <a:solidFill>
-                  <a:srgbClr val="6B7280"/>
-                </a:solidFill>
-                <a:latin typeface="Calibri"/>
-              </a:rPr>
-              <a:t>L8  ·  8/12</a:t>
+              <a:t>L8  ·  8/14</a:t>
             </a:r>
           </a:p>
         </p:txBody>
@@ -8060,7 +9929,7 @@
         <p:spPr>
           <a:xfrm>
             <a:off x="0" y="0"/>
-            <a:ext cx="2286000" cy="6858000"/>
+            <a:ext cx="12191695" cy="777240"/>
           </a:xfrm>
           <a:prstGeom prst="rect">
             <a:avLst/>
@@ -8102,8 +9971,8 @@
         </p:nvSpPr>
         <p:spPr>
           <a:xfrm>
-            <a:off x="274320" y="2286000"/>
-            <a:ext cx="1828800" cy="1828800"/>
+            <a:off x="457200" y="164592"/>
+            <a:ext cx="10972800" cy="502920"/>
           </a:xfrm>
           <a:prstGeom prst="rect">
             <a:avLst/>
@@ -8111,20 +9980,20 @@
           <a:noFill/>
         </p:spPr>
         <p:txBody>
-          <a:bodyPr wrap="square" lIns="45720" rIns="45720" tIns="18288" bIns="18288" anchor="t">
+          <a:bodyPr wrap="square" lIns="45720" rIns="45720" tIns="18288" bIns="18288" anchor="ctr">
             <a:spAutoFit/>
           </a:bodyPr>
           <a:lstStyle/>
           <a:p>
-            <a:pPr algn="ctr"/>
-            <a:r>
-              <a:rPr sz="12000" b="1" i="0">
-                <a:solidFill>
-                  <a:srgbClr val="00A0B0"/>
-                </a:solidFill>
-                <a:latin typeface="Calibri"/>
-              </a:rPr>
-              <a:t>Final</a:t>
+            <a:pPr algn="l"/>
+            <a:r>
+              <a:rPr sz="2400" b="1" i="0">
+                <a:solidFill>
+                  <a:srgbClr val="FFFFFF"/>
+                </a:solidFill>
+                <a:latin typeface="Calibri"/>
+              </a:rPr>
+              <a:t>⭐  Cosa distingue un report ECCELLENTE</a:t>
             </a:r>
           </a:p>
         </p:txBody>
@@ -8137,8 +10006,8 @@
         </p:nvSpPr>
         <p:spPr>
           <a:xfrm>
-            <a:off x="2743200" y="2560320"/>
-            <a:ext cx="8961120" cy="1371600"/>
+            <a:off x="640080" y="1097280"/>
+            <a:ext cx="10972800" cy="5029200"/>
           </a:xfrm>
           <a:prstGeom prst="rect">
             <a:avLst/>
@@ -8146,62 +10015,211 @@
           <a:noFill/>
         </p:spPr>
         <p:txBody>
-          <a:bodyPr wrap="square" lIns="45720" rIns="45720" tIns="18288" bIns="18288" anchor="t">
+          <a:bodyPr wrap="square">
             <a:spAutoFit/>
           </a:bodyPr>
           <a:lstStyle/>
           <a:p>
-            <a:pPr algn="l"/>
-            <a:r>
-              <a:rPr sz="4200" b="1" i="0">
-                <a:solidFill>
-                  <a:srgbClr val="0F2D52"/>
-                </a:solidFill>
-                <a:latin typeface="Calibri"/>
-              </a:rPr>
-              <a:t>Cosa porti via dal corso</a:t>
-            </a:r>
-          </a:p>
-        </p:txBody>
-      </p:sp>
-      <p:sp>
-        <p:nvSpPr>
-          <p:cNvPr id="5" name="TextBox 4"/>
-          <p:cNvSpPr txBox="1"/>
-          <p:nvPr/>
-        </p:nvSpPr>
-        <p:spPr>
-          <a:xfrm>
-            <a:off x="2743200" y="3931920"/>
-            <a:ext cx="8961120" cy="1828800"/>
-          </a:xfrm>
-          <a:prstGeom prst="rect">
-            <a:avLst/>
-          </a:prstGeom>
-          <a:noFill/>
-        </p:spPr>
-        <p:txBody>
-          <a:bodyPr wrap="square" lIns="45720" rIns="45720" tIns="18288" bIns="18288" anchor="t">
-            <a:spAutoFit/>
-          </a:bodyPr>
-          <a:lstStyle/>
-          <a:p>
-            <a:pPr algn="l"/>
-            <a:r>
-              <a:rPr sz="1800" b="0" i="1">
-                <a:solidFill>
-                  <a:srgbClr val="6B7280"/>
-                </a:solidFill>
-                <a:latin typeface="Calibri"/>
-              </a:rPr>
-              <a:t>5 idee, che ti restano tra 5 anni</a:t>
+            <a:pPr>
+              <a:lnSpc>
+                <a:spcPct val="150000"/>
+              </a:lnSpc>
+              <a:spcAft>
+                <a:spcPts val="400"/>
+              </a:spcAft>
+            </a:pPr>
+            <a:r>
+              <a:rPr sz="2000" b="1">
+                <a:solidFill>
+                  <a:srgbClr val="00A0B0"/>
+                </a:solidFill>
+                <a:latin typeface="Calibri"/>
+              </a:rPr>
+              <a:t>▸  </a:t>
+            </a:r>
+            <a:r>
+              <a:rPr sz="2000">
+                <a:solidFill>
+                  <a:srgbClr val="1A1A2E"/>
+                </a:solidFill>
+                <a:latin typeface="Calibri"/>
+              </a:rPr>
+              <a:t>Ha trovato almeno una vulnerabilità 'bonus'</a:t>
+            </a:r>
+          </a:p>
+          <a:p>
+            <a:pPr>
+              <a:lnSpc>
+                <a:spcPct val="150000"/>
+              </a:lnSpc>
+              <a:spcAft>
+                <a:spcPts val="400"/>
+              </a:spcAft>
+            </a:pPr>
+            <a:r>
+              <a:rPr sz="2000" b="1">
+                <a:solidFill>
+                  <a:srgbClr val="00A0B0"/>
+                </a:solidFill>
+                <a:latin typeface="Calibri"/>
+              </a:rPr>
+              <a:t>▸  </a:t>
+            </a:r>
+            <a:r>
+              <a:rPr sz="2000">
+                <a:solidFill>
+                  <a:srgbClr val="1A1A2E"/>
+                </a:solidFill>
+                <a:latin typeface="Calibri"/>
+              </a:rPr>
+              <a:t>  (cookie senza HttpOnly, CVE in deps, header mancanti)</a:t>
+            </a:r>
+          </a:p>
+          <a:p>
+            <a:pPr>
+              <a:lnSpc>
+                <a:spcPct val="150000"/>
+              </a:lnSpc>
+              <a:spcAft>
+                <a:spcPts val="400"/>
+              </a:spcAft>
+            </a:pPr>
+            <a:r>
+              <a:rPr sz="2000" b="1">
+                <a:solidFill>
+                  <a:srgbClr val="00A0B0"/>
+                </a:solidFill>
+                <a:latin typeface="Calibri"/>
+              </a:rPr>
+              <a:t>▸  </a:t>
+            </a:r>
+            <a:r>
+              <a:rPr sz="2000">
+                <a:solidFill>
+                  <a:srgbClr val="1A1A2E"/>
+                </a:solidFill>
+                <a:latin typeface="Calibri"/>
+              </a:rPr>
+              <a:t/>
+            </a:r>
+          </a:p>
+          <a:p>
+            <a:pPr>
+              <a:lnSpc>
+                <a:spcPct val="150000"/>
+              </a:lnSpc>
+              <a:spcAft>
+                <a:spcPts val="400"/>
+              </a:spcAft>
+            </a:pPr>
+            <a:r>
+              <a:rPr sz="2000" b="1">
+                <a:solidFill>
+                  <a:srgbClr val="00A0B0"/>
+                </a:solidFill>
+                <a:latin typeface="Calibri"/>
+              </a:rPr>
+              <a:t>▸  </a:t>
+            </a:r>
+            <a:r>
+              <a:rPr sz="2000">
+                <a:solidFill>
+                  <a:srgbClr val="1A1A2E"/>
+                </a:solidFill>
+                <a:latin typeface="Calibri"/>
+              </a:rPr>
+              <a:t>PoC riproducibili passo-passo</a:t>
+            </a:r>
+          </a:p>
+          <a:p>
+            <a:pPr>
+              <a:lnSpc>
+                <a:spcPct val="150000"/>
+              </a:lnSpc>
+              <a:spcAft>
+                <a:spcPts val="400"/>
+              </a:spcAft>
+            </a:pPr>
+            <a:r>
+              <a:rPr sz="2000" b="1">
+                <a:solidFill>
+                  <a:srgbClr val="00A0B0"/>
+                </a:solidFill>
+                <a:latin typeface="Calibri"/>
+              </a:rPr>
+              <a:t>▸  </a:t>
+            </a:r>
+            <a:r>
+              <a:rPr sz="2000">
+                <a:solidFill>
+                  <a:srgbClr val="1A1A2E"/>
+                </a:solidFill>
+                <a:latin typeface="Calibri"/>
+              </a:rPr>
+              <a:t>Fix non solo 'patch puntuale' ma raccomandazioni architetturali</a:t>
+            </a:r>
+          </a:p>
+          <a:p>
+            <a:pPr>
+              <a:lnSpc>
+                <a:spcPct val="150000"/>
+              </a:lnSpc>
+              <a:spcAft>
+                <a:spcPts val="400"/>
+              </a:spcAft>
+            </a:pPr>
+            <a:r>
+              <a:rPr sz="2000" b="1">
+                <a:solidFill>
+                  <a:srgbClr val="00A0B0"/>
+                </a:solidFill>
+                <a:latin typeface="Calibri"/>
+              </a:rPr>
+              <a:t>▸  </a:t>
+            </a:r>
+            <a:r>
+              <a:rPr sz="2000">
+                <a:solidFill>
+                  <a:srgbClr val="1A1A2E"/>
+                </a:solidFill>
+                <a:latin typeface="Calibri"/>
+              </a:rPr>
+              <a:t>Cita correttamente GDPR/NIS 2 dove applicabile</a:t>
+            </a:r>
+          </a:p>
+          <a:p>
+            <a:pPr>
+              <a:lnSpc>
+                <a:spcPct val="150000"/>
+              </a:lnSpc>
+              <a:spcAft>
+                <a:spcPts val="400"/>
+              </a:spcAft>
+            </a:pPr>
+            <a:r>
+              <a:rPr sz="2000" b="1">
+                <a:solidFill>
+                  <a:srgbClr val="00A0B0"/>
+                </a:solidFill>
+                <a:latin typeface="Calibri"/>
+              </a:rPr>
+              <a:t>▸  </a:t>
+            </a:r>
+            <a:r>
+              <a:rPr sz="2000">
+                <a:solidFill>
+                  <a:srgbClr val="1A1A2E"/>
+                </a:solidFill>
+                <a:latin typeface="Calibri"/>
+              </a:rPr>
+              <a:t>Executive summary chiaro in 3 frasi</a:t>
             </a:r>
           </a:p>
         </p:txBody>
       </p:sp>
       <p:cxnSp>
         <p:nvCxnSpPr>
-          <p:cNvPr id="6" name="Connector 5"/>
+          <p:cNvPr id="5" name="Connector 4"/>
           <p:cNvCxnSpPr/>
           <p:nvPr/>
         </p:nvCxnSpPr>
@@ -8236,14 +10254,14 @@
       </p:cxnSp>
       <p:sp>
         <p:nvSpPr>
-          <p:cNvPr id="7" name="TextBox 6"/>
+          <p:cNvPr id="6" name="TextBox 5"/>
           <p:cNvSpPr txBox="1"/>
           <p:nvPr/>
         </p:nvSpPr>
         <p:spPr>
           <a:xfrm>
             <a:off x="457200" y="6473952"/>
-            <a:ext cx="7315200" cy="320040"/>
+            <a:ext cx="7315200" cy="292608"/>
           </a:xfrm>
           <a:prstGeom prst="rect">
             <a:avLst/>
@@ -8264,21 +10282,21 @@
                 </a:solidFill>
                 <a:latin typeface="Calibri"/>
               </a:rPr>
-              <a:t>Secure Coding · Corso IFTS STEM · A. Manneschi</a:t>
-            </a:r>
-          </a:p>
-        </p:txBody>
-      </p:sp>
-      <p:sp>
-        <p:nvSpPr>
-          <p:cNvPr id="8" name="TextBox 7"/>
+              <a:t>Secure Coding · Corso IFTS STEM · A. Manneschi · 2024/2025</a:t>
+            </a:r>
+          </a:p>
+        </p:txBody>
+      </p:sp>
+      <p:sp>
+        <p:nvSpPr>
+          <p:cNvPr id="7" name="TextBox 6"/>
           <p:cNvSpPr txBox="1"/>
           <p:nvPr/>
         </p:nvSpPr>
         <p:spPr>
           <a:xfrm>
             <a:off x="10515600" y="6473952"/>
-            <a:ext cx="1188720" cy="320040"/>
+            <a:ext cx="1188720" cy="292608"/>
           </a:xfrm>
           <a:prstGeom prst="rect">
             <a:avLst/>
@@ -8299,7 +10317,7 @@
                 </a:solidFill>
                 <a:latin typeface="Calibri"/>
               </a:rPr>
-              <a:t>L8  ·  9/12</a:t>
+              <a:t>L8  ·  9/14</a:t>
             </a:r>
           </a:p>
         </p:txBody>
